--- a/slides/04-dam-phan.pptx
+++ b/slides/04-dam-phan.pptx
@@ -13970,108 +13970,14 @@
     </a:clrScheme>
     <a:fontScheme name="Office">
       <a:majorFont>
-        <a:latin typeface="Calibri Light" panose="020F0302020204030204"/>
-        <a:ea typeface=""/>
-        <a:cs typeface=""/>
-        <a:font script="Jpan" typeface="游ゴシック Light"/>
-        <a:font script="Hang" typeface="맑은 고딕"/>
-        <a:font script="Hans" typeface="等线 Light"/>
-        <a:font script="Hant" typeface="新細明體"/>
-        <a:font script="Arab" typeface="Times New Roman"/>
-        <a:font script="Hebr" typeface="Times New Roman"/>
-        <a:font script="Thai" typeface="Angsana New"/>
-        <a:font script="Ethi" typeface="Nyala"/>
-        <a:font script="Beng" typeface="Vrinda"/>
-        <a:font script="Gujr" typeface="Shruti"/>
-        <a:font script="Khmr" typeface="MoolBoran"/>
-        <a:font script="Knda" typeface="Tunga"/>
-        <a:font script="Guru" typeface="Raavi"/>
-        <a:font script="Cans" typeface="Euphemia"/>
-        <a:font script="Cher" typeface="Plantagenet Cherokee"/>
-        <a:font script="Yiii" typeface="Microsoft Yi Baiti"/>
-        <a:font script="Tibt" typeface="Microsoft Himalaya"/>
-        <a:font script="Thaa" typeface="MV Boli"/>
-        <a:font script="Deva" typeface="Mangal"/>
-        <a:font script="Telu" typeface="Gautami"/>
-        <a:font script="Taml" typeface="Latha"/>
-        <a:font script="Syrc" typeface="Estrangelo Edessa"/>
-        <a:font script="Orya" typeface="Kalinga"/>
-        <a:font script="Mlym" typeface="Kartika"/>
-        <a:font script="Laoo" typeface="DokChampa"/>
-        <a:font script="Sinh" typeface="Iskoola Pota"/>
-        <a:font script="Mong" typeface="Mongolian Baiti"/>
-        <a:font script="Viet" typeface="Times New Roman"/>
-        <a:font script="Uigh" typeface="Microsoft Uighur"/>
-        <a:font script="Geor" typeface="Sylfaen"/>
-        <a:font script="Armn" typeface="Arial"/>
-        <a:font script="Bugi" typeface="Leelawadee UI"/>
-        <a:font script="Bopo" typeface="Microsoft JhengHei"/>
-        <a:font script="Java" typeface="Javanese Text"/>
-        <a:font script="Lisu" typeface="Segoe UI"/>
-        <a:font script="Mymr" typeface="Myanmar Text"/>
-        <a:font script="Nkoo" typeface="Ebrima"/>
-        <a:font script="Olck" typeface="Nirmala UI"/>
-        <a:font script="Osma" typeface="Ebrima"/>
-        <a:font script="Phag" typeface="Phagspa"/>
-        <a:font script="Syrn" typeface="Estrangelo Edessa"/>
-        <a:font script="Syrj" typeface="Estrangelo Edessa"/>
-        <a:font script="Syre" typeface="Estrangelo Edessa"/>
-        <a:font script="Sora" typeface="Nirmala UI"/>
-        <a:font script="Tale" typeface="Microsoft Tai Le"/>
-        <a:font script="Talu" typeface="Microsoft New Tai Lue"/>
-        <a:font script="Tfng" typeface="Ebrima"/>
+        <a:latin typeface="Cambria" panose="020F0302020204030204"/>
+        <a:ea typeface="Cambria"/>
+        <a:cs typeface="Cambria"/>
       </a:majorFont>
       <a:minorFont>
         <a:latin typeface="Calibri" panose="020F0502020204030204"/>
-        <a:ea typeface=""/>
-        <a:cs typeface=""/>
-        <a:font script="Jpan" typeface="游ゴシック"/>
-        <a:font script="Hang" typeface="맑은 고딕"/>
-        <a:font script="Hans" typeface="等线"/>
-        <a:font script="Hant" typeface="新細明體"/>
-        <a:font script="Arab" typeface="Arial"/>
-        <a:font script="Hebr" typeface="Arial"/>
-        <a:font script="Thai" typeface="Cordia New"/>
-        <a:font script="Ethi" typeface="Nyala"/>
-        <a:font script="Beng" typeface="Vrinda"/>
-        <a:font script="Gujr" typeface="Shruti"/>
-        <a:font script="Khmr" typeface="DaunPenh"/>
-        <a:font script="Knda" typeface="Tunga"/>
-        <a:font script="Guru" typeface="Raavi"/>
-        <a:font script="Cans" typeface="Euphemia"/>
-        <a:font script="Cher" typeface="Plantagenet Cherokee"/>
-        <a:font script="Yiii" typeface="Microsoft Yi Baiti"/>
-        <a:font script="Tibt" typeface="Microsoft Himalaya"/>
-        <a:font script="Thaa" typeface="MV Boli"/>
-        <a:font script="Deva" typeface="Mangal"/>
-        <a:font script="Telu" typeface="Gautami"/>
-        <a:font script="Taml" typeface="Latha"/>
-        <a:font script="Syrc" typeface="Estrangelo Edessa"/>
-        <a:font script="Orya" typeface="Kalinga"/>
-        <a:font script="Mlym" typeface="Kartika"/>
-        <a:font script="Laoo" typeface="DokChampa"/>
-        <a:font script="Sinh" typeface="Iskoola Pota"/>
-        <a:font script="Mong" typeface="Mongolian Baiti"/>
-        <a:font script="Viet" typeface="Arial"/>
-        <a:font script="Uigh" typeface="Microsoft Uighur"/>
-        <a:font script="Geor" typeface="Sylfaen"/>
-        <a:font script="Armn" typeface="Arial"/>
-        <a:font script="Bugi" typeface="Leelawadee UI"/>
-        <a:font script="Bopo" typeface="Microsoft JhengHei"/>
-        <a:font script="Java" typeface="Javanese Text"/>
-        <a:font script="Lisu" typeface="Segoe UI"/>
-        <a:font script="Mymr" typeface="Myanmar Text"/>
-        <a:font script="Nkoo" typeface="Ebrima"/>
-        <a:font script="Olck" typeface="Nirmala UI"/>
-        <a:font script="Osma" typeface="Ebrima"/>
-        <a:font script="Phag" typeface="Phagspa"/>
-        <a:font script="Syrn" typeface="Estrangelo Edessa"/>
-        <a:font script="Syrj" typeface="Estrangelo Edessa"/>
-        <a:font script="Syre" typeface="Estrangelo Edessa"/>
-        <a:font script="Sora" typeface="Nirmala UI"/>
-        <a:font script="Tale" typeface="Microsoft Tai Le"/>
-        <a:font script="Talu" typeface="Microsoft New Tai Lue"/>
-        <a:font script="Tfng" typeface="Ebrima"/>
+        <a:ea typeface="Calibri"/>
+        <a:cs typeface="Calibri"/>
       </a:minorFont>
     </a:fontScheme>
     <a:fmtScheme name="Office">

--- a/slides/04-dam-phan.pptx
+++ b/slides/04-dam-phan.pptx
@@ -9126,7 +9126,7 @@
         <p:spPr>
           <a:xfrm>
             <a:off x="1051560" y="1545336"/>
-            <a:ext cx="10652760" cy="1131570"/>
+            <a:ext cx="10652760" cy="960120"/>
           </a:xfrm>
           <a:prstGeom prst="rect">
             <a:avLst/>
@@ -9178,7 +9178,7 @@
         </p:nvSpPr>
         <p:spPr>
           <a:xfrm>
-            <a:off x="502920" y="2750058"/>
+            <a:off x="502920" y="2578608"/>
             <a:ext cx="384048" cy="384048"/>
           </a:xfrm>
           <a:prstGeom prst="ellipse">
@@ -9202,7 +9202,7 @@
         </p:nvSpPr>
         <p:spPr>
           <a:xfrm>
-            <a:off x="502920" y="2750058"/>
+            <a:off x="502920" y="2578608"/>
             <a:ext cx="384048" cy="384048"/>
           </a:xfrm>
           <a:prstGeom prst="rect">
@@ -9241,8 +9241,8 @@
         </p:nvSpPr>
         <p:spPr>
           <a:xfrm>
-            <a:off x="1051560" y="2676906"/>
-            <a:ext cx="10652760" cy="1131570"/>
+            <a:off x="1051560" y="2505456"/>
+            <a:ext cx="10652760" cy="960120"/>
           </a:xfrm>
           <a:prstGeom prst="rect">
             <a:avLst/>
@@ -9294,7 +9294,7 @@
         </p:nvSpPr>
         <p:spPr>
           <a:xfrm>
-            <a:off x="502920" y="3881628"/>
+            <a:off x="502920" y="3538728"/>
             <a:ext cx="384048" cy="384048"/>
           </a:xfrm>
           <a:prstGeom prst="ellipse">
@@ -9318,7 +9318,7 @@
         </p:nvSpPr>
         <p:spPr>
           <a:xfrm>
-            <a:off x="502920" y="3881628"/>
+            <a:off x="502920" y="3538728"/>
             <a:ext cx="384048" cy="384048"/>
           </a:xfrm>
           <a:prstGeom prst="rect">
@@ -9357,8 +9357,8 @@
         </p:nvSpPr>
         <p:spPr>
           <a:xfrm>
-            <a:off x="1051560" y="3808476"/>
-            <a:ext cx="10652760" cy="1131570"/>
+            <a:off x="1051560" y="3465576"/>
+            <a:ext cx="10652760" cy="960120"/>
           </a:xfrm>
           <a:prstGeom prst="rect">
             <a:avLst/>
@@ -9410,7 +9410,7 @@
         </p:nvSpPr>
         <p:spPr>
           <a:xfrm>
-            <a:off x="502920" y="5013198"/>
+            <a:off x="502920" y="4498848"/>
             <a:ext cx="384048" cy="384048"/>
           </a:xfrm>
           <a:prstGeom prst="ellipse">
@@ -9434,7 +9434,7 @@
         </p:nvSpPr>
         <p:spPr>
           <a:xfrm>
-            <a:off x="502920" y="5013198"/>
+            <a:off x="502920" y="4498848"/>
             <a:ext cx="384048" cy="384048"/>
           </a:xfrm>
           <a:prstGeom prst="rect">
@@ -9473,8 +9473,8 @@
         </p:nvSpPr>
         <p:spPr>
           <a:xfrm>
-            <a:off x="1051560" y="4940046"/>
-            <a:ext cx="10652760" cy="1131570"/>
+            <a:off x="1051560" y="4425696"/>
+            <a:ext cx="10652760" cy="960120"/>
           </a:xfrm>
           <a:prstGeom prst="rect">
             <a:avLst/>
@@ -10114,30 +10114,354 @@
           </a:p>
         </p:txBody>
       </p:sp>
-      <p:pic>
-        <p:nvPicPr>
-          <p:cNvPr id="9" name="Picture 8" descr="c4-tien-trinh-dam-phan-nt.png"/>
-          <p:cNvPicPr>
-            <a:picLocks noChangeAspect="1"/>
-          </p:cNvPicPr>
-          <p:nvPr/>
-        </p:nvPicPr>
-        <p:blipFill>
-          <a:blip r:embed="rId4"/>
-          <a:stretch>
-            <a:fillRect/>
-          </a:stretch>
-        </p:blipFill>
-        <p:spPr>
-          <a:xfrm>
-            <a:off x="472287" y="1481328"/>
-            <a:ext cx="11247120" cy="3247152"/>
-          </a:xfrm>
-          <a:prstGeom prst="rect">
-            <a:avLst/>
-          </a:prstGeom>
-        </p:spPr>
-      </p:pic>
+      <p:sp>
+        <p:nvSpPr>
+          <p:cNvPr id="9" name="Shape 6"/>
+          <p:cNvSpPr/>
+          <p:nvPr/>
+        </p:nvSpPr>
+        <p:spPr>
+          <a:xfrm>
+            <a:off x="502920" y="1618488"/>
+            <a:ext cx="384048" cy="384048"/>
+          </a:xfrm>
+          <a:prstGeom prst="ellipse">
+            <a:avLst/>
+          </a:prstGeom>
+          <a:solidFill>
+            <a:srgbClr val="DC756A"/>
+          </a:solidFill>
+          <a:ln/>
+        </p:spPr>
+        <p:txBody>
+          <a:bodyPr/>
+          <a:p/>
+        </p:txBody>
+      </p:sp>
+      <p:sp>
+        <p:nvSpPr>
+          <p:cNvPr id="10" name="Text 7"/>
+          <p:cNvSpPr/>
+          <p:nvPr/>
+        </p:nvSpPr>
+        <p:spPr>
+          <a:xfrm>
+            <a:off x="502920" y="1618488"/>
+            <a:ext cx="384048" cy="384048"/>
+          </a:xfrm>
+          <a:prstGeom prst="rect">
+            <a:avLst/>
+          </a:prstGeom>
+          <a:noFill/>
+          <a:ln/>
+        </p:spPr>
+        <p:txBody>
+          <a:bodyPr wrap="square" lIns="0" tIns="0" rIns="0" bIns="0" rtlCol="0" anchor="ctr"/>
+          <a:lstStyle/>
+          <a:p>
+            <a:pPr algn="ctr" indent="0" marL="0">
+              <a:buNone/>
+            </a:pPr>
+            <a:r>
+              <a:rPr lang="en-US" sz="1400" b="1" dirty="0">
+                <a:solidFill>
+                  <a:srgbClr val="FFFFFF"/>
+                </a:solidFill>
+                <a:latin typeface="Calibri" pitchFamily="34" charset="0"/>
+                <a:ea typeface="Calibri" pitchFamily="34" charset="-122"/>
+                <a:cs typeface="Calibri" pitchFamily="34" charset="-120"/>
+              </a:rPr>
+              <a:t>1</a:t>
+            </a:r>
+            <a:endParaRPr lang="en-US" sz="1400" dirty="0"/>
+          </a:p>
+        </p:txBody>
+      </p:sp>
+      <p:sp>
+        <p:nvSpPr>
+          <p:cNvPr id="11" name="Text 8"/>
+          <p:cNvSpPr/>
+          <p:nvPr/>
+        </p:nvSpPr>
+        <p:spPr>
+          <a:xfrm>
+            <a:off x="1051560" y="1545336"/>
+            <a:ext cx="10652760" cy="1280160"/>
+          </a:xfrm>
+          <a:prstGeom prst="rect">
+            <a:avLst/>
+          </a:prstGeom>
+          <a:noFill/>
+          <a:ln/>
+        </p:spPr>
+        <p:txBody>
+          <a:bodyPr wrap="square" lIns="0" tIns="0" rIns="0" bIns="0" rtlCol="0" anchor="t"/>
+          <a:lstStyle/>
+          <a:p>
+            <a:pPr indent="0" marL="0">
+              <a:buNone/>
+            </a:pPr>
+            <a:r>
+              <a:rPr lang="en-US" sz="1400" b="1" dirty="0">
+                <a:solidFill>
+                  <a:srgbClr val="AC4D33"/>
+                </a:solidFill>
+                <a:latin typeface="Calibri" pitchFamily="34" charset="0"/>
+                <a:ea typeface="Calibri" pitchFamily="34" charset="-122"/>
+                <a:cs typeface="Calibri" pitchFamily="34" charset="-120"/>
+              </a:rPr>
+              <a:t>4.1  —  </a:t>
+            </a:r>
+            <a:pPr indent="0" marL="0">
+              <a:buNone/>
+            </a:pPr>
+            <a:r>
+              <a:rPr lang="en-US" sz="1350" dirty="0">
+                <a:solidFill>
+                  <a:srgbClr val="3A2B28"/>
+                </a:solidFill>
+                <a:latin typeface="Calibri" pitchFamily="34" charset="0"/>
+                <a:ea typeface="Calibri" pitchFamily="34" charset="-122"/>
+                <a:cs typeface="Calibri" pitchFamily="34" charset="-120"/>
+              </a:rPr>
+              <a:t>Khái niệm, đặc điểm và các kiểu đàm phán trong kinh doanh</a:t>
+            </a:r>
+            <a:endParaRPr lang="en-US" sz="1400" dirty="0"/>
+          </a:p>
+        </p:txBody>
+      </p:sp>
+      <p:sp>
+        <p:nvSpPr>
+          <p:cNvPr id="12" name="Shape 9"/>
+          <p:cNvSpPr/>
+          <p:nvPr/>
+        </p:nvSpPr>
+        <p:spPr>
+          <a:xfrm>
+            <a:off x="502920" y="2898648"/>
+            <a:ext cx="384048" cy="384048"/>
+          </a:xfrm>
+          <a:prstGeom prst="ellipse">
+            <a:avLst/>
+          </a:prstGeom>
+          <a:solidFill>
+            <a:srgbClr val="DC756A"/>
+          </a:solidFill>
+          <a:ln/>
+        </p:spPr>
+        <p:txBody>
+          <a:bodyPr/>
+          <a:p/>
+        </p:txBody>
+      </p:sp>
+      <p:sp>
+        <p:nvSpPr>
+          <p:cNvPr id="13" name="Text 10"/>
+          <p:cNvSpPr/>
+          <p:nvPr/>
+        </p:nvSpPr>
+        <p:spPr>
+          <a:xfrm>
+            <a:off x="502920" y="2898648"/>
+            <a:ext cx="384048" cy="384048"/>
+          </a:xfrm>
+          <a:prstGeom prst="rect">
+            <a:avLst/>
+          </a:prstGeom>
+          <a:noFill/>
+          <a:ln/>
+        </p:spPr>
+        <p:txBody>
+          <a:bodyPr wrap="square" lIns="0" tIns="0" rIns="0" bIns="0" rtlCol="0" anchor="ctr"/>
+          <a:lstStyle/>
+          <a:p>
+            <a:pPr algn="ctr" indent="0" marL="0">
+              <a:buNone/>
+            </a:pPr>
+            <a:r>
+              <a:rPr lang="en-US" sz="1400" b="1" dirty="0">
+                <a:solidFill>
+                  <a:srgbClr val="FFFFFF"/>
+                </a:solidFill>
+                <a:latin typeface="Calibri" pitchFamily="34" charset="0"/>
+                <a:ea typeface="Calibri" pitchFamily="34" charset="-122"/>
+                <a:cs typeface="Calibri" pitchFamily="34" charset="-120"/>
+              </a:rPr>
+              <a:t>2</a:t>
+            </a:r>
+            <a:endParaRPr lang="en-US" sz="1400" dirty="0"/>
+          </a:p>
+        </p:txBody>
+      </p:sp>
+      <p:sp>
+        <p:nvSpPr>
+          <p:cNvPr id="14" name="Text 11"/>
+          <p:cNvSpPr/>
+          <p:nvPr/>
+        </p:nvSpPr>
+        <p:spPr>
+          <a:xfrm>
+            <a:off x="1051560" y="2825496"/>
+            <a:ext cx="10652760" cy="1280160"/>
+          </a:xfrm>
+          <a:prstGeom prst="rect">
+            <a:avLst/>
+          </a:prstGeom>
+          <a:noFill/>
+          <a:ln/>
+        </p:spPr>
+        <p:txBody>
+          <a:bodyPr wrap="square" lIns="0" tIns="0" rIns="0" bIns="0" rtlCol="0" anchor="t"/>
+          <a:lstStyle/>
+          <a:p>
+            <a:pPr indent="0" marL="0">
+              <a:buNone/>
+            </a:pPr>
+            <a:r>
+              <a:rPr lang="en-US" sz="1400" b="1" dirty="0">
+                <a:solidFill>
+                  <a:srgbClr val="AC4D33"/>
+                </a:solidFill>
+                <a:latin typeface="Calibri" pitchFamily="34" charset="0"/>
+                <a:ea typeface="Calibri" pitchFamily="34" charset="-122"/>
+                <a:cs typeface="Calibri" pitchFamily="34" charset="-120"/>
+              </a:rPr>
+              <a:t>4.2  —  </a:t>
+            </a:r>
+            <a:pPr indent="0" marL="0">
+              <a:buNone/>
+            </a:pPr>
+            <a:r>
+              <a:rPr lang="en-US" sz="1350" dirty="0">
+                <a:solidFill>
+                  <a:srgbClr val="3A2B28"/>
+                </a:solidFill>
+                <a:latin typeface="Calibri" pitchFamily="34" charset="0"/>
+                <a:ea typeface="Calibri" pitchFamily="34" charset="-122"/>
+                <a:cs typeface="Calibri" pitchFamily="34" charset="-120"/>
+              </a:rPr>
+              <a:t>Tiến trình đàm phán qua năm giai đoạn, từ chuẩn bị đến sau đàm phán</a:t>
+            </a:r>
+            <a:endParaRPr lang="en-US" sz="1400" dirty="0"/>
+          </a:p>
+        </p:txBody>
+      </p:sp>
+      <p:sp>
+        <p:nvSpPr>
+          <p:cNvPr id="15" name="Shape 12"/>
+          <p:cNvSpPr/>
+          <p:nvPr/>
+        </p:nvSpPr>
+        <p:spPr>
+          <a:xfrm>
+            <a:off x="502920" y="4178808"/>
+            <a:ext cx="384048" cy="384048"/>
+          </a:xfrm>
+          <a:prstGeom prst="ellipse">
+            <a:avLst/>
+          </a:prstGeom>
+          <a:solidFill>
+            <a:srgbClr val="DC756A"/>
+          </a:solidFill>
+          <a:ln/>
+        </p:spPr>
+        <p:txBody>
+          <a:bodyPr/>
+          <a:p/>
+        </p:txBody>
+      </p:sp>
+      <p:sp>
+        <p:nvSpPr>
+          <p:cNvPr id="16" name="Text 13"/>
+          <p:cNvSpPr/>
+          <p:nvPr/>
+        </p:nvSpPr>
+        <p:spPr>
+          <a:xfrm>
+            <a:off x="502920" y="4178808"/>
+            <a:ext cx="384048" cy="384048"/>
+          </a:xfrm>
+          <a:prstGeom prst="rect">
+            <a:avLst/>
+          </a:prstGeom>
+          <a:noFill/>
+          <a:ln/>
+        </p:spPr>
+        <p:txBody>
+          <a:bodyPr wrap="square" lIns="0" tIns="0" rIns="0" bIns="0" rtlCol="0" anchor="ctr"/>
+          <a:lstStyle/>
+          <a:p>
+            <a:pPr algn="ctr" indent="0" marL="0">
+              <a:buNone/>
+            </a:pPr>
+            <a:r>
+              <a:rPr lang="en-US" sz="1400" b="1" dirty="0">
+                <a:solidFill>
+                  <a:srgbClr val="FFFFFF"/>
+                </a:solidFill>
+                <a:latin typeface="Calibri" pitchFamily="34" charset="0"/>
+                <a:ea typeface="Calibri" pitchFamily="34" charset="-122"/>
+                <a:cs typeface="Calibri" pitchFamily="34" charset="-120"/>
+              </a:rPr>
+              <a:t>3</a:t>
+            </a:r>
+            <a:endParaRPr lang="en-US" sz="1400" dirty="0"/>
+          </a:p>
+        </p:txBody>
+      </p:sp>
+      <p:sp>
+        <p:nvSpPr>
+          <p:cNvPr id="17" name="Text 14"/>
+          <p:cNvSpPr/>
+          <p:nvPr/>
+        </p:nvSpPr>
+        <p:spPr>
+          <a:xfrm>
+            <a:off x="1051560" y="4105656"/>
+            <a:ext cx="10652760" cy="1280160"/>
+          </a:xfrm>
+          <a:prstGeom prst="rect">
+            <a:avLst/>
+          </a:prstGeom>
+          <a:noFill/>
+          <a:ln/>
+        </p:spPr>
+        <p:txBody>
+          <a:bodyPr wrap="square" lIns="0" tIns="0" rIns="0" bIns="0" rtlCol="0" anchor="t"/>
+          <a:lstStyle/>
+          <a:p>
+            <a:pPr indent="0" marL="0">
+              <a:buNone/>
+            </a:pPr>
+            <a:r>
+              <a:rPr lang="en-US" sz="1400" b="1" dirty="0">
+                <a:solidFill>
+                  <a:srgbClr val="AC4D33"/>
+                </a:solidFill>
+                <a:latin typeface="Calibri" pitchFamily="34" charset="0"/>
+                <a:ea typeface="Calibri" pitchFamily="34" charset="-122"/>
+                <a:cs typeface="Calibri" pitchFamily="34" charset="-120"/>
+              </a:rPr>
+              <a:t>4.3  —  </a:t>
+            </a:r>
+            <a:pPr indent="0" marL="0">
+              <a:buNone/>
+            </a:pPr>
+            <a:r>
+              <a:rPr lang="en-US" sz="1350" dirty="0">
+                <a:solidFill>
+                  <a:srgbClr val="3A2B28"/>
+                </a:solidFill>
+                <a:latin typeface="Calibri" pitchFamily="34" charset="0"/>
+                <a:ea typeface="Calibri" pitchFamily="34" charset="-122"/>
+                <a:cs typeface="Calibri" pitchFamily="34" charset="-120"/>
+              </a:rPr>
+              <a:t>Các kỹ năng đàm phán và cách nhận diện chiêu trò thường gặp</a:t>
+            </a:r>
+            <a:endParaRPr lang="en-US" sz="1400" dirty="0"/>
+          </a:p>
+        </p:txBody>
+      </p:sp>
     </p:spTree>
   </p:cSld>
   <p:clrMapOvr>
@@ -12427,541 +12751,30 @@
           </a:p>
         </p:txBody>
       </p:sp>
-      <p:sp>
-        <p:nvSpPr>
-          <p:cNvPr id="9" name="Shape 6"/>
-          <p:cNvSpPr/>
-          <p:nvPr/>
-        </p:nvSpPr>
-        <p:spPr>
-          <a:xfrm>
-            <a:off x="502920" y="1600200"/>
-            <a:ext cx="2152498" cy="868680"/>
-          </a:xfrm>
-          <a:prstGeom prst="chevron">
-            <a:avLst/>
-          </a:prstGeom>
-          <a:solidFill>
-            <a:srgbClr val="AC4D33"/>
-          </a:solidFill>
-          <a:ln w="12700">
-            <a:solidFill>
-              <a:srgbClr val="FFFFFF"/>
-            </a:solidFill>
-            <a:prstDash val="solid"/>
-          </a:ln>
-        </p:spPr>
-        <p:txBody>
-          <a:bodyPr/>
-          <a:p/>
-        </p:txBody>
-      </p:sp>
-      <p:sp>
-        <p:nvSpPr>
-          <p:cNvPr id="10" name="Text 7"/>
-          <p:cNvSpPr/>
-          <p:nvPr/>
-        </p:nvSpPr>
-        <p:spPr>
-          <a:xfrm>
-            <a:off x="594360" y="1600200"/>
-            <a:ext cx="2015338" cy="868680"/>
-          </a:xfrm>
-          <a:prstGeom prst="rect">
-            <a:avLst/>
-          </a:prstGeom>
-          <a:noFill/>
-          <a:ln/>
-        </p:spPr>
-        <p:txBody>
-          <a:bodyPr wrap="square" lIns="0" tIns="0" rIns="0" bIns="0" rtlCol="0" anchor="ctr"/>
-          <a:lstStyle/>
-          <a:p>
-            <a:pPr algn="ctr" indent="0" marL="0">
-              <a:buNone/>
-            </a:pPr>
-            <a:r>
-              <a:rPr lang="en-US" sz="1250" b="1" dirty="0">
-                <a:solidFill>
-                  <a:srgbClr val="FFFFFF"/>
-                </a:solidFill>
-                <a:latin typeface="Calibri" pitchFamily="34" charset="0"/>
-                <a:ea typeface="Calibri" pitchFamily="34" charset="-122"/>
-                <a:cs typeface="Calibri" pitchFamily="34" charset="-120"/>
-              </a:rPr>
-              <a:t>CHUẨN BỊ</a:t>
-            </a:r>
-            <a:endParaRPr lang="en-US" sz="1250" dirty="0"/>
-          </a:p>
-        </p:txBody>
-      </p:sp>
-      <p:sp>
-        <p:nvSpPr>
-          <p:cNvPr id="11" name="Shape 8"/>
-          <p:cNvSpPr/>
-          <p:nvPr/>
-        </p:nvSpPr>
-        <p:spPr>
-          <a:xfrm>
-            <a:off x="2765146" y="1600200"/>
-            <a:ext cx="2152498" cy="868680"/>
-          </a:xfrm>
-          <a:prstGeom prst="chevron">
-            <a:avLst/>
-          </a:prstGeom>
-          <a:solidFill>
-            <a:srgbClr val="DC756A"/>
-          </a:solidFill>
-          <a:ln w="12700">
-            <a:solidFill>
-              <a:srgbClr val="FFFFFF"/>
-            </a:solidFill>
-            <a:prstDash val="solid"/>
-          </a:ln>
-        </p:spPr>
-        <p:txBody>
-          <a:bodyPr/>
-          <a:p/>
-        </p:txBody>
-      </p:sp>
-      <p:sp>
-        <p:nvSpPr>
-          <p:cNvPr id="12" name="Text 9"/>
-          <p:cNvSpPr/>
-          <p:nvPr/>
-        </p:nvSpPr>
-        <p:spPr>
-          <a:xfrm>
-            <a:off x="2856586" y="1600200"/>
-            <a:ext cx="2015338" cy="868680"/>
-          </a:xfrm>
-          <a:prstGeom prst="rect">
-            <a:avLst/>
-          </a:prstGeom>
-          <a:noFill/>
-          <a:ln/>
-        </p:spPr>
-        <p:txBody>
-          <a:bodyPr wrap="square" lIns="0" tIns="0" rIns="0" bIns="0" rtlCol="0" anchor="ctr"/>
-          <a:lstStyle/>
-          <a:p>
-            <a:pPr algn="ctr" indent="0" marL="0">
-              <a:buNone/>
-            </a:pPr>
-            <a:r>
-              <a:rPr lang="en-US" sz="1250" b="1" dirty="0">
-                <a:solidFill>
-                  <a:srgbClr val="FFFFFF"/>
-                </a:solidFill>
-                <a:latin typeface="Calibri" pitchFamily="34" charset="0"/>
-                <a:ea typeface="Calibri" pitchFamily="34" charset="-122"/>
-                <a:cs typeface="Calibri" pitchFamily="34" charset="-120"/>
-              </a:rPr>
-              <a:t>MỞ ĐẦU</a:t>
-            </a:r>
-            <a:endParaRPr lang="en-US" sz="1250" dirty="0"/>
-          </a:p>
-        </p:txBody>
-      </p:sp>
-      <p:sp>
-        <p:nvSpPr>
-          <p:cNvPr id="13" name="Shape 10"/>
-          <p:cNvSpPr/>
-          <p:nvPr/>
-        </p:nvSpPr>
-        <p:spPr>
-          <a:xfrm>
-            <a:off x="5027371" y="1600200"/>
-            <a:ext cx="2152498" cy="868680"/>
-          </a:xfrm>
-          <a:prstGeom prst="chevron">
-            <a:avLst/>
-          </a:prstGeom>
-          <a:solidFill>
-            <a:srgbClr val="AC4D33"/>
-          </a:solidFill>
-          <a:ln w="12700">
-            <a:solidFill>
-              <a:srgbClr val="FFFFFF"/>
-            </a:solidFill>
-            <a:prstDash val="solid"/>
-          </a:ln>
-        </p:spPr>
-        <p:txBody>
-          <a:bodyPr/>
-          <a:p/>
-        </p:txBody>
-      </p:sp>
-      <p:sp>
-        <p:nvSpPr>
-          <p:cNvPr id="14" name="Text 11"/>
-          <p:cNvSpPr/>
-          <p:nvPr/>
-        </p:nvSpPr>
-        <p:spPr>
-          <a:xfrm>
-            <a:off x="5118811" y="1600200"/>
-            <a:ext cx="2015338" cy="868680"/>
-          </a:xfrm>
-          <a:prstGeom prst="rect">
-            <a:avLst/>
-          </a:prstGeom>
-          <a:noFill/>
-          <a:ln/>
-        </p:spPr>
-        <p:txBody>
-          <a:bodyPr wrap="square" lIns="0" tIns="0" rIns="0" bIns="0" rtlCol="0" anchor="ctr"/>
-          <a:lstStyle/>
-          <a:p>
-            <a:pPr algn="ctr" indent="0" marL="0">
-              <a:buNone/>
-            </a:pPr>
-            <a:r>
-              <a:rPr lang="en-US" sz="1250" b="1" dirty="0">
-                <a:solidFill>
-                  <a:srgbClr val="FFFFFF"/>
-                </a:solidFill>
-                <a:latin typeface="Calibri" pitchFamily="34" charset="0"/>
-                <a:ea typeface="Calibri" pitchFamily="34" charset="-122"/>
-                <a:cs typeface="Calibri" pitchFamily="34" charset="-120"/>
-              </a:rPr>
-              <a:t>THƯƠNG LƯỢNG</a:t>
-            </a:r>
-            <a:endParaRPr lang="en-US" sz="1250" dirty="0"/>
-          </a:p>
-        </p:txBody>
-      </p:sp>
-      <p:sp>
-        <p:nvSpPr>
-          <p:cNvPr id="15" name="Shape 12"/>
-          <p:cNvSpPr/>
-          <p:nvPr/>
-        </p:nvSpPr>
-        <p:spPr>
-          <a:xfrm>
-            <a:off x="7289597" y="1600200"/>
-            <a:ext cx="2152498" cy="868680"/>
-          </a:xfrm>
-          <a:prstGeom prst="chevron">
-            <a:avLst/>
-          </a:prstGeom>
-          <a:solidFill>
-            <a:srgbClr val="DC756A"/>
-          </a:solidFill>
-          <a:ln w="12700">
-            <a:solidFill>
-              <a:srgbClr val="FFFFFF"/>
-            </a:solidFill>
-            <a:prstDash val="solid"/>
-          </a:ln>
-        </p:spPr>
-        <p:txBody>
-          <a:bodyPr/>
-          <a:p/>
-        </p:txBody>
-      </p:sp>
-      <p:sp>
-        <p:nvSpPr>
-          <p:cNvPr id="16" name="Text 13"/>
-          <p:cNvSpPr/>
-          <p:nvPr/>
-        </p:nvSpPr>
-        <p:spPr>
-          <a:xfrm>
-            <a:off x="7381037" y="1600200"/>
-            <a:ext cx="2015338" cy="868680"/>
-          </a:xfrm>
-          <a:prstGeom prst="rect">
-            <a:avLst/>
-          </a:prstGeom>
-          <a:noFill/>
-          <a:ln/>
-        </p:spPr>
-        <p:txBody>
-          <a:bodyPr wrap="square" lIns="0" tIns="0" rIns="0" bIns="0" rtlCol="0" anchor="ctr"/>
-          <a:lstStyle/>
-          <a:p>
-            <a:pPr algn="ctr" indent="0" marL="0">
-              <a:buNone/>
-            </a:pPr>
-            <a:r>
-              <a:rPr lang="en-US" sz="1250" b="1" dirty="0">
-                <a:solidFill>
-                  <a:srgbClr val="FFFFFF"/>
-                </a:solidFill>
-                <a:latin typeface="Calibri" pitchFamily="34" charset="0"/>
-                <a:ea typeface="Calibri" pitchFamily="34" charset="-122"/>
-                <a:cs typeface="Calibri" pitchFamily="34" charset="-120"/>
-              </a:rPr>
-              <a:t>KẾT THÚC</a:t>
-            </a:r>
-            <a:endParaRPr lang="en-US" sz="1250" dirty="0"/>
-          </a:p>
-        </p:txBody>
-      </p:sp>
-      <p:sp>
-        <p:nvSpPr>
-          <p:cNvPr id="17" name="Shape 14"/>
-          <p:cNvSpPr/>
-          <p:nvPr/>
-        </p:nvSpPr>
-        <p:spPr>
-          <a:xfrm>
-            <a:off x="9551822" y="1600200"/>
-            <a:ext cx="2152498" cy="868680"/>
-          </a:xfrm>
-          <a:prstGeom prst="chevron">
-            <a:avLst/>
-          </a:prstGeom>
-          <a:solidFill>
-            <a:srgbClr val="AC4D33"/>
-          </a:solidFill>
-          <a:ln w="12700">
-            <a:solidFill>
-              <a:srgbClr val="FFFFFF"/>
-            </a:solidFill>
-            <a:prstDash val="solid"/>
-          </a:ln>
-        </p:spPr>
-        <p:txBody>
-          <a:bodyPr/>
-          <a:p/>
-        </p:txBody>
-      </p:sp>
-      <p:sp>
-        <p:nvSpPr>
-          <p:cNvPr id="18" name="Text 15"/>
-          <p:cNvSpPr/>
-          <p:nvPr/>
-        </p:nvSpPr>
-        <p:spPr>
-          <a:xfrm>
-            <a:off x="9643262" y="1600200"/>
-            <a:ext cx="2015338" cy="868680"/>
-          </a:xfrm>
-          <a:prstGeom prst="rect">
-            <a:avLst/>
-          </a:prstGeom>
-          <a:noFill/>
-          <a:ln/>
-        </p:spPr>
-        <p:txBody>
-          <a:bodyPr wrap="square" lIns="0" tIns="0" rIns="0" bIns="0" rtlCol="0" anchor="ctr"/>
-          <a:lstStyle/>
-          <a:p>
-            <a:pPr algn="ctr" indent="0" marL="0">
-              <a:buNone/>
-            </a:pPr>
-            <a:r>
-              <a:rPr lang="en-US" sz="1250" b="1" dirty="0">
-                <a:solidFill>
-                  <a:srgbClr val="FFFFFF"/>
-                </a:solidFill>
-                <a:latin typeface="Calibri" pitchFamily="34" charset="0"/>
-                <a:ea typeface="Calibri" pitchFamily="34" charset="-122"/>
-                <a:cs typeface="Calibri" pitchFamily="34" charset="-120"/>
-              </a:rPr>
-              <a:t>SAU ĐÀM PHÁN</a:t>
-            </a:r>
-            <a:endParaRPr lang="en-US" sz="1250" dirty="0"/>
-          </a:p>
-        </p:txBody>
-      </p:sp>
-      <p:sp>
-        <p:nvSpPr>
-          <p:cNvPr id="19" name="Text 16"/>
-          <p:cNvSpPr/>
-          <p:nvPr/>
-        </p:nvSpPr>
-        <p:spPr>
-          <a:xfrm>
-            <a:off x="502920" y="2606040"/>
-            <a:ext cx="2152498" cy="2011680"/>
-          </a:xfrm>
-          <a:prstGeom prst="rect">
-            <a:avLst/>
-          </a:prstGeom>
-          <a:noFill/>
-          <a:ln/>
-        </p:spPr>
-        <p:txBody>
-          <a:bodyPr wrap="square" lIns="0" tIns="0" rIns="0" bIns="0" rtlCol="0" anchor="t"/>
-          <a:lstStyle/>
-          <a:p>
-            <a:pPr indent="0" marL="0">
-              <a:buNone/>
-            </a:pPr>
-            <a:r>
-              <a:rPr lang="en-US" sz="1150" dirty="0">
-                <a:solidFill>
-                  <a:srgbClr val="3A2B28"/>
-                </a:solidFill>
-                <a:latin typeface="Calibri" pitchFamily="34" charset="0"/>
-                <a:ea typeface="Calibri" pitchFamily="34" charset="-122"/>
-                <a:cs typeface="Calibri" pitchFamily="34" charset="-120"/>
-              </a:rPr>
-              <a:t>Mục tiêu, giới hạn, BATNA, tìm hiểu đối tác — 70% thành bại nằm ở đây.</a:t>
-            </a:r>
-            <a:endParaRPr lang="en-US" sz="1150" dirty="0"/>
-          </a:p>
-        </p:txBody>
-      </p:sp>
-      <p:sp>
-        <p:nvSpPr>
-          <p:cNvPr id="20" name="Text 17"/>
-          <p:cNvSpPr/>
-          <p:nvPr/>
-        </p:nvSpPr>
-        <p:spPr>
-          <a:xfrm>
-            <a:off x="2765146" y="2606040"/>
-            <a:ext cx="2152498" cy="2011680"/>
-          </a:xfrm>
-          <a:prstGeom prst="rect">
-            <a:avLst/>
-          </a:prstGeom>
-          <a:noFill/>
-          <a:ln/>
-        </p:spPr>
-        <p:txBody>
-          <a:bodyPr wrap="square" lIns="0" tIns="0" rIns="0" bIns="0" rtlCol="0" anchor="t"/>
-          <a:lstStyle/>
-          <a:p>
-            <a:pPr indent="0" marL="0">
-              <a:buNone/>
-            </a:pPr>
-            <a:r>
-              <a:rPr lang="en-US" sz="1150" dirty="0">
-                <a:solidFill>
-                  <a:srgbClr val="3A2B28"/>
-                </a:solidFill>
-                <a:latin typeface="Calibri" pitchFamily="34" charset="0"/>
-                <a:ea typeface="Calibri" pitchFamily="34" charset="-122"/>
-                <a:cs typeface="Calibri" pitchFamily="34" charset="-120"/>
-              </a:rPr>
-              <a:t>Tạo không khí, thăm dò, thống nhất chương trình làm việc.</a:t>
-            </a:r>
-            <a:endParaRPr lang="en-US" sz="1150" dirty="0"/>
-          </a:p>
-        </p:txBody>
-      </p:sp>
-      <p:sp>
-        <p:nvSpPr>
-          <p:cNvPr id="21" name="Text 18"/>
-          <p:cNvSpPr/>
-          <p:nvPr/>
-        </p:nvSpPr>
-        <p:spPr>
-          <a:xfrm>
-            <a:off x="5027371" y="2606040"/>
-            <a:ext cx="2152498" cy="2011680"/>
-          </a:xfrm>
-          <a:prstGeom prst="rect">
-            <a:avLst/>
-          </a:prstGeom>
-          <a:noFill/>
-          <a:ln/>
-        </p:spPr>
-        <p:txBody>
-          <a:bodyPr wrap="square" lIns="0" tIns="0" rIns="0" bIns="0" rtlCol="0" anchor="t"/>
-          <a:lstStyle/>
-          <a:p>
-            <a:pPr indent="0" marL="0">
-              <a:buNone/>
-            </a:pPr>
-            <a:r>
-              <a:rPr lang="en-US" sz="1150" dirty="0">
-                <a:solidFill>
-                  <a:srgbClr val="3A2B28"/>
-                </a:solidFill>
-                <a:latin typeface="Calibri" pitchFamily="34" charset="0"/>
-                <a:ea typeface="Calibri" pitchFamily="34" charset="-122"/>
-                <a:cs typeface="Calibri" pitchFamily="34" charset="-120"/>
-              </a:rPr>
-              <a:t>Đưa đề nghị, mặc cả, nhượng bộ, xử lý bế tắc.</a:t>
-            </a:r>
-            <a:endParaRPr lang="en-US" sz="1150" dirty="0"/>
-          </a:p>
-        </p:txBody>
-      </p:sp>
-      <p:sp>
-        <p:nvSpPr>
-          <p:cNvPr id="22" name="Text 19"/>
-          <p:cNvSpPr/>
-          <p:nvPr/>
-        </p:nvSpPr>
-        <p:spPr>
-          <a:xfrm>
-            <a:off x="7289597" y="2606040"/>
-            <a:ext cx="2152498" cy="2011680"/>
-          </a:xfrm>
-          <a:prstGeom prst="rect">
-            <a:avLst/>
-          </a:prstGeom>
-          <a:noFill/>
-          <a:ln/>
-        </p:spPr>
-        <p:txBody>
-          <a:bodyPr wrap="square" lIns="0" tIns="0" rIns="0" bIns="0" rtlCol="0" anchor="t"/>
-          <a:lstStyle/>
-          <a:p>
-            <a:pPr indent="0" marL="0">
-              <a:buNone/>
-            </a:pPr>
-            <a:r>
-              <a:rPr lang="en-US" sz="1150" dirty="0">
-                <a:solidFill>
-                  <a:srgbClr val="3A2B28"/>
-                </a:solidFill>
-                <a:latin typeface="Calibri" pitchFamily="34" charset="0"/>
-                <a:ea typeface="Calibri" pitchFamily="34" charset="-122"/>
-                <a:cs typeface="Calibri" pitchFamily="34" charset="-120"/>
-              </a:rPr>
-              <a:t>Chốt thỏa thuận, soạn và ký kết hợp đồng.</a:t>
-            </a:r>
-            <a:endParaRPr lang="en-US" sz="1150" dirty="0"/>
-          </a:p>
-        </p:txBody>
-      </p:sp>
-      <p:sp>
-        <p:nvSpPr>
-          <p:cNvPr id="23" name="Text 20"/>
-          <p:cNvSpPr/>
-          <p:nvPr/>
-        </p:nvSpPr>
-        <p:spPr>
-          <a:xfrm>
-            <a:off x="9551822" y="2606040"/>
-            <a:ext cx="2152498" cy="2011680"/>
-          </a:xfrm>
-          <a:prstGeom prst="rect">
-            <a:avLst/>
-          </a:prstGeom>
-          <a:noFill/>
-          <a:ln/>
-        </p:spPr>
-        <p:txBody>
-          <a:bodyPr wrap="square" lIns="0" tIns="0" rIns="0" bIns="0" rtlCol="0" anchor="t"/>
-          <a:lstStyle/>
-          <a:p>
-            <a:pPr indent="0" marL="0">
-              <a:buNone/>
-            </a:pPr>
-            <a:r>
-              <a:rPr lang="en-US" sz="1150" dirty="0">
-                <a:solidFill>
-                  <a:srgbClr val="3A2B28"/>
-                </a:solidFill>
-                <a:latin typeface="Calibri" pitchFamily="34" charset="0"/>
-                <a:ea typeface="Calibri" pitchFamily="34" charset="-122"/>
-                <a:cs typeface="Calibri" pitchFamily="34" charset="-120"/>
-              </a:rPr>
-              <a:t>Thực hiện cam kết, giữ quan hệ, rút kinh nghiệm.</a:t>
-            </a:r>
-            <a:endParaRPr lang="en-US" sz="1150" dirty="0"/>
-          </a:p>
-        </p:txBody>
-      </p:sp>
+      <p:pic>
+        <p:nvPicPr>
+          <p:cNvPr id="9" name="Picture 8" descr="c4-tien-trinh-dam-phan-nt.png"/>
+          <p:cNvPicPr>
+            <a:picLocks noChangeAspect="1"/>
+          </p:cNvPicPr>
+          <p:nvPr/>
+        </p:nvPicPr>
+        <p:blipFill>
+          <a:blip r:embed="rId4"/>
+          <a:stretch>
+            <a:fillRect/>
+          </a:stretch>
+        </p:blipFill>
+        <p:spPr>
+          <a:xfrm>
+            <a:off x="472287" y="1481328"/>
+            <a:ext cx="11247120" cy="4108826"/>
+          </a:xfrm>
+          <a:prstGeom prst="rect">
+            <a:avLst/>
+          </a:prstGeom>
+        </p:spPr>
+      </p:pic>
     </p:spTree>
   </p:cSld>
   <p:clrMapOvr>

--- a/slides/04-dam-phan.pptx
+++ b/slides/04-dam-phan.pptx
@@ -2717,7 +2717,7 @@
       </p:sp>
       <p:pic>
         <p:nvPicPr>
-          <p:cNvPr id="3" name="Image 0" descr="assets/logo_tron.png">    </p:cNvPr>
+          <p:cNvPr id="3" name="Image 0" descr="/home/user/comdraft/assets/img/dau-huong.png">    </p:cNvPr>
           <p:cNvPicPr>
             <a:picLocks noChangeAspect="1"/>
           </p:cNvPicPr>
@@ -2743,7 +2743,7 @@
       </p:pic>
       <p:pic>
         <p:nvPicPr>
-          <p:cNvPr id="4" name="Image 1" descr="assets/logo_ngang.png">    </p:cNvPr>
+          <p:cNvPr id="4" name="Image 1" descr="/home/user/comdraft/assets/img/lockup-huong.png">    </p:cNvPr>
           <p:cNvPicPr>
             <a:picLocks noChangeAspect="1"/>
           </p:cNvPicPr>
@@ -3051,6 +3051,1474 @@
 </file>
 
 <file path=ppt/slides/slide10.xml><?xml version="1.0" encoding="utf-8"?>
+<p:sld xmlns:a="http://schemas.openxmlformats.org/drawingml/2006/main" xmlns:r="http://schemas.openxmlformats.org/officeDocument/2006/relationships" xmlns:p="http://schemas.openxmlformats.org/presentationml/2006/main">
+  <p:cSld name="Slide 8">
+    <p:bg>
+      <p:bgPr>
+        <a:solidFill>
+          <a:srgbClr val="FDFBF8"/>
+        </a:solidFill>
+      </p:bgPr>
+    </p:bg>
+    <p:spTree>
+      <p:nvGrpSpPr>
+        <p:cNvPr id="1" name=""/>
+        <p:cNvGrpSpPr/>
+        <p:nvPr/>
+      </p:nvGrpSpPr>
+      <p:grpSpPr>
+        <a:xfrm>
+          <a:off x="0" y="0"/>
+          <a:ext cx="0" cy="0"/>
+          <a:chOff x="0" y="0"/>
+          <a:chExt cx="0" cy="0"/>
+        </a:xfrm>
+      </p:grpSpPr>
+      <p:pic>
+        <p:nvPicPr>
+          <p:cNvPr id="2" name="Image 0" descr="/home/user/comdraft/assets/img/dau-huong.png">    </p:cNvPr>
+          <p:cNvPicPr>
+            <a:picLocks noChangeAspect="1"/>
+          </p:cNvPicPr>
+          <p:nvPr/>
+        </p:nvPicPr>
+        <p:blipFill>
+          <a:blip r:embed="rId1"/>
+          <a:stretch>
+            <a:fillRect/>
+          </a:stretch>
+        </p:blipFill>
+        <p:spPr>
+          <a:xfrm>
+            <a:off x="411480" y="6327648"/>
+            <a:ext cx="384048" cy="384048"/>
+          </a:xfrm>
+          <a:prstGeom prst="rect">
+            <a:avLst/>
+          </a:prstGeom>
+        </p:spPr>
+      </p:pic>
+      <p:sp>
+        <p:nvSpPr>
+          <p:cNvPr id="3" name="Text 0"/>
+          <p:cNvSpPr/>
+          <p:nvPr/>
+        </p:nvSpPr>
+        <p:spPr>
+          <a:xfrm>
+            <a:off x="868680" y="6355080"/>
+            <a:ext cx="7498080" cy="310896"/>
+          </a:xfrm>
+          <a:prstGeom prst="rect">
+            <a:avLst/>
+          </a:prstGeom>
+          <a:noFill/>
+          <a:ln/>
+        </p:spPr>
+        <p:txBody>
+          <a:bodyPr wrap="square" lIns="0" tIns="0" rIns="0" bIns="0" rtlCol="0" anchor="ctr"/>
+          <a:lstStyle/>
+          <a:p>
+            <a:pPr indent="0" marL="0">
+              <a:buNone/>
+            </a:pPr>
+            <a:r>
+              <a:rPr lang="en-US" sz="900" dirty="0">
+                <a:solidFill>
+                  <a:srgbClr val="8A7A76"/>
+                </a:solidFill>
+                <a:latin typeface="Calibri" pitchFamily="34" charset="0"/>
+                <a:ea typeface="Calibri" pitchFamily="34" charset="-122"/>
+                <a:cs typeface="Calibri" pitchFamily="34" charset="-120"/>
+              </a:rPr>
+              <a:t>Je m'appelle Huong  •  GV. Đỗ Thùy Hương  •  EC1103</a:t>
+            </a:r>
+            <a:endParaRPr lang="en-US" sz="900" dirty="0"/>
+          </a:p>
+        </p:txBody>
+      </p:sp>
+      <p:sp>
+        <p:nvSpPr>
+          <p:cNvPr id="4" name="Text 1"/>
+          <p:cNvSpPr/>
+          <p:nvPr/>
+        </p:nvSpPr>
+        <p:spPr>
+          <a:xfrm>
+            <a:off x="8503920" y="6355080"/>
+            <a:ext cx="2743200" cy="310896"/>
+          </a:xfrm>
+          <a:prstGeom prst="rect">
+            <a:avLst/>
+          </a:prstGeom>
+          <a:noFill/>
+          <a:ln/>
+        </p:spPr>
+        <p:txBody>
+          <a:bodyPr wrap="square" lIns="0" tIns="0" rIns="0" bIns="0" rtlCol="0" anchor="ctr"/>
+          <a:lstStyle/>
+          <a:p>
+            <a:pPr algn="r" indent="0" marL="0">
+              <a:buNone/>
+            </a:pPr>
+            <a:r>
+              <a:rPr lang="en-US" sz="900" dirty="0">
+                <a:solidFill>
+                  <a:srgbClr val="8A7A76"/>
+                </a:solidFill>
+                <a:latin typeface="Calibri" pitchFamily="34" charset="0"/>
+                <a:ea typeface="Calibri" pitchFamily="34" charset="-122"/>
+                <a:cs typeface="Calibri" pitchFamily="34" charset="-120"/>
+              </a:rPr>
+              <a:t>Chương 4</a:t>
+            </a:r>
+            <a:endParaRPr lang="en-US" sz="900" dirty="0"/>
+          </a:p>
+        </p:txBody>
+      </p:sp>
+      <p:sp>
+        <p:nvSpPr>
+          <p:cNvPr id="5" name="Shape 2"/>
+          <p:cNvSpPr/>
+          <p:nvPr/>
+        </p:nvSpPr>
+        <p:spPr>
+          <a:xfrm>
+            <a:off x="11430000" y="6327648"/>
+            <a:ext cx="365760" cy="365760"/>
+          </a:xfrm>
+          <a:prstGeom prst="ellipse">
+            <a:avLst/>
+          </a:prstGeom>
+          <a:solidFill>
+            <a:srgbClr val="DC756A"/>
+          </a:solidFill>
+          <a:ln/>
+        </p:spPr>
+        <p:txBody>
+          <a:bodyPr/>
+          <a:p/>
+        </p:txBody>
+      </p:sp>
+      <p:sp>
+        <p:nvSpPr>
+          <p:cNvPr id="6" name="Text 3"/>
+          <p:cNvSpPr/>
+          <p:nvPr/>
+        </p:nvSpPr>
+        <p:spPr>
+          <a:xfrm>
+            <a:off x="11430000" y="6327648"/>
+            <a:ext cx="365760" cy="365760"/>
+          </a:xfrm>
+          <a:prstGeom prst="rect">
+            <a:avLst/>
+          </a:prstGeom>
+          <a:noFill/>
+          <a:ln/>
+        </p:spPr>
+        <p:txBody>
+          <a:bodyPr wrap="square" lIns="0" tIns="0" rIns="0" bIns="0" rtlCol="0" anchor="ctr"/>
+          <a:lstStyle/>
+          <a:p>
+            <a:pPr algn="ctr" indent="0" marL="0">
+              <a:buNone/>
+            </a:pPr>
+            <a:r>
+              <a:rPr lang="en-US" sz="1000" b="1" dirty="0">
+                <a:solidFill>
+                  <a:srgbClr val="FFFFFF"/>
+                </a:solidFill>
+                <a:latin typeface="Calibri" pitchFamily="34" charset="0"/>
+                <a:ea typeface="Calibri" pitchFamily="34" charset="-122"/>
+                <a:cs typeface="Calibri" pitchFamily="34" charset="-120"/>
+              </a:rPr>
+              <a:t>8</a:t>
+            </a:r>
+            <a:endParaRPr lang="en-US" sz="1000" dirty="0"/>
+          </a:p>
+        </p:txBody>
+      </p:sp>
+      <p:sp>
+        <p:nvSpPr>
+          <p:cNvPr id="7" name="Text 4"/>
+          <p:cNvSpPr/>
+          <p:nvPr/>
+        </p:nvSpPr>
+        <p:spPr>
+          <a:xfrm>
+            <a:off x="502920" y="310896"/>
+            <a:ext cx="11155680" cy="274320"/>
+          </a:xfrm>
+          <a:prstGeom prst="rect">
+            <a:avLst/>
+          </a:prstGeom>
+          <a:noFill/>
+          <a:ln/>
+        </p:spPr>
+        <p:txBody>
+          <a:bodyPr wrap="square" lIns="0" tIns="0" rIns="0" bIns="0" rtlCol="0" anchor="ctr"/>
+          <a:lstStyle/>
+          <a:p>
+            <a:pPr indent="0" marL="0">
+              <a:buNone/>
+            </a:pPr>
+            <a:r>
+              <a:rPr lang="en-US" sz="1100" b="1" spc="300" kern="0" dirty="0">
+                <a:solidFill>
+                  <a:srgbClr val="DC756A"/>
+                </a:solidFill>
+                <a:latin typeface="Calibri" pitchFamily="34" charset="0"/>
+                <a:ea typeface="Calibri" pitchFamily="34" charset="-122"/>
+                <a:cs typeface="Calibri" pitchFamily="34" charset="-120"/>
+              </a:rPr>
+              <a:t>4.2</a:t>
+            </a:r>
+            <a:endParaRPr lang="en-US" sz="1100" dirty="0"/>
+          </a:p>
+        </p:txBody>
+      </p:sp>
+      <p:sp>
+        <p:nvSpPr>
+          <p:cNvPr id="8" name="Text 5"/>
+          <p:cNvSpPr/>
+          <p:nvPr/>
+        </p:nvSpPr>
+        <p:spPr>
+          <a:xfrm>
+            <a:off x="502920" y="576072"/>
+            <a:ext cx="11155680" cy="713232"/>
+          </a:xfrm>
+          <a:prstGeom prst="rect">
+            <a:avLst/>
+          </a:prstGeom>
+          <a:noFill/>
+          <a:ln/>
+        </p:spPr>
+        <p:txBody>
+          <a:bodyPr wrap="square" lIns="0" tIns="0" rIns="0" bIns="0" rtlCol="0" anchor="ctr"/>
+          <a:lstStyle/>
+          <a:p>
+            <a:pPr indent="0" marL="0">
+              <a:buNone/>
+            </a:pPr>
+            <a:r>
+              <a:rPr lang="en-US" sz="2700" b="1" dirty="0">
+                <a:solidFill>
+                  <a:srgbClr val="AC4D33"/>
+                </a:solidFill>
+                <a:latin typeface="Cambria" pitchFamily="34" charset="0"/>
+                <a:ea typeface="Cambria" pitchFamily="34" charset="-122"/>
+                <a:cs typeface="Cambria" pitchFamily="34" charset="-120"/>
+              </a:rPr>
+              <a:t>Giai đoạn chuẩn bị — vũ khí quan trọng nhất</a:t>
+            </a:r>
+            <a:endParaRPr lang="en-US" sz="2700" dirty="0"/>
+          </a:p>
+        </p:txBody>
+      </p:sp>
+      <p:pic>
+        <p:nvPicPr>
+          <p:cNvPr id="9" name="Picture 8" descr="c4-batna-zopa-nt.png"/>
+          <p:cNvPicPr>
+            <a:picLocks noChangeAspect="1"/>
+          </p:cNvPicPr>
+          <p:nvPr/>
+        </p:nvPicPr>
+        <p:blipFill>
+          <a:blip r:embed="rId4"/>
+          <a:stretch>
+            <a:fillRect/>
+          </a:stretch>
+        </p:blipFill>
+        <p:spPr>
+          <a:xfrm>
+            <a:off x="875649" y="1942480"/>
+            <a:ext cx="10440397" cy="3786855"/>
+          </a:xfrm>
+          <a:prstGeom prst="rect">
+            <a:avLst/>
+          </a:prstGeom>
+        </p:spPr>
+      </p:pic>
+      <p:sp>
+        <p:nvSpPr>
+          <p:cNvPr id="10" name="TextBox 9"/>
+          <p:cNvSpPr txBox="1"/>
+          <p:nvPr/>
+        </p:nvSpPr>
+        <p:spPr>
+          <a:xfrm>
+            <a:off x="548640" y="5802487"/>
+            <a:ext cx="11109960" cy="310896"/>
+          </a:xfrm>
+          <a:prstGeom prst="rect">
+            <a:avLst/>
+          </a:prstGeom>
+          <a:noFill/>
+        </p:spPr>
+        <p:txBody>
+          <a:bodyPr wrap="square">
+            <a:spAutoFit/>
+          </a:bodyPr>
+          <a:lstStyle/>
+          <a:p>
+            <a:pPr algn="ctr"/>
+            <a:r>
+              <a:rPr sz="1150" i="1">
+                <a:solidFill>
+                  <a:srgbClr val="8A7A76"/>
+                </a:solidFill>
+                <a:latin typeface="Calibri"/>
+              </a:rPr>
+              <a:t>ZOPA hẹp hay rộng phụ thuộc vào giới hạn thật của hai bên — chuẩn bị kỹ để biết mình đang ở đâu trên trục này.</a:t>
+            </a:r>
+          </a:p>
+        </p:txBody>
+      </p:sp>
+    </p:spTree>
+  </p:cSld>
+  <p:clrMapOvr>
+    <a:masterClrMapping/>
+  </p:clrMapOvr>
+</p:sld>
+</file>
+
+<file path=ppt/slides/slide11.xml><?xml version="1.0" encoding="utf-8"?>
+<p:sld xmlns:a="http://schemas.openxmlformats.org/drawingml/2006/main" xmlns:p="http://schemas.openxmlformats.org/presentationml/2006/main" xmlns:r="http://schemas.openxmlformats.org/officeDocument/2006/relationships">
+  <p:cSld>
+    <p:spTree>
+      <p:nvGrpSpPr>
+        <p:cNvPr id="1" name=""/>
+        <p:cNvGrpSpPr/>
+        <p:nvPr/>
+      </p:nvGrpSpPr>
+      <p:grpSpPr/>
+      <p:sp>
+        <p:nvSpPr>
+          <p:cNvPr id="2" name="Rectangle 1"/>
+          <p:cNvSpPr/>
+          <p:nvPr/>
+        </p:nvSpPr>
+        <p:spPr>
+          <a:xfrm>
+            <a:off x="0" y="0"/>
+            <a:ext cx="12191695" cy="6858000"/>
+          </a:xfrm>
+          <a:prstGeom prst="rect">
+            <a:avLst/>
+          </a:prstGeom>
+          <a:solidFill>
+            <a:srgbClr val="FDFBF8"/>
+          </a:solidFill>
+          <a:ln>
+            <a:noFill/>
+          </a:ln>
+          <a:effectLst/>
+        </p:spPr>
+        <p:style>
+          <a:lnRef idx="1">
+            <a:schemeClr val="accent1"/>
+          </a:lnRef>
+          <a:fillRef idx="3">
+            <a:schemeClr val="accent1"/>
+          </a:fillRef>
+          <a:effectRef idx="2">
+            <a:schemeClr val="accent1"/>
+          </a:effectRef>
+          <a:fontRef idx="minor">
+            <a:schemeClr val="lt1"/>
+          </a:fontRef>
+        </p:style>
+        <p:txBody>
+          <a:bodyPr rtlCol="0" anchor="ctr"/>
+          <a:lstStyle/>
+          <a:p>
+            <a:pPr algn="ctr"/>
+          </a:p>
+        </p:txBody>
+      </p:sp>
+      <p:sp>
+        <p:nvSpPr>
+          <p:cNvPr id="3" name="TextBox 2"/>
+          <p:cNvSpPr txBox="1"/>
+          <p:nvPr/>
+        </p:nvSpPr>
+        <p:spPr>
+          <a:xfrm>
+            <a:off x="502920" y="292608"/>
+            <a:ext cx="11155680" cy="292608"/>
+          </a:xfrm>
+          <a:prstGeom prst="rect">
+            <a:avLst/>
+          </a:prstGeom>
+          <a:noFill/>
+        </p:spPr>
+        <p:txBody>
+          <a:bodyPr wrap="none">
+            <a:spAutoFit/>
+          </a:bodyPr>
+          <a:lstStyle/>
+          <a:p>
+            <a:r>
+              <a:rPr sz="1100" b="1">
+                <a:solidFill>
+                  <a:srgbClr val="DC756A"/>
+                </a:solidFill>
+                <a:latin typeface="Calibri"/>
+              </a:rPr>
+              <a:t>CON SỐ PHẢI NHỚ</a:t>
+            </a:r>
+          </a:p>
+        </p:txBody>
+      </p:sp>
+      <p:sp>
+        <p:nvSpPr>
+          <p:cNvPr id="4" name="TextBox 3"/>
+          <p:cNvSpPr txBox="1"/>
+          <p:nvPr/>
+        </p:nvSpPr>
+        <p:spPr>
+          <a:xfrm>
+            <a:off x="502920" y="603504"/>
+            <a:ext cx="11155680" cy="731520"/>
+          </a:xfrm>
+          <a:prstGeom prst="rect">
+            <a:avLst/>
+          </a:prstGeom>
+          <a:noFill/>
+        </p:spPr>
+        <p:txBody>
+          <a:bodyPr wrap="square">
+            <a:spAutoFit/>
+          </a:bodyPr>
+          <a:lstStyle/>
+          <a:p>
+            <a:r>
+              <a:rPr sz="2700" b="1">
+                <a:solidFill>
+                  <a:srgbClr val="3A2B28"/>
+                </a:solidFill>
+                <a:latin typeface="Cambria"/>
+              </a:rPr>
+              <a:t>Vì sao chuẩn bị lại quan trọng đến thế?</a:t>
+            </a:r>
+          </a:p>
+        </p:txBody>
+      </p:sp>
+      <p:sp>
+        <p:nvSpPr>
+          <p:cNvPr id="5" name="Rounded Rectangle 4"/>
+          <p:cNvSpPr/>
+          <p:nvPr/>
+        </p:nvSpPr>
+        <p:spPr>
+          <a:xfrm>
+            <a:off x="502920" y="1783080"/>
+            <a:ext cx="3575304" cy="3429000"/>
+          </a:xfrm>
+          <a:prstGeom prst="roundRect">
+            <a:avLst>
+              <a:gd name="adj" fmla="val 7000"/>
+            </a:avLst>
+          </a:prstGeom>
+          <a:solidFill>
+            <a:srgbClr val="FFFFFF"/>
+          </a:solidFill>
+          <a:ln w="15875">
+            <a:solidFill>
+              <a:srgbClr val="FBCEC9"/>
+            </a:solidFill>
+          </a:ln>
+          <a:effectLst/>
+        </p:spPr>
+        <p:style>
+          <a:lnRef idx="1">
+            <a:schemeClr val="accent1"/>
+          </a:lnRef>
+          <a:fillRef idx="3">
+            <a:schemeClr val="accent1"/>
+          </a:fillRef>
+          <a:effectRef idx="2">
+            <a:schemeClr val="accent1"/>
+          </a:effectRef>
+          <a:fontRef idx="minor">
+            <a:schemeClr val="lt1"/>
+          </a:fontRef>
+        </p:style>
+        <p:txBody>
+          <a:bodyPr rtlCol="0" anchor="ctr" wrap="square" lIns="182880" rIns="182880" tIns="274320" bIns="182880"/>
+          <a:lstStyle/>
+          <a:p>
+            <a:pPr algn="ctr"/>
+            <a:r>
+              <a:rPr sz="5800" b="1">
+                <a:solidFill>
+                  <a:srgbClr val="DC756A"/>
+                </a:solidFill>
+                <a:latin typeface="Cambria"/>
+              </a:rPr>
+              <a:t>70%</a:t>
+            </a:r>
+          </a:p>
+          <a:p>
+            <a:pPr algn="ctr"/>
+            <a:r>
+              <a:rPr sz="1400" b="1">
+                <a:solidFill>
+                  <a:srgbClr val="AC4D33"/>
+                </a:solidFill>
+                <a:latin typeface="Calibri"/>
+              </a:rPr>
+              <a:t>KẾT QUẢ</a:t>
+            </a:r>
+          </a:p>
+          <a:p>
+            <a:pPr algn="ctr">
+              <a:spcBef>
+                <a:spcPts val="1200"/>
+              </a:spcBef>
+            </a:pPr>
+            <a:r>
+              <a:rPr sz="1250">
+                <a:solidFill>
+                  <a:srgbClr val="3A2B28"/>
+                </a:solidFill>
+                <a:latin typeface="Calibri"/>
+              </a:rPr>
+              <a:t>được quyết định ngay từ giai đoạn chuẩn bị, trước khi hai bên ngồi vào bàn</a:t>
+            </a:r>
+          </a:p>
+        </p:txBody>
+      </p:sp>
+      <p:sp>
+        <p:nvSpPr>
+          <p:cNvPr id="6" name="Rounded Rectangle 5"/>
+          <p:cNvSpPr/>
+          <p:nvPr/>
+        </p:nvSpPr>
+        <p:spPr>
+          <a:xfrm>
+            <a:off x="4315968" y="1783080"/>
+            <a:ext cx="3575304" cy="3429000"/>
+          </a:xfrm>
+          <a:prstGeom prst="roundRect">
+            <a:avLst>
+              <a:gd name="adj" fmla="val 7000"/>
+            </a:avLst>
+          </a:prstGeom>
+          <a:solidFill>
+            <a:srgbClr val="FFFFFF"/>
+          </a:solidFill>
+          <a:ln w="15875">
+            <a:solidFill>
+              <a:srgbClr val="FBCEC9"/>
+            </a:solidFill>
+          </a:ln>
+          <a:effectLst/>
+        </p:spPr>
+        <p:style>
+          <a:lnRef idx="1">
+            <a:schemeClr val="accent1"/>
+          </a:lnRef>
+          <a:fillRef idx="3">
+            <a:schemeClr val="accent1"/>
+          </a:fillRef>
+          <a:effectRef idx="2">
+            <a:schemeClr val="accent1"/>
+          </a:effectRef>
+          <a:fontRef idx="minor">
+            <a:schemeClr val="lt1"/>
+          </a:fontRef>
+        </p:style>
+        <p:txBody>
+          <a:bodyPr rtlCol="0" anchor="ctr" wrap="square" lIns="182880" rIns="182880" tIns="274320" bIns="182880"/>
+          <a:lstStyle/>
+          <a:p>
+            <a:pPr algn="ctr"/>
+            <a:r>
+              <a:rPr sz="5800" b="1">
+                <a:solidFill>
+                  <a:srgbClr val="DC756A"/>
+                </a:solidFill>
+                <a:latin typeface="Cambria"/>
+              </a:rPr>
+              <a:t>3</a:t>
+            </a:r>
+          </a:p>
+          <a:p>
+            <a:pPr algn="ctr"/>
+            <a:r>
+              <a:rPr sz="1400" b="1">
+                <a:solidFill>
+                  <a:srgbClr val="AC4D33"/>
+                </a:solidFill>
+                <a:latin typeface="Calibri"/>
+              </a:rPr>
+              <a:t>MỨC MỤC TIÊU</a:t>
+            </a:r>
+          </a:p>
+          <a:p>
+            <a:pPr algn="ctr">
+              <a:spcBef>
+                <a:spcPts val="1200"/>
+              </a:spcBef>
+            </a:pPr>
+            <a:r>
+              <a:rPr sz="1250">
+                <a:solidFill>
+                  <a:srgbClr val="3A2B28"/>
+                </a:solidFill>
+                <a:latin typeface="Calibri"/>
+              </a:rPr>
+              <a:t>Lý tưởng – Kỳ vọng – Tối thiểu: phải viết ra giấy trước khi đàm phán</a:t>
+            </a:r>
+          </a:p>
+        </p:txBody>
+      </p:sp>
+      <p:sp>
+        <p:nvSpPr>
+          <p:cNvPr id="7" name="Rounded Rectangle 6"/>
+          <p:cNvSpPr/>
+          <p:nvPr/>
+        </p:nvSpPr>
+        <p:spPr>
+          <a:xfrm>
+            <a:off x="8129016" y="1783080"/>
+            <a:ext cx="3575304" cy="3429000"/>
+          </a:xfrm>
+          <a:prstGeom prst="roundRect">
+            <a:avLst>
+              <a:gd name="adj" fmla="val 7000"/>
+            </a:avLst>
+          </a:prstGeom>
+          <a:solidFill>
+            <a:srgbClr val="FFFFFF"/>
+          </a:solidFill>
+          <a:ln w="15875">
+            <a:solidFill>
+              <a:srgbClr val="FBCEC9"/>
+            </a:solidFill>
+          </a:ln>
+          <a:effectLst/>
+        </p:spPr>
+        <p:style>
+          <a:lnRef idx="1">
+            <a:schemeClr val="accent1"/>
+          </a:lnRef>
+          <a:fillRef idx="3">
+            <a:schemeClr val="accent1"/>
+          </a:fillRef>
+          <a:effectRef idx="2">
+            <a:schemeClr val="accent1"/>
+          </a:effectRef>
+          <a:fontRef idx="minor">
+            <a:schemeClr val="lt1"/>
+          </a:fontRef>
+        </p:style>
+        <p:txBody>
+          <a:bodyPr rtlCol="0" anchor="ctr" wrap="square" lIns="182880" rIns="182880" tIns="274320" bIns="182880"/>
+          <a:lstStyle/>
+          <a:p>
+            <a:pPr algn="ctr"/>
+            <a:r>
+              <a:rPr sz="5800" b="1">
+                <a:solidFill>
+                  <a:srgbClr val="DC756A"/>
+                </a:solidFill>
+                <a:latin typeface="Cambria"/>
+              </a:rPr>
+              <a:t>1</a:t>
+            </a:r>
+          </a:p>
+          <a:p>
+            <a:pPr algn="ctr"/>
+            <a:r>
+              <a:rPr sz="1400" b="1">
+                <a:solidFill>
+                  <a:srgbClr val="AC4D33"/>
+                </a:solidFill>
+                <a:latin typeface="Calibri"/>
+              </a:rPr>
+              <a:t>BATNA</a:t>
+            </a:r>
+          </a:p>
+          <a:p>
+            <a:pPr algn="ctr">
+              <a:spcBef>
+                <a:spcPts val="1200"/>
+              </a:spcBef>
+            </a:pPr>
+            <a:r>
+              <a:rPr sz="1250">
+                <a:solidFill>
+                  <a:srgbClr val="3A2B28"/>
+                </a:solidFill>
+                <a:latin typeface="Calibri"/>
+              </a:rPr>
+              <a:t>Phương án thay thế tốt nhất — nguồn sức mạnh thật sự trên bàn đàm phán</a:t>
+            </a:r>
+          </a:p>
+        </p:txBody>
+      </p:sp>
+      <p:sp>
+        <p:nvSpPr>
+          <p:cNvPr id="8" name="Rounded Rectangle 7"/>
+          <p:cNvSpPr/>
+          <p:nvPr/>
+        </p:nvSpPr>
+        <p:spPr>
+          <a:xfrm>
+            <a:off x="502920" y="5440680"/>
+            <a:ext cx="11201400" cy="685800"/>
+          </a:xfrm>
+          <a:prstGeom prst="roundRect">
+            <a:avLst>
+              <a:gd name="adj" fmla="val 12000"/>
+            </a:avLst>
+          </a:prstGeom>
+          <a:solidFill>
+            <a:srgbClr val="FDF1EF"/>
+          </a:solidFill>
+          <a:ln w="12700">
+            <a:solidFill>
+              <a:srgbClr val="FBCEC9"/>
+            </a:solidFill>
+          </a:ln>
+          <a:effectLst/>
+        </p:spPr>
+        <p:style>
+          <a:lnRef idx="1">
+            <a:schemeClr val="accent1"/>
+          </a:lnRef>
+          <a:fillRef idx="3">
+            <a:schemeClr val="accent1"/>
+          </a:fillRef>
+          <a:effectRef idx="2">
+            <a:schemeClr val="accent1"/>
+          </a:effectRef>
+          <a:fontRef idx="minor">
+            <a:schemeClr val="lt1"/>
+          </a:fontRef>
+        </p:style>
+        <p:txBody>
+          <a:bodyPr rtlCol="0" anchor="ctr" wrap="square" lIns="201168" rIns="201168"/>
+          <a:lstStyle/>
+          <a:p>
+            <a:pPr algn="ctr"/>
+            <a:r>
+              <a:rPr sz="1300">
+                <a:solidFill>
+                  <a:srgbClr val="3A2B28"/>
+                </a:solidFill>
+                <a:latin typeface="Calibri"/>
+              </a:rPr>
+              <a:t>Câu để đời của chương: “Không chuẩn bị chính là chuẩn bị để nhượng bộ.”</a:t>
+            </a:r>
+          </a:p>
+        </p:txBody>
+      </p:sp>
+      <p:sp>
+        <p:nvSpPr>
+          <p:cNvPr id="9" name="TextBox 8"/>
+          <p:cNvSpPr txBox="1"/>
+          <p:nvPr/>
+        </p:nvSpPr>
+        <p:spPr>
+          <a:xfrm>
+            <a:off x="502920" y="6419088"/>
+            <a:ext cx="7772400" cy="292608"/>
+          </a:xfrm>
+          <a:prstGeom prst="rect">
+            <a:avLst/>
+          </a:prstGeom>
+          <a:noFill/>
+        </p:spPr>
+        <p:txBody>
+          <a:bodyPr wrap="none">
+            <a:spAutoFit/>
+          </a:bodyPr>
+          <a:lstStyle/>
+          <a:p>
+            <a:r>
+              <a:rPr sz="900">
+                <a:solidFill>
+                  <a:srgbClr val="8A7A76"/>
+                </a:solidFill>
+                <a:latin typeface="Calibri"/>
+              </a:rPr>
+              <a:t>Je m'appelle Huong  •  GV. Đỗ Thùy Hương  •  EC1103</a:t>
+            </a:r>
+          </a:p>
+        </p:txBody>
+      </p:sp>
+      <p:sp>
+        <p:nvSpPr>
+          <p:cNvPr id="10" name="TextBox 9"/>
+          <p:cNvSpPr txBox="1"/>
+          <p:nvPr/>
+        </p:nvSpPr>
+        <p:spPr>
+          <a:xfrm>
+            <a:off x="9326880" y="6419088"/>
+            <a:ext cx="1920240" cy="292608"/>
+          </a:xfrm>
+          <a:prstGeom prst="rect">
+            <a:avLst/>
+          </a:prstGeom>
+          <a:noFill/>
+        </p:spPr>
+        <p:txBody>
+          <a:bodyPr wrap="none">
+            <a:spAutoFit/>
+          </a:bodyPr>
+          <a:lstStyle/>
+          <a:p>
+            <a:pPr algn="r"/>
+            <a:r>
+              <a:rPr sz="900">
+                <a:solidFill>
+                  <a:srgbClr val="8A7A76"/>
+                </a:solidFill>
+                <a:latin typeface="Calibri"/>
+              </a:rPr>
+              <a:t>Chương 4</a:t>
+            </a:r>
+          </a:p>
+        </p:txBody>
+      </p:sp>
+    </p:spTree>
+  </p:cSld>
+  <p:clrMapOvr>
+    <a:masterClrMapping/>
+  </p:clrMapOvr>
+</p:sld>
+</file>
+
+<file path=ppt/slides/slide12.xml><?xml version="1.0" encoding="utf-8"?>
+<p:sld xmlns:a="http://schemas.openxmlformats.org/drawingml/2006/main" xmlns:r="http://schemas.openxmlformats.org/officeDocument/2006/relationships" xmlns:p="http://schemas.openxmlformats.org/presentationml/2006/main">
+  <p:cSld name="Slide 9">
+    <p:bg>
+      <p:bgPr>
+        <a:solidFill>
+          <a:srgbClr val="FDFBF8"/>
+        </a:solidFill>
+      </p:bgPr>
+    </p:bg>
+    <p:spTree>
+      <p:nvGrpSpPr>
+        <p:cNvPr id="1" name=""/>
+        <p:cNvGrpSpPr/>
+        <p:nvPr/>
+      </p:nvGrpSpPr>
+      <p:grpSpPr>
+        <a:xfrm>
+          <a:off x="0" y="0"/>
+          <a:ext cx="0" cy="0"/>
+          <a:chOff x="0" y="0"/>
+          <a:chExt cx="0" cy="0"/>
+        </a:xfrm>
+      </p:grpSpPr>
+      <p:pic>
+        <p:nvPicPr>
+          <p:cNvPr id="2" name="Image 0" descr="/home/user/comdraft/assets/img/dau-huong.png">    </p:cNvPr>
+          <p:cNvPicPr>
+            <a:picLocks noChangeAspect="1"/>
+          </p:cNvPicPr>
+          <p:nvPr/>
+        </p:nvPicPr>
+        <p:blipFill>
+          <a:blip r:embed="rId1"/>
+          <a:stretch>
+            <a:fillRect/>
+          </a:stretch>
+        </p:blipFill>
+        <p:spPr>
+          <a:xfrm>
+            <a:off x="411480" y="6327648"/>
+            <a:ext cx="384048" cy="384048"/>
+          </a:xfrm>
+          <a:prstGeom prst="rect">
+            <a:avLst/>
+          </a:prstGeom>
+        </p:spPr>
+      </p:pic>
+      <p:sp>
+        <p:nvSpPr>
+          <p:cNvPr id="3" name="Text 0"/>
+          <p:cNvSpPr/>
+          <p:nvPr/>
+        </p:nvSpPr>
+        <p:spPr>
+          <a:xfrm>
+            <a:off x="868680" y="6355080"/>
+            <a:ext cx="7498080" cy="310896"/>
+          </a:xfrm>
+          <a:prstGeom prst="rect">
+            <a:avLst/>
+          </a:prstGeom>
+          <a:noFill/>
+          <a:ln/>
+        </p:spPr>
+        <p:txBody>
+          <a:bodyPr wrap="square" lIns="0" tIns="0" rIns="0" bIns="0" rtlCol="0" anchor="ctr"/>
+          <a:lstStyle/>
+          <a:p>
+            <a:pPr indent="0" marL="0">
+              <a:buNone/>
+            </a:pPr>
+            <a:r>
+              <a:rPr lang="en-US" sz="900" dirty="0">
+                <a:solidFill>
+                  <a:srgbClr val="8A7A76"/>
+                </a:solidFill>
+                <a:latin typeface="Calibri" pitchFamily="34" charset="0"/>
+                <a:ea typeface="Calibri" pitchFamily="34" charset="-122"/>
+                <a:cs typeface="Calibri" pitchFamily="34" charset="-120"/>
+              </a:rPr>
+              <a:t>Je m'appelle Huong  •  GV. Đỗ Thùy Hương  •  EC1103</a:t>
+            </a:r>
+            <a:endParaRPr lang="en-US" sz="900" dirty="0"/>
+          </a:p>
+        </p:txBody>
+      </p:sp>
+      <p:sp>
+        <p:nvSpPr>
+          <p:cNvPr id="4" name="Text 1"/>
+          <p:cNvSpPr/>
+          <p:nvPr/>
+        </p:nvSpPr>
+        <p:spPr>
+          <a:xfrm>
+            <a:off x="8503920" y="6355080"/>
+            <a:ext cx="2743200" cy="310896"/>
+          </a:xfrm>
+          <a:prstGeom prst="rect">
+            <a:avLst/>
+          </a:prstGeom>
+          <a:noFill/>
+          <a:ln/>
+        </p:spPr>
+        <p:txBody>
+          <a:bodyPr wrap="square" lIns="0" tIns="0" rIns="0" bIns="0" rtlCol="0" anchor="ctr"/>
+          <a:lstStyle/>
+          <a:p>
+            <a:pPr algn="r" indent="0" marL="0">
+              <a:buNone/>
+            </a:pPr>
+            <a:r>
+              <a:rPr lang="en-US" sz="900" dirty="0">
+                <a:solidFill>
+                  <a:srgbClr val="8A7A76"/>
+                </a:solidFill>
+                <a:latin typeface="Calibri" pitchFamily="34" charset="0"/>
+                <a:ea typeface="Calibri" pitchFamily="34" charset="-122"/>
+                <a:cs typeface="Calibri" pitchFamily="34" charset="-120"/>
+              </a:rPr>
+              <a:t>Chương 4</a:t>
+            </a:r>
+            <a:endParaRPr lang="en-US" sz="900" dirty="0"/>
+          </a:p>
+        </p:txBody>
+      </p:sp>
+      <p:sp>
+        <p:nvSpPr>
+          <p:cNvPr id="5" name="Shape 2"/>
+          <p:cNvSpPr/>
+          <p:nvPr/>
+        </p:nvSpPr>
+        <p:spPr>
+          <a:xfrm>
+            <a:off x="11430000" y="6327648"/>
+            <a:ext cx="365760" cy="365760"/>
+          </a:xfrm>
+          <a:prstGeom prst="ellipse">
+            <a:avLst/>
+          </a:prstGeom>
+          <a:solidFill>
+            <a:srgbClr val="DC756A"/>
+          </a:solidFill>
+          <a:ln/>
+        </p:spPr>
+        <p:txBody>
+          <a:bodyPr/>
+          <a:p/>
+        </p:txBody>
+      </p:sp>
+      <p:sp>
+        <p:nvSpPr>
+          <p:cNvPr id="6" name="Text 3"/>
+          <p:cNvSpPr/>
+          <p:nvPr/>
+        </p:nvSpPr>
+        <p:spPr>
+          <a:xfrm>
+            <a:off x="11430000" y="6327648"/>
+            <a:ext cx="365760" cy="365760"/>
+          </a:xfrm>
+          <a:prstGeom prst="rect">
+            <a:avLst/>
+          </a:prstGeom>
+          <a:noFill/>
+          <a:ln/>
+        </p:spPr>
+        <p:txBody>
+          <a:bodyPr wrap="square" lIns="0" tIns="0" rIns="0" bIns="0" rtlCol="0" anchor="ctr"/>
+          <a:lstStyle/>
+          <a:p>
+            <a:pPr algn="ctr" indent="0" marL="0">
+              <a:buNone/>
+            </a:pPr>
+            <a:r>
+              <a:rPr lang="en-US" sz="1000" b="1" dirty="0">
+                <a:solidFill>
+                  <a:srgbClr val="FFFFFF"/>
+                </a:solidFill>
+                <a:latin typeface="Calibri" pitchFamily="34" charset="0"/>
+                <a:ea typeface="Calibri" pitchFamily="34" charset="-122"/>
+                <a:cs typeface="Calibri" pitchFamily="34" charset="-120"/>
+              </a:rPr>
+              <a:t>9</a:t>
+            </a:r>
+            <a:endParaRPr lang="en-US" sz="1000" dirty="0"/>
+          </a:p>
+        </p:txBody>
+      </p:sp>
+      <p:sp>
+        <p:nvSpPr>
+          <p:cNvPr id="7" name="Text 4"/>
+          <p:cNvSpPr/>
+          <p:nvPr/>
+        </p:nvSpPr>
+        <p:spPr>
+          <a:xfrm>
+            <a:off x="502920" y="310896"/>
+            <a:ext cx="11155680" cy="274320"/>
+          </a:xfrm>
+          <a:prstGeom prst="rect">
+            <a:avLst/>
+          </a:prstGeom>
+          <a:noFill/>
+          <a:ln/>
+        </p:spPr>
+        <p:txBody>
+          <a:bodyPr wrap="square" lIns="0" tIns="0" rIns="0" bIns="0" rtlCol="0" anchor="ctr"/>
+          <a:lstStyle/>
+          <a:p>
+            <a:pPr indent="0" marL="0">
+              <a:buNone/>
+            </a:pPr>
+            <a:r>
+              <a:rPr lang="en-US" sz="1100" b="1" spc="300" kern="0" dirty="0">
+                <a:solidFill>
+                  <a:srgbClr val="DC756A"/>
+                </a:solidFill>
+                <a:latin typeface="Calibri" pitchFamily="34" charset="0"/>
+                <a:ea typeface="Calibri" pitchFamily="34" charset="-122"/>
+                <a:cs typeface="Calibri" pitchFamily="34" charset="-120"/>
+              </a:rPr>
+              <a:t>4.2</a:t>
+            </a:r>
+            <a:endParaRPr lang="en-US" sz="1100" dirty="0"/>
+          </a:p>
+        </p:txBody>
+      </p:sp>
+      <p:sp>
+        <p:nvSpPr>
+          <p:cNvPr id="8" name="Text 5"/>
+          <p:cNvSpPr/>
+          <p:nvPr/>
+        </p:nvSpPr>
+        <p:spPr>
+          <a:xfrm>
+            <a:off x="502920" y="576072"/>
+            <a:ext cx="11155680" cy="713232"/>
+          </a:xfrm>
+          <a:prstGeom prst="rect">
+            <a:avLst/>
+          </a:prstGeom>
+          <a:noFill/>
+          <a:ln/>
+        </p:spPr>
+        <p:txBody>
+          <a:bodyPr wrap="square" lIns="0" tIns="0" rIns="0" bIns="0" rtlCol="0" anchor="ctr"/>
+          <a:lstStyle/>
+          <a:p>
+            <a:pPr indent="0" marL="0">
+              <a:buNone/>
+            </a:pPr>
+            <a:r>
+              <a:rPr lang="en-US" sz="2700" b="1" dirty="0">
+                <a:solidFill>
+                  <a:srgbClr val="AC4D33"/>
+                </a:solidFill>
+                <a:latin typeface="Cambria" pitchFamily="34" charset="0"/>
+                <a:ea typeface="Cambria" pitchFamily="34" charset="-122"/>
+                <a:cs typeface="Cambria" pitchFamily="34" charset="-120"/>
+              </a:rPr>
+              <a:t>Mở đầu và thương lượng</a:t>
+            </a:r>
+            <a:endParaRPr lang="en-US" sz="2700" dirty="0"/>
+          </a:p>
+        </p:txBody>
+      </p:sp>
+      <p:sp>
+        <p:nvSpPr>
+          <p:cNvPr id="9" name="Shape 6"/>
+          <p:cNvSpPr/>
+          <p:nvPr/>
+        </p:nvSpPr>
+        <p:spPr>
+          <a:xfrm>
+            <a:off x="502920" y="1417320"/>
+            <a:ext cx="11201400" cy="1076706"/>
+          </a:xfrm>
+          <a:prstGeom prst="roundRect">
+            <a:avLst>
+              <a:gd name="adj" fmla="val 7643"/>
+            </a:avLst>
+          </a:prstGeom>
+          <a:solidFill>
+            <a:srgbClr val="FDF1EF"/>
+          </a:solidFill>
+          <a:ln w="15875">
+            <a:solidFill>
+              <a:srgbClr val="FBCEC9"/>
+            </a:solidFill>
+            <a:prstDash val="solid"/>
+          </a:ln>
+        </p:spPr>
+        <p:txBody>
+          <a:bodyPr/>
+          <a:p/>
+        </p:txBody>
+      </p:sp>
+      <p:sp>
+        <p:nvSpPr>
+          <p:cNvPr id="10" name="Text 7"/>
+          <p:cNvSpPr/>
+          <p:nvPr/>
+        </p:nvSpPr>
+        <p:spPr>
+          <a:xfrm>
+            <a:off x="722376" y="1472184"/>
+            <a:ext cx="10762488" cy="966978"/>
+          </a:xfrm>
+          <a:prstGeom prst="rect">
+            <a:avLst/>
+          </a:prstGeom>
+          <a:noFill/>
+          <a:ln/>
+        </p:spPr>
+        <p:txBody>
+          <a:bodyPr wrap="square" lIns="0" tIns="0" rIns="0" bIns="0" rtlCol="0" anchor="ctr"/>
+          <a:lstStyle/>
+          <a:p>
+            <a:pPr indent="0" marL="0">
+              <a:buNone/>
+            </a:pPr>
+            <a:r>
+              <a:rPr lang="en-US" sz="1500" b="1" dirty="0">
+                <a:solidFill>
+                  <a:srgbClr val="AC4D33"/>
+                </a:solidFill>
+                <a:latin typeface="Calibri" pitchFamily="34" charset="0"/>
+                <a:ea typeface="Calibri" pitchFamily="34" charset="-122"/>
+                <a:cs typeface="Calibri" pitchFamily="34" charset="-120"/>
+              </a:rPr>
+              <a:t>Tạo không khí và thăm dò</a:t>
+            </a:r>
+            <a:endParaRPr lang="en-US" sz="1500" dirty="0"/>
+          </a:p>
+          <a:p>
+            <a:pPr indent="0" marL="0">
+              <a:buNone/>
+            </a:pPr>
+            <a:r>
+              <a:rPr lang="en-US" sz="1250" dirty="0">
+                <a:solidFill>
+                  <a:srgbClr val="3A2B28"/>
+                </a:solidFill>
+                <a:latin typeface="Calibri" pitchFamily="34" charset="0"/>
+                <a:ea typeface="Calibri" pitchFamily="34" charset="-122"/>
+                <a:cs typeface="Calibri" pitchFamily="34" charset="-120"/>
+              </a:rPr>
+              <a:t>Vài phút xã giao đúng mực; quan sát thái độ; đặt câu hỏi mở để đối phương bộc lộ nhu cầu và giới hạn trước khi mình ra giá.</a:t>
+            </a:r>
+            <a:endParaRPr lang="en-US" sz="1500" dirty="0"/>
+          </a:p>
+        </p:txBody>
+      </p:sp>
+      <p:sp>
+        <p:nvSpPr>
+          <p:cNvPr id="11" name="Shape 8"/>
+          <p:cNvSpPr/>
+          <p:nvPr/>
+        </p:nvSpPr>
+        <p:spPr>
+          <a:xfrm>
+            <a:off x="502920" y="2658618"/>
+            <a:ext cx="11201400" cy="1076706"/>
+          </a:xfrm>
+          <a:prstGeom prst="roundRect">
+            <a:avLst>
+              <a:gd name="adj" fmla="val 7643"/>
+            </a:avLst>
+          </a:prstGeom>
+          <a:solidFill>
+            <a:srgbClr val="FDF1EF"/>
+          </a:solidFill>
+          <a:ln w="15875">
+            <a:solidFill>
+              <a:srgbClr val="FBCEC9"/>
+            </a:solidFill>
+            <a:prstDash val="solid"/>
+          </a:ln>
+        </p:spPr>
+        <p:txBody>
+          <a:bodyPr/>
+          <a:p/>
+        </p:txBody>
+      </p:sp>
+      <p:sp>
+        <p:nvSpPr>
+          <p:cNvPr id="12" name="Text 9"/>
+          <p:cNvSpPr/>
+          <p:nvPr/>
+        </p:nvSpPr>
+        <p:spPr>
+          <a:xfrm>
+            <a:off x="722376" y="2713482"/>
+            <a:ext cx="10762488" cy="966978"/>
+          </a:xfrm>
+          <a:prstGeom prst="rect">
+            <a:avLst/>
+          </a:prstGeom>
+          <a:noFill/>
+          <a:ln/>
+        </p:spPr>
+        <p:txBody>
+          <a:bodyPr wrap="square" lIns="0" tIns="0" rIns="0" bIns="0" rtlCol="0" anchor="ctr"/>
+          <a:lstStyle/>
+          <a:p>
+            <a:pPr indent="0" marL="0">
+              <a:buNone/>
+            </a:pPr>
+            <a:r>
+              <a:rPr lang="en-US" sz="1500" b="1" dirty="0">
+                <a:solidFill>
+                  <a:srgbClr val="AC4D33"/>
+                </a:solidFill>
+                <a:latin typeface="Calibri" pitchFamily="34" charset="0"/>
+                <a:ea typeface="Calibri" pitchFamily="34" charset="-122"/>
+                <a:cs typeface="Calibri" pitchFamily="34" charset="-120"/>
+              </a:rPr>
+              <a:t>Đưa đề nghị và mặc cả</a:t>
+            </a:r>
+            <a:endParaRPr lang="en-US" sz="1500" dirty="0"/>
+          </a:p>
+          <a:p>
+            <a:pPr indent="0" marL="0">
+              <a:buNone/>
+            </a:pPr>
+            <a:r>
+              <a:rPr lang="en-US" sz="1250" dirty="0">
+                <a:solidFill>
+                  <a:srgbClr val="3A2B28"/>
+                </a:solidFill>
+                <a:latin typeface="Calibri" pitchFamily="34" charset="0"/>
+                <a:ea typeface="Calibri" pitchFamily="34" charset="-122"/>
+                <a:cs typeface="Calibri" pitchFamily="34" charset="-120"/>
+              </a:rPr>
+              <a:t>Đề nghị đầu tiên có căn cứ (neo tâm lý); phản hồi đề nghị của đối phương bằng câu hỏi “dựa trên cơ sở nào?” thay vì đồng ý hay bác bỏ ngay.</a:t>
+            </a:r>
+            <a:endParaRPr lang="en-US" sz="1500" dirty="0"/>
+          </a:p>
+        </p:txBody>
+      </p:sp>
+      <p:sp>
+        <p:nvSpPr>
+          <p:cNvPr id="13" name="Shape 10"/>
+          <p:cNvSpPr/>
+          <p:nvPr/>
+        </p:nvSpPr>
+        <p:spPr>
+          <a:xfrm>
+            <a:off x="502920" y="3899916"/>
+            <a:ext cx="11201400" cy="1076706"/>
+          </a:xfrm>
+          <a:prstGeom prst="roundRect">
+            <a:avLst>
+              <a:gd name="adj" fmla="val 7643"/>
+            </a:avLst>
+          </a:prstGeom>
+          <a:solidFill>
+            <a:srgbClr val="FDF1EF"/>
+          </a:solidFill>
+          <a:ln w="15875">
+            <a:solidFill>
+              <a:srgbClr val="FBCEC9"/>
+            </a:solidFill>
+            <a:prstDash val="solid"/>
+          </a:ln>
+        </p:spPr>
+        <p:txBody>
+          <a:bodyPr/>
+          <a:p/>
+        </p:txBody>
+      </p:sp>
+      <p:sp>
+        <p:nvSpPr>
+          <p:cNvPr id="14" name="Text 11"/>
+          <p:cNvSpPr/>
+          <p:nvPr/>
+        </p:nvSpPr>
+        <p:spPr>
+          <a:xfrm>
+            <a:off x="722376" y="3954780"/>
+            <a:ext cx="10762488" cy="966978"/>
+          </a:xfrm>
+          <a:prstGeom prst="rect">
+            <a:avLst/>
+          </a:prstGeom>
+          <a:noFill/>
+          <a:ln/>
+        </p:spPr>
+        <p:txBody>
+          <a:bodyPr wrap="square" lIns="0" tIns="0" rIns="0" bIns="0" rtlCol="0" anchor="ctr"/>
+          <a:lstStyle/>
+          <a:p>
+            <a:pPr indent="0" marL="0">
+              <a:buNone/>
+            </a:pPr>
+            <a:r>
+              <a:rPr lang="en-US" sz="1500" b="1" dirty="0">
+                <a:solidFill>
+                  <a:srgbClr val="AC4D33"/>
+                </a:solidFill>
+                <a:latin typeface="Calibri" pitchFamily="34" charset="0"/>
+                <a:ea typeface="Calibri" pitchFamily="34" charset="-122"/>
+                <a:cs typeface="Calibri" pitchFamily="34" charset="-120"/>
+              </a:rPr>
+              <a:t>Nhượng bộ có điều kiện</a:t>
+            </a:r>
+            <a:endParaRPr lang="en-US" sz="1500" dirty="0"/>
+          </a:p>
+          <a:p>
+            <a:pPr indent="0" marL="0">
+              <a:buNone/>
+            </a:pPr>
+            <a:r>
+              <a:rPr lang="en-US" sz="1250" dirty="0">
+                <a:solidFill>
+                  <a:srgbClr val="3A2B28"/>
+                </a:solidFill>
+                <a:latin typeface="Calibri" pitchFamily="34" charset="0"/>
+                <a:ea typeface="Calibri" pitchFamily="34" charset="-122"/>
+                <a:cs typeface="Calibri" pitchFamily="34" charset="-120"/>
+              </a:rPr>
+              <a:t>Không cho không bao giờ: “Nếu anh tăng số lượng lên 500, chúng tôi sẽ giảm 3%.” Nhượng bộ nhỏ dần để phát tín hiệu chạm giới hạn.</a:t>
+            </a:r>
+            <a:endParaRPr lang="en-US" sz="1500" dirty="0"/>
+          </a:p>
+        </p:txBody>
+      </p:sp>
+      <p:sp>
+        <p:nvSpPr>
+          <p:cNvPr id="15" name="Shape 12"/>
+          <p:cNvSpPr/>
+          <p:nvPr/>
+        </p:nvSpPr>
+        <p:spPr>
+          <a:xfrm>
+            <a:off x="502920" y="5141214"/>
+            <a:ext cx="11201400" cy="1076706"/>
+          </a:xfrm>
+          <a:prstGeom prst="roundRect">
+            <a:avLst>
+              <a:gd name="adj" fmla="val 7643"/>
+            </a:avLst>
+          </a:prstGeom>
+          <a:solidFill>
+            <a:srgbClr val="FDF1EF"/>
+          </a:solidFill>
+          <a:ln w="15875">
+            <a:solidFill>
+              <a:srgbClr val="FBCEC9"/>
+            </a:solidFill>
+            <a:prstDash val="solid"/>
+          </a:ln>
+        </p:spPr>
+        <p:txBody>
+          <a:bodyPr/>
+          <a:p/>
+        </p:txBody>
+      </p:sp>
+      <p:sp>
+        <p:nvSpPr>
+          <p:cNvPr id="16" name="Text 13"/>
+          <p:cNvSpPr/>
+          <p:nvPr/>
+        </p:nvSpPr>
+        <p:spPr>
+          <a:xfrm>
+            <a:off x="722376" y="5196078"/>
+            <a:ext cx="10762488" cy="966978"/>
+          </a:xfrm>
+          <a:prstGeom prst="rect">
+            <a:avLst/>
+          </a:prstGeom>
+          <a:noFill/>
+          <a:ln/>
+        </p:spPr>
+        <p:txBody>
+          <a:bodyPr wrap="square" lIns="0" tIns="0" rIns="0" bIns="0" rtlCol="0" anchor="ctr"/>
+          <a:lstStyle/>
+          <a:p>
+            <a:pPr indent="0" marL="0">
+              <a:buNone/>
+            </a:pPr>
+            <a:r>
+              <a:rPr lang="en-US" sz="1500" b="1" dirty="0">
+                <a:solidFill>
+                  <a:srgbClr val="AC4D33"/>
+                </a:solidFill>
+                <a:latin typeface="Calibri" pitchFamily="34" charset="0"/>
+                <a:ea typeface="Calibri" pitchFamily="34" charset="-122"/>
+                <a:cs typeface="Calibri" pitchFamily="34" charset="-120"/>
+              </a:rPr>
+              <a:t>Xử lý bế tắc</a:t>
+            </a:r>
+            <a:endParaRPr lang="en-US" sz="1500" dirty="0"/>
+          </a:p>
+          <a:p>
+            <a:pPr indent="0" marL="0">
+              <a:buNone/>
+            </a:pPr>
+            <a:r>
+              <a:rPr lang="en-US" sz="1250" dirty="0">
+                <a:solidFill>
+                  <a:srgbClr val="3A2B28"/>
+                </a:solidFill>
+                <a:latin typeface="Calibri" pitchFamily="34" charset="0"/>
+                <a:ea typeface="Calibri" pitchFamily="34" charset="-122"/>
+                <a:cs typeface="Calibri" pitchFamily="34" charset="-120"/>
+              </a:rPr>
+              <a:t>Tạm nghỉ; đổi người – đổi vấn đề – đổi cách tiếp cận; quay về lợi ích gốc; đưa tiêu chí khách quan (giá thị trường, quy định) làm trọng tài.</a:t>
+            </a:r>
+            <a:endParaRPr lang="en-US" sz="1500" dirty="0"/>
+          </a:p>
+        </p:txBody>
+      </p:sp>
+    </p:spTree>
+  </p:cSld>
+  <p:clrMapOvr>
+    <a:masterClrMapping/>
+  </p:clrMapOvr>
+</p:sld>
+</file>
+
+<file path=ppt/slides/slide13.xml><?xml version="1.0" encoding="utf-8"?>
 <p:sld xmlns:a="http://schemas.openxmlformats.org/drawingml/2006/main" xmlns:r="http://schemas.openxmlformats.org/officeDocument/2006/relationships" xmlns:p="http://schemas.openxmlformats.org/presentationml/2006/main">
   <p:cSld name="Slide 10">
     <p:bg>
@@ -3076,7 +4544,7 @@
       </p:grpSpPr>
       <p:pic>
         <p:nvPicPr>
-          <p:cNvPr id="2" name="Image 0" descr="assets/logo_tron.png">    </p:cNvPr>
+          <p:cNvPr id="2" name="Image 0" descr="/home/user/comdraft/assets/img/dau-huong.png">    </p:cNvPr>
           <p:cNvPicPr>
             <a:picLocks noChangeAspect="1"/>
           </p:cNvPicPr>
@@ -3586,7 +5054,328 @@
 </p:sld>
 </file>
 
-<file path=ppt/slides/slide11.xml><?xml version="1.0" encoding="utf-8"?>
+<file path=ppt/slides/slide14.xml><?xml version="1.0" encoding="utf-8"?>
+<p:sld xmlns:a="http://schemas.openxmlformats.org/drawingml/2006/main" xmlns:p="http://schemas.openxmlformats.org/presentationml/2006/main" xmlns:r="http://schemas.openxmlformats.org/officeDocument/2006/relationships">
+  <p:cSld>
+    <p:spTree>
+      <p:nvGrpSpPr>
+        <p:cNvPr id="1" name=""/>
+        <p:cNvGrpSpPr/>
+        <p:nvPr/>
+      </p:nvGrpSpPr>
+      <p:grpSpPr/>
+      <p:sp>
+        <p:nvSpPr>
+          <p:cNvPr id="2" name="Rectangle 1"/>
+          <p:cNvSpPr/>
+          <p:nvPr/>
+        </p:nvSpPr>
+        <p:spPr>
+          <a:xfrm>
+            <a:off x="0" y="0"/>
+            <a:ext cx="12191695" cy="6858000"/>
+          </a:xfrm>
+          <a:prstGeom prst="rect">
+            <a:avLst/>
+          </a:prstGeom>
+          <a:solidFill>
+            <a:srgbClr val="FDFBF8"/>
+          </a:solidFill>
+          <a:ln>
+            <a:noFill/>
+          </a:ln>
+          <a:effectLst/>
+        </p:spPr>
+        <p:style>
+          <a:lnRef idx="1">
+            <a:schemeClr val="accent1"/>
+          </a:lnRef>
+          <a:fillRef idx="3">
+            <a:schemeClr val="accent1"/>
+          </a:fillRef>
+          <a:effectRef idx="2">
+            <a:schemeClr val="accent1"/>
+          </a:effectRef>
+          <a:fontRef idx="minor">
+            <a:schemeClr val="lt1"/>
+          </a:fontRef>
+        </p:style>
+        <p:txBody>
+          <a:bodyPr rtlCol="0" anchor="ctr"/>
+          <a:lstStyle/>
+          <a:p>
+            <a:pPr algn="ctr"/>
+          </a:p>
+        </p:txBody>
+      </p:sp>
+      <p:sp>
+        <p:nvSpPr>
+          <p:cNvPr id="3" name="Rectangle 2"/>
+          <p:cNvSpPr/>
+          <p:nvPr/>
+        </p:nvSpPr>
+        <p:spPr>
+          <a:xfrm>
+            <a:off x="0" y="2103120"/>
+            <a:ext cx="12191695" cy="2743200"/>
+          </a:xfrm>
+          <a:prstGeom prst="rect">
+            <a:avLst/>
+          </a:prstGeom>
+          <a:solidFill>
+            <a:srgbClr val="FDF1EF"/>
+          </a:solidFill>
+          <a:ln>
+            <a:noFill/>
+          </a:ln>
+          <a:effectLst/>
+        </p:spPr>
+        <p:style>
+          <a:lnRef idx="1">
+            <a:schemeClr val="accent1"/>
+          </a:lnRef>
+          <a:fillRef idx="3">
+            <a:schemeClr val="accent1"/>
+          </a:fillRef>
+          <a:effectRef idx="2">
+            <a:schemeClr val="accent1"/>
+          </a:effectRef>
+          <a:fontRef idx="minor">
+            <a:schemeClr val="lt1"/>
+          </a:fontRef>
+        </p:style>
+        <p:txBody>
+          <a:bodyPr rtlCol="0" anchor="ctr"/>
+          <a:lstStyle/>
+          <a:p>
+            <a:pPr algn="ctr"/>
+          </a:p>
+        </p:txBody>
+      </p:sp>
+      <p:sp>
+        <p:nvSpPr>
+          <p:cNvPr id="4" name="Rectangle 3"/>
+          <p:cNvSpPr/>
+          <p:nvPr/>
+        </p:nvSpPr>
+        <p:spPr>
+          <a:xfrm>
+            <a:off x="0" y="0"/>
+            <a:ext cx="274320" cy="6858000"/>
+          </a:xfrm>
+          <a:prstGeom prst="rect">
+            <a:avLst/>
+          </a:prstGeom>
+          <a:solidFill>
+            <a:srgbClr val="DC756A"/>
+          </a:solidFill>
+          <a:ln>
+            <a:noFill/>
+          </a:ln>
+          <a:effectLst/>
+        </p:spPr>
+        <p:style>
+          <a:lnRef idx="1">
+            <a:schemeClr val="accent1"/>
+          </a:lnRef>
+          <a:fillRef idx="3">
+            <a:schemeClr val="accent1"/>
+          </a:fillRef>
+          <a:effectRef idx="2">
+            <a:schemeClr val="accent1"/>
+          </a:effectRef>
+          <a:fontRef idx="minor">
+            <a:schemeClr val="lt1"/>
+          </a:fontRef>
+        </p:style>
+        <p:txBody>
+          <a:bodyPr rtlCol="0" anchor="ctr"/>
+          <a:lstStyle/>
+          <a:p>
+            <a:pPr algn="ctr"/>
+          </a:p>
+        </p:txBody>
+      </p:sp>
+      <p:sp>
+        <p:nvSpPr>
+          <p:cNvPr id="5" name="TextBox 4"/>
+          <p:cNvSpPr txBox="1"/>
+          <p:nvPr/>
+        </p:nvSpPr>
+        <p:spPr>
+          <a:xfrm>
+            <a:off x="1280160" y="2377440"/>
+            <a:ext cx="9692640" cy="411480"/>
+          </a:xfrm>
+          <a:prstGeom prst="rect">
+            <a:avLst/>
+          </a:prstGeom>
+          <a:noFill/>
+        </p:spPr>
+        <p:txBody>
+          <a:bodyPr wrap="none">
+            <a:spAutoFit/>
+          </a:bodyPr>
+          <a:lstStyle/>
+          <a:p>
+            <a:r>
+              <a:rPr sz="1500" b="1">
+                <a:solidFill>
+                  <a:srgbClr val="DC756A"/>
+                </a:solidFill>
+                <a:latin typeface="Calibri"/>
+              </a:rPr>
+              <a:t>MỤC 4.3</a:t>
+            </a:r>
+          </a:p>
+        </p:txBody>
+      </p:sp>
+      <p:sp>
+        <p:nvSpPr>
+          <p:cNvPr id="6" name="TextBox 5"/>
+          <p:cNvSpPr txBox="1"/>
+          <p:nvPr/>
+        </p:nvSpPr>
+        <p:spPr>
+          <a:xfrm>
+            <a:off x="1280160" y="2788920"/>
+            <a:ext cx="9601200" cy="1371600"/>
+          </a:xfrm>
+          <a:prstGeom prst="rect">
+            <a:avLst/>
+          </a:prstGeom>
+          <a:noFill/>
+        </p:spPr>
+        <p:txBody>
+          <a:bodyPr wrap="square">
+            <a:spAutoFit/>
+          </a:bodyPr>
+          <a:lstStyle/>
+          <a:p>
+            <a:r>
+              <a:rPr sz="3300" b="1">
+                <a:solidFill>
+                  <a:srgbClr val="AC4D33"/>
+                </a:solidFill>
+                <a:latin typeface="Cambria"/>
+              </a:rPr>
+              <a:t>Kỹ năng và chiêu trò trên bàn đàm phán</a:t>
+            </a:r>
+          </a:p>
+        </p:txBody>
+      </p:sp>
+      <p:sp>
+        <p:nvSpPr>
+          <p:cNvPr id="7" name="TextBox 6"/>
+          <p:cNvSpPr txBox="1"/>
+          <p:nvPr/>
+        </p:nvSpPr>
+        <p:spPr>
+          <a:xfrm>
+            <a:off x="1280160" y="4224528"/>
+            <a:ext cx="9418320" cy="640080"/>
+          </a:xfrm>
+          <a:prstGeom prst="rect">
+            <a:avLst/>
+          </a:prstGeom>
+          <a:noFill/>
+        </p:spPr>
+        <p:txBody>
+          <a:bodyPr wrap="square">
+            <a:spAutoFit/>
+          </a:bodyPr>
+          <a:lstStyle/>
+          <a:p>
+            <a:r>
+              <a:rPr sz="1450" i="1">
+                <a:solidFill>
+                  <a:srgbClr val="8A7A76"/>
+                </a:solidFill>
+                <a:latin typeface="Calibri"/>
+              </a:rPr>
+              <a:t>Những gì cần rèn, và những gì cần nhận diện để không bị dẫn dắt.</a:t>
+            </a:r>
+          </a:p>
+        </p:txBody>
+      </p:sp>
+      <p:sp>
+        <p:nvSpPr>
+          <p:cNvPr id="8" name="TextBox 7"/>
+          <p:cNvSpPr txBox="1"/>
+          <p:nvPr/>
+        </p:nvSpPr>
+        <p:spPr>
+          <a:xfrm>
+            <a:off x="502920" y="6419088"/>
+            <a:ext cx="7772400" cy="292608"/>
+          </a:xfrm>
+          <a:prstGeom prst="rect">
+            <a:avLst/>
+          </a:prstGeom>
+          <a:noFill/>
+        </p:spPr>
+        <p:txBody>
+          <a:bodyPr wrap="none">
+            <a:spAutoFit/>
+          </a:bodyPr>
+          <a:lstStyle/>
+          <a:p>
+            <a:r>
+              <a:rPr sz="900">
+                <a:solidFill>
+                  <a:srgbClr val="8A7A76"/>
+                </a:solidFill>
+                <a:latin typeface="Calibri"/>
+              </a:rPr>
+              <a:t>Je m'appelle Huong  •  GV. Đỗ Thùy Hương  •  EC1103</a:t>
+            </a:r>
+          </a:p>
+        </p:txBody>
+      </p:sp>
+      <p:sp>
+        <p:nvSpPr>
+          <p:cNvPr id="9" name="TextBox 8"/>
+          <p:cNvSpPr txBox="1"/>
+          <p:nvPr/>
+        </p:nvSpPr>
+        <p:spPr>
+          <a:xfrm>
+            <a:off x="9326880" y="6419088"/>
+            <a:ext cx="1920240" cy="292608"/>
+          </a:xfrm>
+          <a:prstGeom prst="rect">
+            <a:avLst/>
+          </a:prstGeom>
+          <a:noFill/>
+        </p:spPr>
+        <p:txBody>
+          <a:bodyPr wrap="none">
+            <a:spAutoFit/>
+          </a:bodyPr>
+          <a:lstStyle/>
+          <a:p>
+            <a:pPr algn="r"/>
+            <a:r>
+              <a:rPr sz="900">
+                <a:solidFill>
+                  <a:srgbClr val="8A7A76"/>
+                </a:solidFill>
+                <a:latin typeface="Calibri"/>
+              </a:rPr>
+              <a:t>Chương 4</a:t>
+            </a:r>
+          </a:p>
+        </p:txBody>
+      </p:sp>
+    </p:spTree>
+  </p:cSld>
+  <p:clrMapOvr>
+    <a:masterClrMapping/>
+  </p:clrMapOvr>
+</p:sld>
+</file>
+
+<file path=ppt/slides/slide15.xml><?xml version="1.0" encoding="utf-8"?>
 <p:sld xmlns:a="http://schemas.openxmlformats.org/drawingml/2006/main" xmlns:r="http://schemas.openxmlformats.org/officeDocument/2006/relationships" xmlns:p="http://schemas.openxmlformats.org/presentationml/2006/main">
   <p:cSld name="Slide 11">
     <p:bg>
@@ -3612,7 +5401,7 @@
       </p:grpSpPr>
       <p:pic>
         <p:nvPicPr>
-          <p:cNvPr id="2" name="Image 0" descr="assets/logo_tron.png">    </p:cNvPr>
+          <p:cNvPr id="2" name="Image 0" descr="/home/user/comdraft/assets/img/dau-huong.png">    </p:cNvPr>
           <p:cNvPicPr>
             <a:picLocks noChangeAspect="1"/>
           </p:cNvPicPr>
@@ -4209,7 +5998,7 @@
 </p:sld>
 </file>
 
-<file path=ppt/slides/slide12.xml><?xml version="1.0" encoding="utf-8"?>
+<file path=ppt/slides/slide16.xml><?xml version="1.0" encoding="utf-8"?>
 <p:sld xmlns:a="http://schemas.openxmlformats.org/drawingml/2006/main" xmlns:r="http://schemas.openxmlformats.org/officeDocument/2006/relationships" xmlns:p="http://schemas.openxmlformats.org/presentationml/2006/main">
   <p:cSld name="Slide 12">
     <p:bg>
@@ -4235,7 +6024,7 @@
       </p:grpSpPr>
       <p:pic>
         <p:nvPicPr>
-          <p:cNvPr id="2" name="Image 0" descr="assets/logo_tron.png">    </p:cNvPr>
+          <p:cNvPr id="2" name="Image 0" descr="/home/user/comdraft/assets/img/dau-huong.png">    </p:cNvPr>
           <p:cNvPicPr>
             <a:picLocks noChangeAspect="1"/>
           </p:cNvPicPr>
@@ -5064,7 +6853,7 @@
 </p:sld>
 </file>
 
-<file path=ppt/slides/slide13.xml><?xml version="1.0" encoding="utf-8"?>
+<file path=ppt/slides/slide17.xml><?xml version="1.0" encoding="utf-8"?>
 <p:sld xmlns:a="http://schemas.openxmlformats.org/drawingml/2006/main" xmlns:r="http://schemas.openxmlformats.org/officeDocument/2006/relationships" xmlns:p="http://schemas.openxmlformats.org/presentationml/2006/main">
   <p:cSld name="Slide 13">
     <p:bg>
@@ -5090,7 +6879,7 @@
       </p:grpSpPr>
       <p:pic>
         <p:nvPicPr>
-          <p:cNvPr id="2" name="Image 0" descr="assets/logo_tron.png">    </p:cNvPr>
+          <p:cNvPr id="2" name="Image 0" descr="/home/user/comdraft/assets/img/dau-huong.png">    </p:cNvPr>
           <p:cNvPicPr>
             <a:picLocks noChangeAspect="1"/>
           </p:cNvPicPr>
@@ -5795,7 +7584,7 @@
 </p:sld>
 </file>
 
-<file path=ppt/slides/slide14.xml><?xml version="1.0" encoding="utf-8"?>
+<file path=ppt/slides/slide18.xml><?xml version="1.0" encoding="utf-8"?>
 <p:sld xmlns:a="http://schemas.openxmlformats.org/drawingml/2006/main" xmlns:r="http://schemas.openxmlformats.org/officeDocument/2006/relationships" xmlns:p="http://schemas.openxmlformats.org/presentationml/2006/main">
   <p:cSld name="Slide 14">
     <p:bg>
@@ -5821,7 +7610,7 @@
       </p:grpSpPr>
       <p:pic>
         <p:nvPicPr>
-          <p:cNvPr id="2" name="Image 0" descr="assets/logo_tron.png">    </p:cNvPr>
+          <p:cNvPr id="2" name="Image 0" descr="/home/user/comdraft/assets/img/dau-huong.png">    </p:cNvPr>
           <p:cNvPicPr>
             <a:picLocks noChangeAspect="1"/>
           </p:cNvPicPr>
@@ -6331,7 +8120,7 @@
 </p:sld>
 </file>
 
-<file path=ppt/slides/slide15.xml><?xml version="1.0" encoding="utf-8"?>
+<file path=ppt/slides/slide19.xml><?xml version="1.0" encoding="utf-8"?>
 <p:sld xmlns:a="http://schemas.openxmlformats.org/drawingml/2006/main" xmlns:r="http://schemas.openxmlformats.org/officeDocument/2006/relationships" xmlns:p="http://schemas.openxmlformats.org/presentationml/2006/main">
   <p:cSld name="Slide 15">
     <p:bg>
@@ -6357,7 +8146,7 @@
       </p:grpSpPr>
       <p:pic>
         <p:nvPicPr>
-          <p:cNvPr id="2" name="Image 0" descr="assets/logo_tron.png">    </p:cNvPr>
+          <p:cNvPr id="2" name="Image 0" descr="/home/user/comdraft/assets/img/dau-huong.png">    </p:cNvPr>
           <p:cNvPicPr>
             <a:picLocks noChangeAspect="1"/>
           </p:cNvPicPr>
@@ -7087,1695 +8876,6 @@
               <a:t>Chương 5 – Soạn thảo và trình bày văn bản: đọc trước Nghị định 30/2020/NĐ-CP (phần thể thức văn bản); phần thực hành sẽ soạn hợp đồng cho chính thương vụ vừa đàm phán hôm nay.</a:t>
             </a:r>
             <a:endParaRPr lang="en-US" sz="1300" dirty="0"/>
-          </a:p>
-        </p:txBody>
-      </p:sp>
-    </p:spTree>
-  </p:cSld>
-  <p:clrMapOvr>
-    <a:masterClrMapping/>
-  </p:clrMapOvr>
-</p:sld>
-</file>
-
-<file path=ppt/slides/slide16.xml><?xml version="1.0" encoding="utf-8"?>
-<p:sld xmlns:a="http://schemas.openxmlformats.org/drawingml/2006/main" xmlns:r="http://schemas.openxmlformats.org/officeDocument/2006/relationships" xmlns:p="http://schemas.openxmlformats.org/presentationml/2006/main">
-  <p:cSld name="Slide 16">
-    <p:bg>
-      <p:bgPr>
-        <a:solidFill>
-          <a:srgbClr val="FDFBF8"/>
-        </a:solidFill>
-      </p:bgPr>
-    </p:bg>
-    <p:spTree>
-      <p:nvGrpSpPr>
-        <p:cNvPr id="1" name=""/>
-        <p:cNvGrpSpPr/>
-        <p:nvPr/>
-      </p:nvGrpSpPr>
-      <p:grpSpPr>
-        <a:xfrm>
-          <a:off x="0" y="0"/>
-          <a:ext cx="0" cy="0"/>
-          <a:chOff x="0" y="0"/>
-          <a:chExt cx="0" cy="0"/>
-        </a:xfrm>
-      </p:grpSpPr>
-      <p:pic>
-        <p:nvPicPr>
-          <p:cNvPr id="2" name="Image 0" descr="assets/logo_tron.png">    </p:cNvPr>
-          <p:cNvPicPr>
-            <a:picLocks noChangeAspect="1"/>
-          </p:cNvPicPr>
-          <p:nvPr/>
-        </p:nvPicPr>
-        <p:blipFill>
-          <a:blip r:embed="rId1"/>
-          <a:stretch>
-            <a:fillRect/>
-          </a:stretch>
-        </p:blipFill>
-        <p:spPr>
-          <a:xfrm>
-            <a:off x="411480" y="6327648"/>
-            <a:ext cx="384048" cy="384048"/>
-          </a:xfrm>
-          <a:prstGeom prst="rect">
-            <a:avLst/>
-          </a:prstGeom>
-        </p:spPr>
-      </p:pic>
-      <p:sp>
-        <p:nvSpPr>
-          <p:cNvPr id="3" name="Text 0"/>
-          <p:cNvSpPr/>
-          <p:nvPr/>
-        </p:nvSpPr>
-        <p:spPr>
-          <a:xfrm>
-            <a:off x="868680" y="6355080"/>
-            <a:ext cx="7498080" cy="310896"/>
-          </a:xfrm>
-          <a:prstGeom prst="rect">
-            <a:avLst/>
-          </a:prstGeom>
-          <a:noFill/>
-          <a:ln/>
-        </p:spPr>
-        <p:txBody>
-          <a:bodyPr wrap="square" lIns="0" tIns="0" rIns="0" bIns="0" rtlCol="0" anchor="ctr"/>
-          <a:lstStyle/>
-          <a:p>
-            <a:pPr indent="0" marL="0">
-              <a:buNone/>
-            </a:pPr>
-            <a:r>
-              <a:rPr lang="en-US" sz="900" dirty="0">
-                <a:solidFill>
-                  <a:srgbClr val="8A7A76"/>
-                </a:solidFill>
-                <a:latin typeface="Calibri" pitchFamily="34" charset="0"/>
-                <a:ea typeface="Calibri" pitchFamily="34" charset="-122"/>
-                <a:cs typeface="Calibri" pitchFamily="34" charset="-120"/>
-              </a:rPr>
-              <a:t>Je m'appelle Huong  •  GV. Đỗ Thùy Hương  •  EC1103</a:t>
-            </a:r>
-            <a:endParaRPr lang="en-US" sz="900" dirty="0"/>
-          </a:p>
-        </p:txBody>
-      </p:sp>
-      <p:sp>
-        <p:nvSpPr>
-          <p:cNvPr id="4" name="Text 1"/>
-          <p:cNvSpPr/>
-          <p:nvPr/>
-        </p:nvSpPr>
-        <p:spPr>
-          <a:xfrm>
-            <a:off x="8503920" y="6355080"/>
-            <a:ext cx="2743200" cy="310896"/>
-          </a:xfrm>
-          <a:prstGeom prst="rect">
-            <a:avLst/>
-          </a:prstGeom>
-          <a:noFill/>
-          <a:ln/>
-        </p:spPr>
-        <p:txBody>
-          <a:bodyPr wrap="square" lIns="0" tIns="0" rIns="0" bIns="0" rtlCol="0" anchor="ctr"/>
-          <a:lstStyle/>
-          <a:p>
-            <a:pPr algn="r" indent="0" marL="0">
-              <a:buNone/>
-            </a:pPr>
-            <a:r>
-              <a:rPr lang="en-US" sz="900" dirty="0">
-                <a:solidFill>
-                  <a:srgbClr val="8A7A76"/>
-                </a:solidFill>
-                <a:latin typeface="Calibri" pitchFamily="34" charset="0"/>
-                <a:ea typeface="Calibri" pitchFamily="34" charset="-122"/>
-                <a:cs typeface="Calibri" pitchFamily="34" charset="-120"/>
-              </a:rPr>
-              <a:t>Chương 4</a:t>
-            </a:r>
-            <a:endParaRPr lang="en-US" sz="900" dirty="0"/>
-          </a:p>
-        </p:txBody>
-      </p:sp>
-      <p:sp>
-        <p:nvSpPr>
-          <p:cNvPr id="5" name="Shape 2"/>
-          <p:cNvSpPr/>
-          <p:nvPr/>
-        </p:nvSpPr>
-        <p:spPr>
-          <a:xfrm>
-            <a:off x="11430000" y="6327648"/>
-            <a:ext cx="365760" cy="365760"/>
-          </a:xfrm>
-          <a:prstGeom prst="ellipse">
-            <a:avLst/>
-          </a:prstGeom>
-          <a:solidFill>
-            <a:srgbClr val="DC756A"/>
-          </a:solidFill>
-          <a:ln/>
-        </p:spPr>
-        <p:txBody>
-          <a:bodyPr/>
-          <a:p/>
-        </p:txBody>
-      </p:sp>
-      <p:sp>
-        <p:nvSpPr>
-          <p:cNvPr id="6" name="Text 3"/>
-          <p:cNvSpPr/>
-          <p:nvPr/>
-        </p:nvSpPr>
-        <p:spPr>
-          <a:xfrm>
-            <a:off x="11430000" y="6327648"/>
-            <a:ext cx="365760" cy="365760"/>
-          </a:xfrm>
-          <a:prstGeom prst="rect">
-            <a:avLst/>
-          </a:prstGeom>
-          <a:noFill/>
-          <a:ln/>
-        </p:spPr>
-        <p:txBody>
-          <a:bodyPr wrap="square" lIns="0" tIns="0" rIns="0" bIns="0" rtlCol="0" anchor="ctr"/>
-          <a:lstStyle/>
-          <a:p>
-            <a:pPr algn="ctr" indent="0" marL="0">
-              <a:buNone/>
-            </a:pPr>
-            <a:r>
-              <a:rPr lang="en-US" sz="1000" b="1" dirty="0">
-                <a:solidFill>
-                  <a:srgbClr val="FFFFFF"/>
-                </a:solidFill>
-                <a:latin typeface="Calibri" pitchFamily="34" charset="0"/>
-                <a:ea typeface="Calibri" pitchFamily="34" charset="-122"/>
-                <a:cs typeface="Calibri" pitchFamily="34" charset="-120"/>
-              </a:rPr>
-              <a:t>16</a:t>
-            </a:r>
-            <a:endParaRPr lang="en-US" sz="1000" dirty="0"/>
-          </a:p>
-        </p:txBody>
-      </p:sp>
-      <p:sp>
-        <p:nvSpPr>
-          <p:cNvPr id="7" name="Text 4"/>
-          <p:cNvSpPr/>
-          <p:nvPr/>
-        </p:nvSpPr>
-        <p:spPr>
-          <a:xfrm>
-            <a:off x="502920" y="310896"/>
-            <a:ext cx="11155680" cy="274320"/>
-          </a:xfrm>
-          <a:prstGeom prst="rect">
-            <a:avLst/>
-          </a:prstGeom>
-          <a:noFill/>
-          <a:ln/>
-        </p:spPr>
-        <p:txBody>
-          <a:bodyPr wrap="square" lIns="0" tIns="0" rIns="0" bIns="0" rtlCol="0" anchor="ctr"/>
-          <a:lstStyle/>
-          <a:p>
-            <a:pPr indent="0" marL="0">
-              <a:buNone/>
-            </a:pPr>
-            <a:r>
-              <a:rPr lang="en-US" sz="1100" b="1" spc="300" kern="0" dirty="0">
-                <a:solidFill>
-                  <a:srgbClr val="DC756A"/>
-                </a:solidFill>
-                <a:latin typeface="Calibri" pitchFamily="34" charset="0"/>
-                <a:ea typeface="Calibri" pitchFamily="34" charset="-122"/>
-                <a:cs typeface="Calibri" pitchFamily="34" charset="-120"/>
-              </a:rPr>
-              <a:t>TÀI LIỆU</a:t>
-            </a:r>
-            <a:endParaRPr lang="en-US" sz="1100" dirty="0"/>
-          </a:p>
-        </p:txBody>
-      </p:sp>
-      <p:sp>
-        <p:nvSpPr>
-          <p:cNvPr id="8" name="Text 5"/>
-          <p:cNvSpPr/>
-          <p:nvPr/>
-        </p:nvSpPr>
-        <p:spPr>
-          <a:xfrm>
-            <a:off x="502920" y="576072"/>
-            <a:ext cx="11155680" cy="713232"/>
-          </a:xfrm>
-          <a:prstGeom prst="rect">
-            <a:avLst/>
-          </a:prstGeom>
-          <a:noFill/>
-          <a:ln/>
-        </p:spPr>
-        <p:txBody>
-          <a:bodyPr wrap="square" lIns="0" tIns="0" rIns="0" bIns="0" rtlCol="0" anchor="ctr"/>
-          <a:lstStyle/>
-          <a:p>
-            <a:pPr indent="0" marL="0">
-              <a:buNone/>
-            </a:pPr>
-            <a:r>
-              <a:rPr lang="en-US" sz="2700" b="1" dirty="0">
-                <a:solidFill>
-                  <a:srgbClr val="AC4D33"/>
-                </a:solidFill>
-                <a:latin typeface="Cambria" pitchFamily="34" charset="0"/>
-                <a:ea typeface="Cambria" pitchFamily="34" charset="-122"/>
-                <a:cs typeface="Cambria" pitchFamily="34" charset="-120"/>
-              </a:rPr>
-              <a:t>Tài liệu học tập</a:t>
-            </a:r>
-            <a:endParaRPr lang="en-US" sz="2700" dirty="0"/>
-          </a:p>
-        </p:txBody>
-      </p:sp>
-      <p:sp>
-        <p:nvSpPr>
-          <p:cNvPr id="9" name="Shape 6"/>
-          <p:cNvSpPr/>
-          <p:nvPr/>
-        </p:nvSpPr>
-        <p:spPr>
-          <a:xfrm>
-            <a:off x="502920" y="1463040"/>
-            <a:ext cx="11201400" cy="1322832"/>
-          </a:xfrm>
-          <a:prstGeom prst="roundRect">
-            <a:avLst>
-              <a:gd name="adj" fmla="val 6221"/>
-            </a:avLst>
-          </a:prstGeom>
-          <a:solidFill>
-            <a:srgbClr val="FDF1EF"/>
-          </a:solidFill>
-          <a:ln w="15875">
-            <a:solidFill>
-              <a:srgbClr val="FBCEC9"/>
-            </a:solidFill>
-            <a:prstDash val="solid"/>
-          </a:ln>
-        </p:spPr>
-        <p:txBody>
-          <a:bodyPr/>
-          <a:p/>
-        </p:txBody>
-      </p:sp>
-      <p:sp>
-        <p:nvSpPr>
-          <p:cNvPr id="10" name="Text 7"/>
-          <p:cNvSpPr/>
-          <p:nvPr/>
-        </p:nvSpPr>
-        <p:spPr>
-          <a:xfrm>
-            <a:off x="722376" y="1517904"/>
-            <a:ext cx="10762488" cy="1213104"/>
-          </a:xfrm>
-          <a:prstGeom prst="rect">
-            <a:avLst/>
-          </a:prstGeom>
-          <a:noFill/>
-          <a:ln/>
-        </p:spPr>
-        <p:txBody>
-          <a:bodyPr wrap="square" lIns="0" tIns="0" rIns="0" bIns="0" rtlCol="0" anchor="ctr"/>
-          <a:lstStyle/>
-          <a:p>
-            <a:pPr indent="0" marL="0">
-              <a:buNone/>
-            </a:pPr>
-            <a:r>
-              <a:rPr lang="en-US" sz="1500" b="1" dirty="0">
-                <a:solidFill>
-                  <a:srgbClr val="AC4D33"/>
-                </a:solidFill>
-                <a:latin typeface="Calibri" pitchFamily="34" charset="0"/>
-                <a:ea typeface="Calibri" pitchFamily="34" charset="-122"/>
-                <a:cs typeface="Calibri" pitchFamily="34" charset="-120"/>
-              </a:rPr>
-              <a:t>Giáo trình chính</a:t>
-            </a:r>
-            <a:endParaRPr lang="en-US" sz="1500" dirty="0"/>
-          </a:p>
-          <a:p>
-            <a:pPr indent="0" marL="0">
-              <a:buNone/>
-            </a:pPr>
-            <a:r>
-              <a:rPr lang="en-US" sz="1300" dirty="0">
-                <a:solidFill>
-                  <a:srgbClr val="3A2B28"/>
-                </a:solidFill>
-                <a:latin typeface="Calibri" pitchFamily="34" charset="0"/>
-                <a:ea typeface="Calibri" pitchFamily="34" charset="-122"/>
-                <a:cs typeface="Calibri" pitchFamily="34" charset="-120"/>
-              </a:rPr>
-              <a:t>Hà Nam Khánh Giao (2023), Giáo trình Giao tiếp kinh doanh, NXB Tài chính.</a:t>
-            </a:r>
-            <a:endParaRPr lang="en-US" sz="1500" dirty="0"/>
-          </a:p>
-        </p:txBody>
-      </p:sp>
-      <p:sp>
-        <p:nvSpPr>
-          <p:cNvPr id="11" name="Shape 8"/>
-          <p:cNvSpPr/>
-          <p:nvPr/>
-        </p:nvSpPr>
-        <p:spPr>
-          <a:xfrm>
-            <a:off x="502920" y="2950464"/>
-            <a:ext cx="11201400" cy="1322832"/>
-          </a:xfrm>
-          <a:prstGeom prst="roundRect">
-            <a:avLst>
-              <a:gd name="adj" fmla="val 6221"/>
-            </a:avLst>
-          </a:prstGeom>
-          <a:solidFill>
-            <a:srgbClr val="FDF1EF"/>
-          </a:solidFill>
-          <a:ln w="15875">
-            <a:solidFill>
-              <a:srgbClr val="FBCEC9"/>
-            </a:solidFill>
-            <a:prstDash val="solid"/>
-          </a:ln>
-        </p:spPr>
-        <p:txBody>
-          <a:bodyPr/>
-          <a:p/>
-        </p:txBody>
-      </p:sp>
-      <p:sp>
-        <p:nvSpPr>
-          <p:cNvPr id="12" name="Text 9"/>
-          <p:cNvSpPr/>
-          <p:nvPr/>
-        </p:nvSpPr>
-        <p:spPr>
-          <a:xfrm>
-            <a:off x="722376" y="3005328"/>
-            <a:ext cx="10762488" cy="1213104"/>
-          </a:xfrm>
-          <a:prstGeom prst="rect">
-            <a:avLst/>
-          </a:prstGeom>
-          <a:noFill/>
-          <a:ln/>
-        </p:spPr>
-        <p:txBody>
-          <a:bodyPr wrap="square" lIns="0" tIns="0" rIns="0" bIns="0" rtlCol="0" anchor="ctr"/>
-          <a:lstStyle/>
-          <a:p>
-            <a:pPr indent="0" marL="0">
-              <a:buNone/>
-            </a:pPr>
-            <a:r>
-              <a:rPr lang="en-US" sz="1500" b="1" dirty="0">
-                <a:solidFill>
-                  <a:srgbClr val="AC4D33"/>
-                </a:solidFill>
-                <a:latin typeface="Calibri" pitchFamily="34" charset="0"/>
-                <a:ea typeface="Calibri" pitchFamily="34" charset="-122"/>
-                <a:cs typeface="Calibri" pitchFamily="34" charset="-120"/>
-              </a:rPr>
-              <a:t>Tài liệu tham khảo</a:t>
-            </a:r>
-            <a:endParaRPr lang="en-US" sz="1500" dirty="0"/>
-          </a:p>
-          <a:p>
-            <a:pPr indent="0" marL="0">
-              <a:buNone/>
-            </a:pPr>
-            <a:r>
-              <a:rPr lang="en-US" sz="1300" dirty="0">
-                <a:solidFill>
-                  <a:srgbClr val="3A2B28"/>
-                </a:solidFill>
-                <a:latin typeface="Calibri" pitchFamily="34" charset="0"/>
-                <a:ea typeface="Calibri" pitchFamily="34" charset="-122"/>
-                <a:cs typeface="Calibri" pitchFamily="34" charset="-120"/>
-              </a:rPr>
-              <a:t>Thái Trí Dũng (2012), Kỹ năng giao tiếp và thương lượng trong kinh doanh, NXB Lao động – Xã hội.  •  Nghị định 30/2020/NĐ-CP về công tác văn thư (dùng cho Chương 5 và phần thực hành).</a:t>
-            </a:r>
-            <a:endParaRPr lang="en-US" sz="1500" dirty="0"/>
-          </a:p>
-        </p:txBody>
-      </p:sp>
-      <p:sp>
-        <p:nvSpPr>
-          <p:cNvPr id="13" name="Shape 10"/>
-          <p:cNvSpPr/>
-          <p:nvPr/>
-        </p:nvSpPr>
-        <p:spPr>
-          <a:xfrm>
-            <a:off x="502920" y="4437888"/>
-            <a:ext cx="11201400" cy="1322832"/>
-          </a:xfrm>
-          <a:prstGeom prst="roundRect">
-            <a:avLst>
-              <a:gd name="adj" fmla="val 6221"/>
-            </a:avLst>
-          </a:prstGeom>
-          <a:solidFill>
-            <a:srgbClr val="FDF1EF"/>
-          </a:solidFill>
-          <a:ln w="15875">
-            <a:solidFill>
-              <a:srgbClr val="FBCEC9"/>
-            </a:solidFill>
-            <a:prstDash val="solid"/>
-          </a:ln>
-        </p:spPr>
-        <p:txBody>
-          <a:bodyPr/>
-          <a:p/>
-        </p:txBody>
-      </p:sp>
-      <p:sp>
-        <p:nvSpPr>
-          <p:cNvPr id="14" name="Text 11"/>
-          <p:cNvSpPr/>
-          <p:nvPr/>
-        </p:nvSpPr>
-        <p:spPr>
-          <a:xfrm>
-            <a:off x="722376" y="4492752"/>
-            <a:ext cx="10762488" cy="1213104"/>
-          </a:xfrm>
-          <a:prstGeom prst="rect">
-            <a:avLst/>
-          </a:prstGeom>
-          <a:noFill/>
-          <a:ln/>
-        </p:spPr>
-        <p:txBody>
-          <a:bodyPr wrap="square" lIns="0" tIns="0" rIns="0" bIns="0" rtlCol="0" anchor="ctr"/>
-          <a:lstStyle/>
-          <a:p>
-            <a:pPr indent="0" marL="0">
-              <a:buNone/>
-            </a:pPr>
-            <a:r>
-              <a:rPr lang="en-US" sz="1500" b="1" dirty="0">
-                <a:solidFill>
-                  <a:srgbClr val="AC4D33"/>
-                </a:solidFill>
-                <a:latin typeface="Calibri" pitchFamily="34" charset="0"/>
-                <a:ea typeface="Calibri" pitchFamily="34" charset="-122"/>
-                <a:cs typeface="Calibri" pitchFamily="34" charset="-120"/>
-              </a:rPr>
-              <a:t>Học liệu của giảng viên</a:t>
-            </a:r>
-            <a:endParaRPr lang="en-US" sz="1500" dirty="0"/>
-          </a:p>
-          <a:p>
-            <a:pPr indent="0" marL="0">
-              <a:buNone/>
-            </a:pPr>
-            <a:r>
-              <a:rPr lang="en-US" sz="1300" dirty="0">
-                <a:solidFill>
-                  <a:srgbClr val="3A2B28"/>
-                </a:solidFill>
-                <a:latin typeface="Calibri" pitchFamily="34" charset="0"/>
-                <a:ea typeface="Calibri" pitchFamily="34" charset="-122"/>
-                <a:cs typeface="Calibri" pitchFamily="34" charset="-120"/>
-              </a:rPr>
-              <a:t>Slide bài giảng, tình huống và bài tập do GV. Đỗ Thùy Hương biên soạn; cung cấp sau mỗi buổi học trên nhóm lớp.</a:t>
-            </a:r>
-            <a:endParaRPr lang="en-US" sz="1500" dirty="0"/>
-          </a:p>
-        </p:txBody>
-      </p:sp>
-    </p:spTree>
-  </p:cSld>
-  <p:clrMapOvr>
-    <a:masterClrMapping/>
-  </p:clrMapOvr>
-</p:sld>
-</file>
-
-<file path=ppt/slides/slide17.xml><?xml version="1.0" encoding="utf-8"?>
-<p:sld xmlns:a="http://schemas.openxmlformats.org/drawingml/2006/main" xmlns:p="http://schemas.openxmlformats.org/presentationml/2006/main" xmlns:r="http://schemas.openxmlformats.org/officeDocument/2006/relationships">
-  <p:cSld>
-    <p:spTree>
-      <p:nvGrpSpPr>
-        <p:cNvPr id="1" name=""/>
-        <p:cNvGrpSpPr/>
-        <p:nvPr/>
-      </p:nvGrpSpPr>
-      <p:grpSpPr/>
-      <p:sp>
-        <p:nvSpPr>
-          <p:cNvPr id="2" name="Rectangle 1"/>
-          <p:cNvSpPr/>
-          <p:nvPr/>
-        </p:nvSpPr>
-        <p:spPr>
-          <a:xfrm>
-            <a:off x="0" y="0"/>
-            <a:ext cx="12191695" cy="6858000"/>
-          </a:xfrm>
-          <a:prstGeom prst="rect">
-            <a:avLst/>
-          </a:prstGeom>
-          <a:solidFill>
-            <a:srgbClr val="FDFBF8"/>
-          </a:solidFill>
-          <a:ln>
-            <a:noFill/>
-          </a:ln>
-          <a:effectLst/>
-        </p:spPr>
-        <p:style>
-          <a:lnRef idx="1">
-            <a:schemeClr val="accent1"/>
-          </a:lnRef>
-          <a:fillRef idx="3">
-            <a:schemeClr val="accent1"/>
-          </a:fillRef>
-          <a:effectRef idx="2">
-            <a:schemeClr val="accent1"/>
-          </a:effectRef>
-          <a:fontRef idx="minor">
-            <a:schemeClr val="lt1"/>
-          </a:fontRef>
-        </p:style>
-        <p:txBody>
-          <a:bodyPr rtlCol="0" anchor="ctr"/>
-          <a:lstStyle/>
-          <a:p>
-            <a:pPr algn="ctr"/>
-          </a:p>
-        </p:txBody>
-      </p:sp>
-      <p:sp>
-        <p:nvSpPr>
-          <p:cNvPr id="3" name="TextBox 2"/>
-          <p:cNvSpPr txBox="1"/>
-          <p:nvPr/>
-        </p:nvSpPr>
-        <p:spPr>
-          <a:xfrm>
-            <a:off x="502920" y="292608"/>
-            <a:ext cx="11155680" cy="292608"/>
-          </a:xfrm>
-          <a:prstGeom prst="rect">
-            <a:avLst/>
-          </a:prstGeom>
-          <a:noFill/>
-        </p:spPr>
-        <p:txBody>
-          <a:bodyPr wrap="none">
-            <a:spAutoFit/>
-          </a:bodyPr>
-          <a:lstStyle/>
-          <a:p>
-            <a:r>
-              <a:rPr sz="1100" b="1">
-                <a:solidFill>
-                  <a:srgbClr val="DC756A"/>
-                </a:solidFill>
-                <a:latin typeface="Calibri"/>
-              </a:rPr>
-              <a:t>CON SỐ PHẢI NHỚ</a:t>
-            </a:r>
-          </a:p>
-        </p:txBody>
-      </p:sp>
-      <p:sp>
-        <p:nvSpPr>
-          <p:cNvPr id="4" name="TextBox 3"/>
-          <p:cNvSpPr txBox="1"/>
-          <p:nvPr/>
-        </p:nvSpPr>
-        <p:spPr>
-          <a:xfrm>
-            <a:off x="502920" y="603504"/>
-            <a:ext cx="11155680" cy="731520"/>
-          </a:xfrm>
-          <a:prstGeom prst="rect">
-            <a:avLst/>
-          </a:prstGeom>
-          <a:noFill/>
-        </p:spPr>
-        <p:txBody>
-          <a:bodyPr wrap="square">
-            <a:spAutoFit/>
-          </a:bodyPr>
-          <a:lstStyle/>
-          <a:p>
-            <a:r>
-              <a:rPr sz="2700" b="1">
-                <a:solidFill>
-                  <a:srgbClr val="3A2B28"/>
-                </a:solidFill>
-                <a:latin typeface="Cambria"/>
-              </a:rPr>
-              <a:t>Vì sao chuẩn bị lại quan trọng đến thế?</a:t>
-            </a:r>
-          </a:p>
-        </p:txBody>
-      </p:sp>
-      <p:sp>
-        <p:nvSpPr>
-          <p:cNvPr id="5" name="Rounded Rectangle 4"/>
-          <p:cNvSpPr/>
-          <p:nvPr/>
-        </p:nvSpPr>
-        <p:spPr>
-          <a:xfrm>
-            <a:off x="502920" y="1783080"/>
-            <a:ext cx="3575304" cy="3429000"/>
-          </a:xfrm>
-          <a:prstGeom prst="roundRect">
-            <a:avLst>
-              <a:gd name="adj" fmla="val 7000"/>
-            </a:avLst>
-          </a:prstGeom>
-          <a:solidFill>
-            <a:srgbClr val="FFFFFF"/>
-          </a:solidFill>
-          <a:ln w="15875">
-            <a:solidFill>
-              <a:srgbClr val="FBCEC9"/>
-            </a:solidFill>
-          </a:ln>
-          <a:effectLst/>
-        </p:spPr>
-        <p:style>
-          <a:lnRef idx="1">
-            <a:schemeClr val="accent1"/>
-          </a:lnRef>
-          <a:fillRef idx="3">
-            <a:schemeClr val="accent1"/>
-          </a:fillRef>
-          <a:effectRef idx="2">
-            <a:schemeClr val="accent1"/>
-          </a:effectRef>
-          <a:fontRef idx="minor">
-            <a:schemeClr val="lt1"/>
-          </a:fontRef>
-        </p:style>
-        <p:txBody>
-          <a:bodyPr rtlCol="0" anchor="ctr" wrap="square" lIns="182880" rIns="182880" tIns="274320" bIns="182880"/>
-          <a:lstStyle/>
-          <a:p>
-            <a:pPr algn="ctr"/>
-            <a:r>
-              <a:rPr sz="5800" b="1">
-                <a:solidFill>
-                  <a:srgbClr val="DC756A"/>
-                </a:solidFill>
-                <a:latin typeface="Cambria"/>
-              </a:rPr>
-              <a:t>70%</a:t>
-            </a:r>
-          </a:p>
-          <a:p>
-            <a:pPr algn="ctr"/>
-            <a:r>
-              <a:rPr sz="1400" b="1">
-                <a:solidFill>
-                  <a:srgbClr val="AC4D33"/>
-                </a:solidFill>
-                <a:latin typeface="Calibri"/>
-              </a:rPr>
-              <a:t>KẾT QUẢ</a:t>
-            </a:r>
-          </a:p>
-          <a:p>
-            <a:pPr algn="ctr">
-              <a:spcBef>
-                <a:spcPts val="1200"/>
-              </a:spcBef>
-            </a:pPr>
-            <a:r>
-              <a:rPr sz="1250">
-                <a:solidFill>
-                  <a:srgbClr val="3A2B28"/>
-                </a:solidFill>
-                <a:latin typeface="Calibri"/>
-              </a:rPr>
-              <a:t>được quyết định ngay từ giai đoạn chuẩn bị, trước khi hai bên ngồi vào bàn</a:t>
-            </a:r>
-          </a:p>
-        </p:txBody>
-      </p:sp>
-      <p:sp>
-        <p:nvSpPr>
-          <p:cNvPr id="6" name="Rounded Rectangle 5"/>
-          <p:cNvSpPr/>
-          <p:nvPr/>
-        </p:nvSpPr>
-        <p:spPr>
-          <a:xfrm>
-            <a:off x="4315968" y="1783080"/>
-            <a:ext cx="3575304" cy="3429000"/>
-          </a:xfrm>
-          <a:prstGeom prst="roundRect">
-            <a:avLst>
-              <a:gd name="adj" fmla="val 7000"/>
-            </a:avLst>
-          </a:prstGeom>
-          <a:solidFill>
-            <a:srgbClr val="FFFFFF"/>
-          </a:solidFill>
-          <a:ln w="15875">
-            <a:solidFill>
-              <a:srgbClr val="FBCEC9"/>
-            </a:solidFill>
-          </a:ln>
-          <a:effectLst/>
-        </p:spPr>
-        <p:style>
-          <a:lnRef idx="1">
-            <a:schemeClr val="accent1"/>
-          </a:lnRef>
-          <a:fillRef idx="3">
-            <a:schemeClr val="accent1"/>
-          </a:fillRef>
-          <a:effectRef idx="2">
-            <a:schemeClr val="accent1"/>
-          </a:effectRef>
-          <a:fontRef idx="minor">
-            <a:schemeClr val="lt1"/>
-          </a:fontRef>
-        </p:style>
-        <p:txBody>
-          <a:bodyPr rtlCol="0" anchor="ctr" wrap="square" lIns="182880" rIns="182880" tIns="274320" bIns="182880"/>
-          <a:lstStyle/>
-          <a:p>
-            <a:pPr algn="ctr"/>
-            <a:r>
-              <a:rPr sz="5800" b="1">
-                <a:solidFill>
-                  <a:srgbClr val="DC756A"/>
-                </a:solidFill>
-                <a:latin typeface="Cambria"/>
-              </a:rPr>
-              <a:t>3</a:t>
-            </a:r>
-          </a:p>
-          <a:p>
-            <a:pPr algn="ctr"/>
-            <a:r>
-              <a:rPr sz="1400" b="1">
-                <a:solidFill>
-                  <a:srgbClr val="AC4D33"/>
-                </a:solidFill>
-                <a:latin typeface="Calibri"/>
-              </a:rPr>
-              <a:t>MỨC MỤC TIÊU</a:t>
-            </a:r>
-          </a:p>
-          <a:p>
-            <a:pPr algn="ctr">
-              <a:spcBef>
-                <a:spcPts val="1200"/>
-              </a:spcBef>
-            </a:pPr>
-            <a:r>
-              <a:rPr sz="1250">
-                <a:solidFill>
-                  <a:srgbClr val="3A2B28"/>
-                </a:solidFill>
-                <a:latin typeface="Calibri"/>
-              </a:rPr>
-              <a:t>Lý tưởng – Kỳ vọng – Tối thiểu: phải viết ra giấy trước khi đàm phán</a:t>
-            </a:r>
-          </a:p>
-        </p:txBody>
-      </p:sp>
-      <p:sp>
-        <p:nvSpPr>
-          <p:cNvPr id="7" name="Rounded Rectangle 6"/>
-          <p:cNvSpPr/>
-          <p:nvPr/>
-        </p:nvSpPr>
-        <p:spPr>
-          <a:xfrm>
-            <a:off x="8129016" y="1783080"/>
-            <a:ext cx="3575304" cy="3429000"/>
-          </a:xfrm>
-          <a:prstGeom prst="roundRect">
-            <a:avLst>
-              <a:gd name="adj" fmla="val 7000"/>
-            </a:avLst>
-          </a:prstGeom>
-          <a:solidFill>
-            <a:srgbClr val="FFFFFF"/>
-          </a:solidFill>
-          <a:ln w="15875">
-            <a:solidFill>
-              <a:srgbClr val="FBCEC9"/>
-            </a:solidFill>
-          </a:ln>
-          <a:effectLst/>
-        </p:spPr>
-        <p:style>
-          <a:lnRef idx="1">
-            <a:schemeClr val="accent1"/>
-          </a:lnRef>
-          <a:fillRef idx="3">
-            <a:schemeClr val="accent1"/>
-          </a:fillRef>
-          <a:effectRef idx="2">
-            <a:schemeClr val="accent1"/>
-          </a:effectRef>
-          <a:fontRef idx="minor">
-            <a:schemeClr val="lt1"/>
-          </a:fontRef>
-        </p:style>
-        <p:txBody>
-          <a:bodyPr rtlCol="0" anchor="ctr" wrap="square" lIns="182880" rIns="182880" tIns="274320" bIns="182880"/>
-          <a:lstStyle/>
-          <a:p>
-            <a:pPr algn="ctr"/>
-            <a:r>
-              <a:rPr sz="5800" b="1">
-                <a:solidFill>
-                  <a:srgbClr val="DC756A"/>
-                </a:solidFill>
-                <a:latin typeface="Cambria"/>
-              </a:rPr>
-              <a:t>1</a:t>
-            </a:r>
-          </a:p>
-          <a:p>
-            <a:pPr algn="ctr"/>
-            <a:r>
-              <a:rPr sz="1400" b="1">
-                <a:solidFill>
-                  <a:srgbClr val="AC4D33"/>
-                </a:solidFill>
-                <a:latin typeface="Calibri"/>
-              </a:rPr>
-              <a:t>BATNA</a:t>
-            </a:r>
-          </a:p>
-          <a:p>
-            <a:pPr algn="ctr">
-              <a:spcBef>
-                <a:spcPts val="1200"/>
-              </a:spcBef>
-            </a:pPr>
-            <a:r>
-              <a:rPr sz="1250">
-                <a:solidFill>
-                  <a:srgbClr val="3A2B28"/>
-                </a:solidFill>
-                <a:latin typeface="Calibri"/>
-              </a:rPr>
-              <a:t>Phương án thay thế tốt nhất — nguồn sức mạnh thật sự trên bàn đàm phán</a:t>
-            </a:r>
-          </a:p>
-        </p:txBody>
-      </p:sp>
-      <p:sp>
-        <p:nvSpPr>
-          <p:cNvPr id="8" name="Rounded Rectangle 7"/>
-          <p:cNvSpPr/>
-          <p:nvPr/>
-        </p:nvSpPr>
-        <p:spPr>
-          <a:xfrm>
-            <a:off x="502920" y="5440680"/>
-            <a:ext cx="11201400" cy="685800"/>
-          </a:xfrm>
-          <a:prstGeom prst="roundRect">
-            <a:avLst>
-              <a:gd name="adj" fmla="val 12000"/>
-            </a:avLst>
-          </a:prstGeom>
-          <a:solidFill>
-            <a:srgbClr val="FDF1EF"/>
-          </a:solidFill>
-          <a:ln w="12700">
-            <a:solidFill>
-              <a:srgbClr val="FBCEC9"/>
-            </a:solidFill>
-          </a:ln>
-          <a:effectLst/>
-        </p:spPr>
-        <p:style>
-          <a:lnRef idx="1">
-            <a:schemeClr val="accent1"/>
-          </a:lnRef>
-          <a:fillRef idx="3">
-            <a:schemeClr val="accent1"/>
-          </a:fillRef>
-          <a:effectRef idx="2">
-            <a:schemeClr val="accent1"/>
-          </a:effectRef>
-          <a:fontRef idx="minor">
-            <a:schemeClr val="lt1"/>
-          </a:fontRef>
-        </p:style>
-        <p:txBody>
-          <a:bodyPr rtlCol="0" anchor="ctr" wrap="square" lIns="201168" rIns="201168"/>
-          <a:lstStyle/>
-          <a:p>
-            <a:pPr algn="ctr"/>
-            <a:r>
-              <a:rPr sz="1300">
-                <a:solidFill>
-                  <a:srgbClr val="3A2B28"/>
-                </a:solidFill>
-                <a:latin typeface="Calibri"/>
-              </a:rPr>
-              <a:t>Câu để đời của chương: “Không chuẩn bị chính là chuẩn bị để nhượng bộ.”</a:t>
-            </a:r>
-          </a:p>
-        </p:txBody>
-      </p:sp>
-      <p:sp>
-        <p:nvSpPr>
-          <p:cNvPr id="9" name="TextBox 8"/>
-          <p:cNvSpPr txBox="1"/>
-          <p:nvPr/>
-        </p:nvSpPr>
-        <p:spPr>
-          <a:xfrm>
-            <a:off x="502920" y="6419088"/>
-            <a:ext cx="7772400" cy="292608"/>
-          </a:xfrm>
-          <a:prstGeom prst="rect">
-            <a:avLst/>
-          </a:prstGeom>
-          <a:noFill/>
-        </p:spPr>
-        <p:txBody>
-          <a:bodyPr wrap="none">
-            <a:spAutoFit/>
-          </a:bodyPr>
-          <a:lstStyle/>
-          <a:p>
-            <a:r>
-              <a:rPr sz="900">
-                <a:solidFill>
-                  <a:srgbClr val="8A7A76"/>
-                </a:solidFill>
-                <a:latin typeface="Calibri"/>
-              </a:rPr>
-              <a:t>Je m'appelle Huong  •  GV. Đỗ Thùy Hương  •  EC1103</a:t>
-            </a:r>
-          </a:p>
-        </p:txBody>
-      </p:sp>
-      <p:sp>
-        <p:nvSpPr>
-          <p:cNvPr id="10" name="TextBox 9"/>
-          <p:cNvSpPr txBox="1"/>
-          <p:nvPr/>
-        </p:nvSpPr>
-        <p:spPr>
-          <a:xfrm>
-            <a:off x="9326880" y="6419088"/>
-            <a:ext cx="1920240" cy="292608"/>
-          </a:xfrm>
-          <a:prstGeom prst="rect">
-            <a:avLst/>
-          </a:prstGeom>
-          <a:noFill/>
-        </p:spPr>
-        <p:txBody>
-          <a:bodyPr wrap="none">
-            <a:spAutoFit/>
-          </a:bodyPr>
-          <a:lstStyle/>
-          <a:p>
-            <a:pPr algn="r"/>
-            <a:r>
-              <a:rPr sz="900">
-                <a:solidFill>
-                  <a:srgbClr val="8A7A76"/>
-                </a:solidFill>
-                <a:latin typeface="Calibri"/>
-              </a:rPr>
-              <a:t>Chương 4</a:t>
-            </a:r>
-          </a:p>
-        </p:txBody>
-      </p:sp>
-    </p:spTree>
-  </p:cSld>
-  <p:clrMapOvr>
-    <a:masterClrMapping/>
-  </p:clrMapOvr>
-</p:sld>
-</file>
-
-<file path=ppt/slides/slide18.xml><?xml version="1.0" encoding="utf-8"?>
-<p:sld xmlns:a="http://schemas.openxmlformats.org/drawingml/2006/main" xmlns:p="http://schemas.openxmlformats.org/presentationml/2006/main" xmlns:r="http://schemas.openxmlformats.org/officeDocument/2006/relationships">
-  <p:cSld>
-    <p:spTree>
-      <p:nvGrpSpPr>
-        <p:cNvPr id="1" name=""/>
-        <p:cNvGrpSpPr/>
-        <p:nvPr/>
-      </p:nvGrpSpPr>
-      <p:grpSpPr/>
-      <p:sp>
-        <p:nvSpPr>
-          <p:cNvPr id="2" name="Rectangle 1"/>
-          <p:cNvSpPr/>
-          <p:nvPr/>
-        </p:nvSpPr>
-        <p:spPr>
-          <a:xfrm>
-            <a:off x="0" y="0"/>
-            <a:ext cx="12191695" cy="6858000"/>
-          </a:xfrm>
-          <a:prstGeom prst="rect">
-            <a:avLst/>
-          </a:prstGeom>
-          <a:solidFill>
-            <a:srgbClr val="FDFBF8"/>
-          </a:solidFill>
-          <a:ln>
-            <a:noFill/>
-          </a:ln>
-          <a:effectLst/>
-        </p:spPr>
-        <p:style>
-          <a:lnRef idx="1">
-            <a:schemeClr val="accent1"/>
-          </a:lnRef>
-          <a:fillRef idx="3">
-            <a:schemeClr val="accent1"/>
-          </a:fillRef>
-          <a:effectRef idx="2">
-            <a:schemeClr val="accent1"/>
-          </a:effectRef>
-          <a:fontRef idx="minor">
-            <a:schemeClr val="lt1"/>
-          </a:fontRef>
-        </p:style>
-        <p:txBody>
-          <a:bodyPr rtlCol="0" anchor="ctr"/>
-          <a:lstStyle/>
-          <a:p>
-            <a:pPr algn="ctr"/>
-          </a:p>
-        </p:txBody>
-      </p:sp>
-      <p:sp>
-        <p:nvSpPr>
-          <p:cNvPr id="3" name="Rectangle 2"/>
-          <p:cNvSpPr/>
-          <p:nvPr/>
-        </p:nvSpPr>
-        <p:spPr>
-          <a:xfrm>
-            <a:off x="0" y="2103120"/>
-            <a:ext cx="12191695" cy="2743200"/>
-          </a:xfrm>
-          <a:prstGeom prst="rect">
-            <a:avLst/>
-          </a:prstGeom>
-          <a:solidFill>
-            <a:srgbClr val="FDF1EF"/>
-          </a:solidFill>
-          <a:ln>
-            <a:noFill/>
-          </a:ln>
-          <a:effectLst/>
-        </p:spPr>
-        <p:style>
-          <a:lnRef idx="1">
-            <a:schemeClr val="accent1"/>
-          </a:lnRef>
-          <a:fillRef idx="3">
-            <a:schemeClr val="accent1"/>
-          </a:fillRef>
-          <a:effectRef idx="2">
-            <a:schemeClr val="accent1"/>
-          </a:effectRef>
-          <a:fontRef idx="minor">
-            <a:schemeClr val="lt1"/>
-          </a:fontRef>
-        </p:style>
-        <p:txBody>
-          <a:bodyPr rtlCol="0" anchor="ctr"/>
-          <a:lstStyle/>
-          <a:p>
-            <a:pPr algn="ctr"/>
-          </a:p>
-        </p:txBody>
-      </p:sp>
-      <p:sp>
-        <p:nvSpPr>
-          <p:cNvPr id="4" name="Rectangle 3"/>
-          <p:cNvSpPr/>
-          <p:nvPr/>
-        </p:nvSpPr>
-        <p:spPr>
-          <a:xfrm>
-            <a:off x="0" y="0"/>
-            <a:ext cx="274320" cy="6858000"/>
-          </a:xfrm>
-          <a:prstGeom prst="rect">
-            <a:avLst/>
-          </a:prstGeom>
-          <a:solidFill>
-            <a:srgbClr val="DC756A"/>
-          </a:solidFill>
-          <a:ln>
-            <a:noFill/>
-          </a:ln>
-          <a:effectLst/>
-        </p:spPr>
-        <p:style>
-          <a:lnRef idx="1">
-            <a:schemeClr val="accent1"/>
-          </a:lnRef>
-          <a:fillRef idx="3">
-            <a:schemeClr val="accent1"/>
-          </a:fillRef>
-          <a:effectRef idx="2">
-            <a:schemeClr val="accent1"/>
-          </a:effectRef>
-          <a:fontRef idx="minor">
-            <a:schemeClr val="lt1"/>
-          </a:fontRef>
-        </p:style>
-        <p:txBody>
-          <a:bodyPr rtlCol="0" anchor="ctr"/>
-          <a:lstStyle/>
-          <a:p>
-            <a:pPr algn="ctr"/>
-          </a:p>
-        </p:txBody>
-      </p:sp>
-      <p:sp>
-        <p:nvSpPr>
-          <p:cNvPr id="5" name="TextBox 4"/>
-          <p:cNvSpPr txBox="1"/>
-          <p:nvPr/>
-        </p:nvSpPr>
-        <p:spPr>
-          <a:xfrm>
-            <a:off x="1280160" y="2377440"/>
-            <a:ext cx="9692640" cy="411480"/>
-          </a:xfrm>
-          <a:prstGeom prst="rect">
-            <a:avLst/>
-          </a:prstGeom>
-          <a:noFill/>
-        </p:spPr>
-        <p:txBody>
-          <a:bodyPr wrap="none">
-            <a:spAutoFit/>
-          </a:bodyPr>
-          <a:lstStyle/>
-          <a:p>
-            <a:r>
-              <a:rPr sz="1500" b="1">
-                <a:solidFill>
-                  <a:srgbClr val="DC756A"/>
-                </a:solidFill>
-                <a:latin typeface="Calibri"/>
-              </a:rPr>
-              <a:t>MỤC 4.1</a:t>
-            </a:r>
-          </a:p>
-        </p:txBody>
-      </p:sp>
-      <p:sp>
-        <p:nvSpPr>
-          <p:cNvPr id="6" name="TextBox 5"/>
-          <p:cNvSpPr txBox="1"/>
-          <p:nvPr/>
-        </p:nvSpPr>
-        <p:spPr>
-          <a:xfrm>
-            <a:off x="1280160" y="2788920"/>
-            <a:ext cx="9601200" cy="1371600"/>
-          </a:xfrm>
-          <a:prstGeom prst="rect">
-            <a:avLst/>
-          </a:prstGeom>
-          <a:noFill/>
-        </p:spPr>
-        <p:txBody>
-          <a:bodyPr wrap="square">
-            <a:spAutoFit/>
-          </a:bodyPr>
-          <a:lstStyle/>
-          <a:p>
-            <a:r>
-              <a:rPr sz="3800" b="1">
-                <a:solidFill>
-                  <a:srgbClr val="AC4D33"/>
-                </a:solidFill>
-                <a:latin typeface="Cambria"/>
-              </a:rPr>
-              <a:t>Khái niệm và các kiểu đàm phán</a:t>
-            </a:r>
-          </a:p>
-        </p:txBody>
-      </p:sp>
-      <p:sp>
-        <p:nvSpPr>
-          <p:cNvPr id="7" name="TextBox 6"/>
-          <p:cNvSpPr txBox="1"/>
-          <p:nvPr/>
-        </p:nvSpPr>
-        <p:spPr>
-          <a:xfrm>
-            <a:off x="1280160" y="4224528"/>
-            <a:ext cx="9418320" cy="640080"/>
-          </a:xfrm>
-          <a:prstGeom prst="rect">
-            <a:avLst/>
-          </a:prstGeom>
-          <a:noFill/>
-        </p:spPr>
-        <p:txBody>
-          <a:bodyPr wrap="square">
-            <a:spAutoFit/>
-          </a:bodyPr>
-          <a:lstStyle/>
-          <a:p>
-            <a:r>
-              <a:rPr sz="1450" i="1">
-                <a:solidFill>
-                  <a:srgbClr val="8A7A76"/>
-                </a:solidFill>
-                <a:latin typeface="Calibri"/>
-              </a:rPr>
-              <a:t>Hiểu bản chất kép của đàm phán: vừa hợp tác vừa cạnh tranh.</a:t>
-            </a:r>
-          </a:p>
-        </p:txBody>
-      </p:sp>
-      <p:sp>
-        <p:nvSpPr>
-          <p:cNvPr id="8" name="TextBox 7"/>
-          <p:cNvSpPr txBox="1"/>
-          <p:nvPr/>
-        </p:nvSpPr>
-        <p:spPr>
-          <a:xfrm>
-            <a:off x="502920" y="6419088"/>
-            <a:ext cx="7772400" cy="292608"/>
-          </a:xfrm>
-          <a:prstGeom prst="rect">
-            <a:avLst/>
-          </a:prstGeom>
-          <a:noFill/>
-        </p:spPr>
-        <p:txBody>
-          <a:bodyPr wrap="none">
-            <a:spAutoFit/>
-          </a:bodyPr>
-          <a:lstStyle/>
-          <a:p>
-            <a:r>
-              <a:rPr sz="900">
-                <a:solidFill>
-                  <a:srgbClr val="8A7A76"/>
-                </a:solidFill>
-                <a:latin typeface="Calibri"/>
-              </a:rPr>
-              <a:t>Je m'appelle Huong  •  GV. Đỗ Thùy Hương  •  EC1103</a:t>
-            </a:r>
-          </a:p>
-        </p:txBody>
-      </p:sp>
-      <p:sp>
-        <p:nvSpPr>
-          <p:cNvPr id="9" name="TextBox 8"/>
-          <p:cNvSpPr txBox="1"/>
-          <p:nvPr/>
-        </p:nvSpPr>
-        <p:spPr>
-          <a:xfrm>
-            <a:off x="9326880" y="6419088"/>
-            <a:ext cx="1920240" cy="292608"/>
-          </a:xfrm>
-          <a:prstGeom prst="rect">
-            <a:avLst/>
-          </a:prstGeom>
-          <a:noFill/>
-        </p:spPr>
-        <p:txBody>
-          <a:bodyPr wrap="none">
-            <a:spAutoFit/>
-          </a:bodyPr>
-          <a:lstStyle/>
-          <a:p>
-            <a:pPr algn="r"/>
-            <a:r>
-              <a:rPr sz="900">
-                <a:solidFill>
-                  <a:srgbClr val="8A7A76"/>
-                </a:solidFill>
-                <a:latin typeface="Calibri"/>
-              </a:rPr>
-              <a:t>Chương 4</a:t>
-            </a:r>
-          </a:p>
-        </p:txBody>
-      </p:sp>
-    </p:spTree>
-  </p:cSld>
-  <p:clrMapOvr>
-    <a:masterClrMapping/>
-  </p:clrMapOvr>
-</p:sld>
-</file>
-
-<file path=ppt/slides/slide19.xml><?xml version="1.0" encoding="utf-8"?>
-<p:sld xmlns:a="http://schemas.openxmlformats.org/drawingml/2006/main" xmlns:p="http://schemas.openxmlformats.org/presentationml/2006/main" xmlns:r="http://schemas.openxmlformats.org/officeDocument/2006/relationships">
-  <p:cSld>
-    <p:spTree>
-      <p:nvGrpSpPr>
-        <p:cNvPr id="1" name=""/>
-        <p:cNvGrpSpPr/>
-        <p:nvPr/>
-      </p:nvGrpSpPr>
-      <p:grpSpPr/>
-      <p:sp>
-        <p:nvSpPr>
-          <p:cNvPr id="2" name="Rectangle 1"/>
-          <p:cNvSpPr/>
-          <p:nvPr/>
-        </p:nvSpPr>
-        <p:spPr>
-          <a:xfrm>
-            <a:off x="0" y="0"/>
-            <a:ext cx="12191695" cy="6858000"/>
-          </a:xfrm>
-          <a:prstGeom prst="rect">
-            <a:avLst/>
-          </a:prstGeom>
-          <a:solidFill>
-            <a:srgbClr val="FDFBF8"/>
-          </a:solidFill>
-          <a:ln>
-            <a:noFill/>
-          </a:ln>
-          <a:effectLst/>
-        </p:spPr>
-        <p:style>
-          <a:lnRef idx="1">
-            <a:schemeClr val="accent1"/>
-          </a:lnRef>
-          <a:fillRef idx="3">
-            <a:schemeClr val="accent1"/>
-          </a:fillRef>
-          <a:effectRef idx="2">
-            <a:schemeClr val="accent1"/>
-          </a:effectRef>
-          <a:fontRef idx="minor">
-            <a:schemeClr val="lt1"/>
-          </a:fontRef>
-        </p:style>
-        <p:txBody>
-          <a:bodyPr rtlCol="0" anchor="ctr"/>
-          <a:lstStyle/>
-          <a:p>
-            <a:pPr algn="ctr"/>
-          </a:p>
-        </p:txBody>
-      </p:sp>
-      <p:sp>
-        <p:nvSpPr>
-          <p:cNvPr id="3" name="Rectangle 2"/>
-          <p:cNvSpPr/>
-          <p:nvPr/>
-        </p:nvSpPr>
-        <p:spPr>
-          <a:xfrm>
-            <a:off x="0" y="2103120"/>
-            <a:ext cx="12191695" cy="2743200"/>
-          </a:xfrm>
-          <a:prstGeom prst="rect">
-            <a:avLst/>
-          </a:prstGeom>
-          <a:solidFill>
-            <a:srgbClr val="FDF1EF"/>
-          </a:solidFill>
-          <a:ln>
-            <a:noFill/>
-          </a:ln>
-          <a:effectLst/>
-        </p:spPr>
-        <p:style>
-          <a:lnRef idx="1">
-            <a:schemeClr val="accent1"/>
-          </a:lnRef>
-          <a:fillRef idx="3">
-            <a:schemeClr val="accent1"/>
-          </a:fillRef>
-          <a:effectRef idx="2">
-            <a:schemeClr val="accent1"/>
-          </a:effectRef>
-          <a:fontRef idx="minor">
-            <a:schemeClr val="lt1"/>
-          </a:fontRef>
-        </p:style>
-        <p:txBody>
-          <a:bodyPr rtlCol="0" anchor="ctr"/>
-          <a:lstStyle/>
-          <a:p>
-            <a:pPr algn="ctr"/>
-          </a:p>
-        </p:txBody>
-      </p:sp>
-      <p:sp>
-        <p:nvSpPr>
-          <p:cNvPr id="4" name="Rectangle 3"/>
-          <p:cNvSpPr/>
-          <p:nvPr/>
-        </p:nvSpPr>
-        <p:spPr>
-          <a:xfrm>
-            <a:off x="0" y="0"/>
-            <a:ext cx="274320" cy="6858000"/>
-          </a:xfrm>
-          <a:prstGeom prst="rect">
-            <a:avLst/>
-          </a:prstGeom>
-          <a:solidFill>
-            <a:srgbClr val="DC756A"/>
-          </a:solidFill>
-          <a:ln>
-            <a:noFill/>
-          </a:ln>
-          <a:effectLst/>
-        </p:spPr>
-        <p:style>
-          <a:lnRef idx="1">
-            <a:schemeClr val="accent1"/>
-          </a:lnRef>
-          <a:fillRef idx="3">
-            <a:schemeClr val="accent1"/>
-          </a:fillRef>
-          <a:effectRef idx="2">
-            <a:schemeClr val="accent1"/>
-          </a:effectRef>
-          <a:fontRef idx="minor">
-            <a:schemeClr val="lt1"/>
-          </a:fontRef>
-        </p:style>
-        <p:txBody>
-          <a:bodyPr rtlCol="0" anchor="ctr"/>
-          <a:lstStyle/>
-          <a:p>
-            <a:pPr algn="ctr"/>
-          </a:p>
-        </p:txBody>
-      </p:sp>
-      <p:sp>
-        <p:nvSpPr>
-          <p:cNvPr id="5" name="TextBox 4"/>
-          <p:cNvSpPr txBox="1"/>
-          <p:nvPr/>
-        </p:nvSpPr>
-        <p:spPr>
-          <a:xfrm>
-            <a:off x="1280160" y="2377440"/>
-            <a:ext cx="9692640" cy="411480"/>
-          </a:xfrm>
-          <a:prstGeom prst="rect">
-            <a:avLst/>
-          </a:prstGeom>
-          <a:noFill/>
-        </p:spPr>
-        <p:txBody>
-          <a:bodyPr wrap="none">
-            <a:spAutoFit/>
-          </a:bodyPr>
-          <a:lstStyle/>
-          <a:p>
-            <a:r>
-              <a:rPr sz="1500" b="1">
-                <a:solidFill>
-                  <a:srgbClr val="DC756A"/>
-                </a:solidFill>
-                <a:latin typeface="Calibri"/>
-              </a:rPr>
-              <a:t>MỤC 4.2</a:t>
-            </a:r>
-          </a:p>
-        </p:txBody>
-      </p:sp>
-      <p:sp>
-        <p:nvSpPr>
-          <p:cNvPr id="6" name="TextBox 5"/>
-          <p:cNvSpPr txBox="1"/>
-          <p:nvPr/>
-        </p:nvSpPr>
-        <p:spPr>
-          <a:xfrm>
-            <a:off x="1280160" y="2788920"/>
-            <a:ext cx="9601200" cy="1371600"/>
-          </a:xfrm>
-          <a:prstGeom prst="rect">
-            <a:avLst/>
-          </a:prstGeom>
-          <a:noFill/>
-        </p:spPr>
-        <p:txBody>
-          <a:bodyPr wrap="square">
-            <a:spAutoFit/>
-          </a:bodyPr>
-          <a:lstStyle/>
-          <a:p>
-            <a:r>
-              <a:rPr sz="3800" b="1">
-                <a:solidFill>
-                  <a:srgbClr val="AC4D33"/>
-                </a:solidFill>
-                <a:latin typeface="Cambria"/>
-              </a:rPr>
-              <a:t>Tiến trình đàm phán năm giai đoạn</a:t>
-            </a:r>
-          </a:p>
-        </p:txBody>
-      </p:sp>
-      <p:sp>
-        <p:nvSpPr>
-          <p:cNvPr id="7" name="TextBox 6"/>
-          <p:cNvSpPr txBox="1"/>
-          <p:nvPr/>
-        </p:nvSpPr>
-        <p:spPr>
-          <a:xfrm>
-            <a:off x="1280160" y="4224528"/>
-            <a:ext cx="9418320" cy="640080"/>
-          </a:xfrm>
-          <a:prstGeom prst="rect">
-            <a:avLst/>
-          </a:prstGeom>
-          <a:noFill/>
-        </p:spPr>
-        <p:txBody>
-          <a:bodyPr wrap="square">
-            <a:spAutoFit/>
-          </a:bodyPr>
-          <a:lstStyle/>
-          <a:p>
-            <a:r>
-              <a:rPr sz="1450" i="1">
-                <a:solidFill>
-                  <a:srgbClr val="8A7A76"/>
-                </a:solidFill>
-                <a:latin typeface="Calibri"/>
-              </a:rPr>
-              <a:t>Bảy mươi phần trăm kết quả được quyết định trước khi hai bên ngồi vào bàn.</a:t>
-            </a:r>
-          </a:p>
-        </p:txBody>
-      </p:sp>
-      <p:sp>
-        <p:nvSpPr>
-          <p:cNvPr id="8" name="TextBox 7"/>
-          <p:cNvSpPr txBox="1"/>
-          <p:nvPr/>
-        </p:nvSpPr>
-        <p:spPr>
-          <a:xfrm>
-            <a:off x="502920" y="6419088"/>
-            <a:ext cx="7772400" cy="292608"/>
-          </a:xfrm>
-          <a:prstGeom prst="rect">
-            <a:avLst/>
-          </a:prstGeom>
-          <a:noFill/>
-        </p:spPr>
-        <p:txBody>
-          <a:bodyPr wrap="none">
-            <a:spAutoFit/>
-          </a:bodyPr>
-          <a:lstStyle/>
-          <a:p>
-            <a:r>
-              <a:rPr sz="900">
-                <a:solidFill>
-                  <a:srgbClr val="8A7A76"/>
-                </a:solidFill>
-                <a:latin typeface="Calibri"/>
-              </a:rPr>
-              <a:t>Je m'appelle Huong  •  GV. Đỗ Thùy Hương  •  EC1103</a:t>
-            </a:r>
-          </a:p>
-        </p:txBody>
-      </p:sp>
-      <p:sp>
-        <p:nvSpPr>
-          <p:cNvPr id="9" name="TextBox 8"/>
-          <p:cNvSpPr txBox="1"/>
-          <p:nvPr/>
-        </p:nvSpPr>
-        <p:spPr>
-          <a:xfrm>
-            <a:off x="9326880" y="6419088"/>
-            <a:ext cx="1920240" cy="292608"/>
-          </a:xfrm>
-          <a:prstGeom prst="rect">
-            <a:avLst/>
-          </a:prstGeom>
-          <a:noFill/>
-        </p:spPr>
-        <p:txBody>
-          <a:bodyPr wrap="none">
-            <a:spAutoFit/>
-          </a:bodyPr>
-          <a:lstStyle/>
-          <a:p>
-            <a:pPr algn="r"/>
-            <a:r>
-              <a:rPr sz="900">
-                <a:solidFill>
-                  <a:srgbClr val="8A7A76"/>
-                </a:solidFill>
-                <a:latin typeface="Calibri"/>
-              </a:rPr>
-              <a:t>Chương 4</a:t>
-            </a:r>
           </a:p>
         </p:txBody>
       </p:sp>
@@ -8813,7 +8913,7 @@
       </p:grpSpPr>
       <p:pic>
         <p:nvPicPr>
-          <p:cNvPr id="2" name="Image 0" descr="assets/logo_tron.png">    </p:cNvPr>
+          <p:cNvPr id="2" name="Image 0" descr="/home/user/comdraft/assets/img/dau-huong.png">    </p:cNvPr>
           <p:cNvPicPr>
             <a:picLocks noChangeAspect="1"/>
           </p:cNvPicPr>
@@ -9527,315 +9627,530 @@
 </file>
 
 <file path=ppt/slides/slide20.xml><?xml version="1.0" encoding="utf-8"?>
-<p:sld xmlns:a="http://schemas.openxmlformats.org/drawingml/2006/main" xmlns:p="http://schemas.openxmlformats.org/presentationml/2006/main" xmlns:r="http://schemas.openxmlformats.org/officeDocument/2006/relationships">
-  <p:cSld>
+<p:sld xmlns:a="http://schemas.openxmlformats.org/drawingml/2006/main" xmlns:r="http://schemas.openxmlformats.org/officeDocument/2006/relationships" xmlns:p="http://schemas.openxmlformats.org/presentationml/2006/main">
+  <p:cSld name="Slide 16">
+    <p:bg>
+      <p:bgPr>
+        <a:solidFill>
+          <a:srgbClr val="FDFBF8"/>
+        </a:solidFill>
+      </p:bgPr>
+    </p:bg>
     <p:spTree>
       <p:nvGrpSpPr>
         <p:cNvPr id="1" name=""/>
         <p:cNvGrpSpPr/>
         <p:nvPr/>
       </p:nvGrpSpPr>
-      <p:grpSpPr/>
-      <p:sp>
-        <p:nvSpPr>
-          <p:cNvPr id="2" name="Rectangle 1"/>
-          <p:cNvSpPr/>
-          <p:nvPr/>
-        </p:nvSpPr>
-        <p:spPr>
-          <a:xfrm>
-            <a:off x="0" y="0"/>
-            <a:ext cx="12191695" cy="6858000"/>
-          </a:xfrm>
-          <a:prstGeom prst="rect">
+      <p:grpSpPr>
+        <a:xfrm>
+          <a:off x="0" y="0"/>
+          <a:ext cx="0" cy="0"/>
+          <a:chOff x="0" y="0"/>
+          <a:chExt cx="0" cy="0"/>
+        </a:xfrm>
+      </p:grpSpPr>
+      <p:pic>
+        <p:nvPicPr>
+          <p:cNvPr id="2" name="Image 0" descr="/home/user/comdraft/assets/img/dau-huong.png">    </p:cNvPr>
+          <p:cNvPicPr>
+            <a:picLocks noChangeAspect="1"/>
+          </p:cNvPicPr>
+          <p:nvPr/>
+        </p:nvPicPr>
+        <p:blipFill>
+          <a:blip r:embed="rId1"/>
+          <a:stretch>
+            <a:fillRect/>
+          </a:stretch>
+        </p:blipFill>
+        <p:spPr>
+          <a:xfrm>
+            <a:off x="411480" y="6327648"/>
+            <a:ext cx="384048" cy="384048"/>
+          </a:xfrm>
+          <a:prstGeom prst="rect">
+            <a:avLst/>
+          </a:prstGeom>
+        </p:spPr>
+      </p:pic>
+      <p:sp>
+        <p:nvSpPr>
+          <p:cNvPr id="3" name="Text 0"/>
+          <p:cNvSpPr/>
+          <p:nvPr/>
+        </p:nvSpPr>
+        <p:spPr>
+          <a:xfrm>
+            <a:off x="868680" y="6355080"/>
+            <a:ext cx="7498080" cy="310896"/>
+          </a:xfrm>
+          <a:prstGeom prst="rect">
+            <a:avLst/>
+          </a:prstGeom>
+          <a:noFill/>
+          <a:ln/>
+        </p:spPr>
+        <p:txBody>
+          <a:bodyPr wrap="square" lIns="0" tIns="0" rIns="0" bIns="0" rtlCol="0" anchor="ctr"/>
+          <a:lstStyle/>
+          <a:p>
+            <a:pPr indent="0" marL="0">
+              <a:buNone/>
+            </a:pPr>
+            <a:r>
+              <a:rPr lang="en-US" sz="900" dirty="0">
+                <a:solidFill>
+                  <a:srgbClr val="8A7A76"/>
+                </a:solidFill>
+                <a:latin typeface="Calibri" pitchFamily="34" charset="0"/>
+                <a:ea typeface="Calibri" pitchFamily="34" charset="-122"/>
+                <a:cs typeface="Calibri" pitchFamily="34" charset="-120"/>
+              </a:rPr>
+              <a:t>Je m'appelle Huong  •  GV. Đỗ Thùy Hương  •  EC1103</a:t>
+            </a:r>
+            <a:endParaRPr lang="en-US" sz="900" dirty="0"/>
+          </a:p>
+        </p:txBody>
+      </p:sp>
+      <p:sp>
+        <p:nvSpPr>
+          <p:cNvPr id="4" name="Text 1"/>
+          <p:cNvSpPr/>
+          <p:nvPr/>
+        </p:nvSpPr>
+        <p:spPr>
+          <a:xfrm>
+            <a:off x="8503920" y="6355080"/>
+            <a:ext cx="2743200" cy="310896"/>
+          </a:xfrm>
+          <a:prstGeom prst="rect">
+            <a:avLst/>
+          </a:prstGeom>
+          <a:noFill/>
+          <a:ln/>
+        </p:spPr>
+        <p:txBody>
+          <a:bodyPr wrap="square" lIns="0" tIns="0" rIns="0" bIns="0" rtlCol="0" anchor="ctr"/>
+          <a:lstStyle/>
+          <a:p>
+            <a:pPr algn="r" indent="0" marL="0">
+              <a:buNone/>
+            </a:pPr>
+            <a:r>
+              <a:rPr lang="en-US" sz="900" dirty="0">
+                <a:solidFill>
+                  <a:srgbClr val="8A7A76"/>
+                </a:solidFill>
+                <a:latin typeface="Calibri" pitchFamily="34" charset="0"/>
+                <a:ea typeface="Calibri" pitchFamily="34" charset="-122"/>
+                <a:cs typeface="Calibri" pitchFamily="34" charset="-120"/>
+              </a:rPr>
+              <a:t>Chương 4</a:t>
+            </a:r>
+            <a:endParaRPr lang="en-US" sz="900" dirty="0"/>
+          </a:p>
+        </p:txBody>
+      </p:sp>
+      <p:sp>
+        <p:nvSpPr>
+          <p:cNvPr id="5" name="Shape 2"/>
+          <p:cNvSpPr/>
+          <p:nvPr/>
+        </p:nvSpPr>
+        <p:spPr>
+          <a:xfrm>
+            <a:off x="11430000" y="6327648"/>
+            <a:ext cx="365760" cy="365760"/>
+          </a:xfrm>
+          <a:prstGeom prst="ellipse">
             <a:avLst/>
           </a:prstGeom>
           <a:solidFill>
-            <a:srgbClr val="FDFBF8"/>
+            <a:srgbClr val="DC756A"/>
           </a:solidFill>
-          <a:ln>
-            <a:noFill/>
-          </a:ln>
-          <a:effectLst/>
-        </p:spPr>
-        <p:style>
-          <a:lnRef idx="1">
-            <a:schemeClr val="accent1"/>
-          </a:lnRef>
-          <a:fillRef idx="3">
-            <a:schemeClr val="accent1"/>
-          </a:fillRef>
-          <a:effectRef idx="2">
-            <a:schemeClr val="accent1"/>
-          </a:effectRef>
-          <a:fontRef idx="minor">
-            <a:schemeClr val="lt1"/>
-          </a:fontRef>
-        </p:style>
-        <p:txBody>
-          <a:bodyPr rtlCol="0" anchor="ctr"/>
-          <a:lstStyle/>
-          <a:p>
-            <a:pPr algn="ctr"/>
-          </a:p>
-        </p:txBody>
-      </p:sp>
-      <p:sp>
-        <p:nvSpPr>
-          <p:cNvPr id="3" name="Rectangle 2"/>
-          <p:cNvSpPr/>
-          <p:nvPr/>
-        </p:nvSpPr>
-        <p:spPr>
-          <a:xfrm>
-            <a:off x="0" y="2103120"/>
-            <a:ext cx="12191695" cy="2743200"/>
-          </a:xfrm>
-          <a:prstGeom prst="rect">
-            <a:avLst/>
+          <a:ln/>
+        </p:spPr>
+        <p:txBody>
+          <a:bodyPr/>
+          <a:p/>
+        </p:txBody>
+      </p:sp>
+      <p:sp>
+        <p:nvSpPr>
+          <p:cNvPr id="6" name="Text 3"/>
+          <p:cNvSpPr/>
+          <p:nvPr/>
+        </p:nvSpPr>
+        <p:spPr>
+          <a:xfrm>
+            <a:off x="11430000" y="6327648"/>
+            <a:ext cx="365760" cy="365760"/>
+          </a:xfrm>
+          <a:prstGeom prst="rect">
+            <a:avLst/>
+          </a:prstGeom>
+          <a:noFill/>
+          <a:ln/>
+        </p:spPr>
+        <p:txBody>
+          <a:bodyPr wrap="square" lIns="0" tIns="0" rIns="0" bIns="0" rtlCol="0" anchor="ctr"/>
+          <a:lstStyle/>
+          <a:p>
+            <a:pPr algn="ctr" indent="0" marL="0">
+              <a:buNone/>
+            </a:pPr>
+            <a:r>
+              <a:rPr lang="en-US" sz="1000" b="1" dirty="0">
+                <a:solidFill>
+                  <a:srgbClr val="FFFFFF"/>
+                </a:solidFill>
+                <a:latin typeface="Calibri" pitchFamily="34" charset="0"/>
+                <a:ea typeface="Calibri" pitchFamily="34" charset="-122"/>
+                <a:cs typeface="Calibri" pitchFamily="34" charset="-120"/>
+              </a:rPr>
+              <a:t>16</a:t>
+            </a:r>
+            <a:endParaRPr lang="en-US" sz="1000" dirty="0"/>
+          </a:p>
+        </p:txBody>
+      </p:sp>
+      <p:sp>
+        <p:nvSpPr>
+          <p:cNvPr id="7" name="Text 4"/>
+          <p:cNvSpPr/>
+          <p:nvPr/>
+        </p:nvSpPr>
+        <p:spPr>
+          <a:xfrm>
+            <a:off x="502920" y="310896"/>
+            <a:ext cx="11155680" cy="274320"/>
+          </a:xfrm>
+          <a:prstGeom prst="rect">
+            <a:avLst/>
+          </a:prstGeom>
+          <a:noFill/>
+          <a:ln/>
+        </p:spPr>
+        <p:txBody>
+          <a:bodyPr wrap="square" lIns="0" tIns="0" rIns="0" bIns="0" rtlCol="0" anchor="ctr"/>
+          <a:lstStyle/>
+          <a:p>
+            <a:pPr indent="0" marL="0">
+              <a:buNone/>
+            </a:pPr>
+            <a:r>
+              <a:rPr lang="en-US" sz="1100" b="1" spc="300" kern="0" dirty="0">
+                <a:solidFill>
+                  <a:srgbClr val="DC756A"/>
+                </a:solidFill>
+                <a:latin typeface="Calibri" pitchFamily="34" charset="0"/>
+                <a:ea typeface="Calibri" pitchFamily="34" charset="-122"/>
+                <a:cs typeface="Calibri" pitchFamily="34" charset="-120"/>
+              </a:rPr>
+              <a:t>TÀI LIỆU</a:t>
+            </a:r>
+            <a:endParaRPr lang="en-US" sz="1100" dirty="0"/>
+          </a:p>
+        </p:txBody>
+      </p:sp>
+      <p:sp>
+        <p:nvSpPr>
+          <p:cNvPr id="8" name="Text 5"/>
+          <p:cNvSpPr/>
+          <p:nvPr/>
+        </p:nvSpPr>
+        <p:spPr>
+          <a:xfrm>
+            <a:off x="502920" y="576072"/>
+            <a:ext cx="11155680" cy="713232"/>
+          </a:xfrm>
+          <a:prstGeom prst="rect">
+            <a:avLst/>
+          </a:prstGeom>
+          <a:noFill/>
+          <a:ln/>
+        </p:spPr>
+        <p:txBody>
+          <a:bodyPr wrap="square" lIns="0" tIns="0" rIns="0" bIns="0" rtlCol="0" anchor="ctr"/>
+          <a:lstStyle/>
+          <a:p>
+            <a:pPr indent="0" marL="0">
+              <a:buNone/>
+            </a:pPr>
+            <a:r>
+              <a:rPr lang="en-US" sz="2700" b="1" dirty="0">
+                <a:solidFill>
+                  <a:srgbClr val="AC4D33"/>
+                </a:solidFill>
+                <a:latin typeface="Cambria" pitchFamily="34" charset="0"/>
+                <a:ea typeface="Cambria" pitchFamily="34" charset="-122"/>
+                <a:cs typeface="Cambria" pitchFamily="34" charset="-120"/>
+              </a:rPr>
+              <a:t>Tài liệu học tập</a:t>
+            </a:r>
+            <a:endParaRPr lang="en-US" sz="2700" dirty="0"/>
+          </a:p>
+        </p:txBody>
+      </p:sp>
+      <p:sp>
+        <p:nvSpPr>
+          <p:cNvPr id="9" name="Shape 6"/>
+          <p:cNvSpPr/>
+          <p:nvPr/>
+        </p:nvSpPr>
+        <p:spPr>
+          <a:xfrm>
+            <a:off x="502920" y="1463040"/>
+            <a:ext cx="11201400" cy="1322832"/>
+          </a:xfrm>
+          <a:prstGeom prst="roundRect">
+            <a:avLst>
+              <a:gd name="adj" fmla="val 6221"/>
+            </a:avLst>
           </a:prstGeom>
           <a:solidFill>
             <a:srgbClr val="FDF1EF"/>
           </a:solidFill>
-          <a:ln>
-            <a:noFill/>
+          <a:ln w="15875">
+            <a:solidFill>
+              <a:srgbClr val="FBCEC9"/>
+            </a:solidFill>
+            <a:prstDash val="solid"/>
           </a:ln>
-          <a:effectLst/>
-        </p:spPr>
-        <p:style>
-          <a:lnRef idx="1">
-            <a:schemeClr val="accent1"/>
-          </a:lnRef>
-          <a:fillRef idx="3">
-            <a:schemeClr val="accent1"/>
-          </a:fillRef>
-          <a:effectRef idx="2">
-            <a:schemeClr val="accent1"/>
-          </a:effectRef>
-          <a:fontRef idx="minor">
-            <a:schemeClr val="lt1"/>
-          </a:fontRef>
-        </p:style>
-        <p:txBody>
-          <a:bodyPr rtlCol="0" anchor="ctr"/>
-          <a:lstStyle/>
-          <a:p>
-            <a:pPr algn="ctr"/>
-          </a:p>
-        </p:txBody>
-      </p:sp>
-      <p:sp>
-        <p:nvSpPr>
-          <p:cNvPr id="4" name="Rectangle 3"/>
-          <p:cNvSpPr/>
-          <p:nvPr/>
-        </p:nvSpPr>
-        <p:spPr>
-          <a:xfrm>
-            <a:off x="0" y="0"/>
-            <a:ext cx="274320" cy="6858000"/>
-          </a:xfrm>
-          <a:prstGeom prst="rect">
-            <a:avLst/>
+        </p:spPr>
+        <p:txBody>
+          <a:bodyPr/>
+          <a:p/>
+        </p:txBody>
+      </p:sp>
+      <p:sp>
+        <p:nvSpPr>
+          <p:cNvPr id="10" name="Text 7"/>
+          <p:cNvSpPr/>
+          <p:nvPr/>
+        </p:nvSpPr>
+        <p:spPr>
+          <a:xfrm>
+            <a:off x="722376" y="1517904"/>
+            <a:ext cx="10762488" cy="1213104"/>
+          </a:xfrm>
+          <a:prstGeom prst="rect">
+            <a:avLst/>
+          </a:prstGeom>
+          <a:noFill/>
+          <a:ln/>
+        </p:spPr>
+        <p:txBody>
+          <a:bodyPr wrap="square" lIns="0" tIns="0" rIns="0" bIns="0" rtlCol="0" anchor="ctr"/>
+          <a:lstStyle/>
+          <a:p>
+            <a:pPr indent="0" marL="0">
+              <a:buNone/>
+            </a:pPr>
+            <a:r>
+              <a:rPr lang="en-US" sz="1500" b="1" dirty="0">
+                <a:solidFill>
+                  <a:srgbClr val="AC4D33"/>
+                </a:solidFill>
+                <a:latin typeface="Calibri" pitchFamily="34" charset="0"/>
+                <a:ea typeface="Calibri" pitchFamily="34" charset="-122"/>
+                <a:cs typeface="Calibri" pitchFamily="34" charset="-120"/>
+              </a:rPr>
+              <a:t>Giáo trình chính</a:t>
+            </a:r>
+            <a:endParaRPr lang="en-US" sz="1500" dirty="0"/>
+          </a:p>
+          <a:p>
+            <a:pPr indent="0" marL="0">
+              <a:buNone/>
+            </a:pPr>
+            <a:r>
+              <a:rPr lang="en-US" sz="1300" dirty="0">
+                <a:solidFill>
+                  <a:srgbClr val="3A2B28"/>
+                </a:solidFill>
+                <a:latin typeface="Calibri" pitchFamily="34" charset="0"/>
+                <a:ea typeface="Calibri" pitchFamily="34" charset="-122"/>
+                <a:cs typeface="Calibri" pitchFamily="34" charset="-120"/>
+              </a:rPr>
+              <a:t>Hà Nam Khánh Giao (2023), Giáo trình Giao tiếp kinh doanh, NXB Tài chính.</a:t>
+            </a:r>
+            <a:endParaRPr lang="en-US" sz="1500" dirty="0"/>
+          </a:p>
+        </p:txBody>
+      </p:sp>
+      <p:sp>
+        <p:nvSpPr>
+          <p:cNvPr id="11" name="Shape 8"/>
+          <p:cNvSpPr/>
+          <p:nvPr/>
+        </p:nvSpPr>
+        <p:spPr>
+          <a:xfrm>
+            <a:off x="502920" y="2950464"/>
+            <a:ext cx="11201400" cy="1322832"/>
+          </a:xfrm>
+          <a:prstGeom prst="roundRect">
+            <a:avLst>
+              <a:gd name="adj" fmla="val 6221"/>
+            </a:avLst>
           </a:prstGeom>
           <a:solidFill>
-            <a:srgbClr val="DC756A"/>
+            <a:srgbClr val="FDF1EF"/>
           </a:solidFill>
-          <a:ln>
-            <a:noFill/>
+          <a:ln w="15875">
+            <a:solidFill>
+              <a:srgbClr val="FBCEC9"/>
+            </a:solidFill>
+            <a:prstDash val="solid"/>
           </a:ln>
-          <a:effectLst/>
-        </p:spPr>
-        <p:style>
-          <a:lnRef idx="1">
-            <a:schemeClr val="accent1"/>
-          </a:lnRef>
-          <a:fillRef idx="3">
-            <a:schemeClr val="accent1"/>
-          </a:fillRef>
-          <a:effectRef idx="2">
-            <a:schemeClr val="accent1"/>
-          </a:effectRef>
-          <a:fontRef idx="minor">
-            <a:schemeClr val="lt1"/>
-          </a:fontRef>
-        </p:style>
-        <p:txBody>
-          <a:bodyPr rtlCol="0" anchor="ctr"/>
-          <a:lstStyle/>
-          <a:p>
-            <a:pPr algn="ctr"/>
-          </a:p>
-        </p:txBody>
-      </p:sp>
-      <p:sp>
-        <p:nvSpPr>
-          <p:cNvPr id="5" name="TextBox 4"/>
-          <p:cNvSpPr txBox="1"/>
-          <p:nvPr/>
-        </p:nvSpPr>
-        <p:spPr>
-          <a:xfrm>
-            <a:off x="1280160" y="2377440"/>
-            <a:ext cx="9692640" cy="411480"/>
-          </a:xfrm>
-          <a:prstGeom prst="rect">
-            <a:avLst/>
-          </a:prstGeom>
-          <a:noFill/>
-        </p:spPr>
-        <p:txBody>
-          <a:bodyPr wrap="none">
-            <a:spAutoFit/>
-          </a:bodyPr>
-          <a:lstStyle/>
-          <a:p>
-            <a:r>
-              <a:rPr sz="1500" b="1">
-                <a:solidFill>
-                  <a:srgbClr val="DC756A"/>
-                </a:solidFill>
-                <a:latin typeface="Calibri"/>
-              </a:rPr>
-              <a:t>MỤC 4.3</a:t>
-            </a:r>
-          </a:p>
-        </p:txBody>
-      </p:sp>
-      <p:sp>
-        <p:nvSpPr>
-          <p:cNvPr id="6" name="TextBox 5"/>
-          <p:cNvSpPr txBox="1"/>
-          <p:nvPr/>
-        </p:nvSpPr>
-        <p:spPr>
-          <a:xfrm>
-            <a:off x="1280160" y="2788920"/>
-            <a:ext cx="9601200" cy="1371600"/>
-          </a:xfrm>
-          <a:prstGeom prst="rect">
-            <a:avLst/>
-          </a:prstGeom>
-          <a:noFill/>
-        </p:spPr>
-        <p:txBody>
-          <a:bodyPr wrap="square">
-            <a:spAutoFit/>
-          </a:bodyPr>
-          <a:lstStyle/>
-          <a:p>
-            <a:r>
-              <a:rPr sz="3300" b="1">
+        </p:spPr>
+        <p:txBody>
+          <a:bodyPr/>
+          <a:p/>
+        </p:txBody>
+      </p:sp>
+      <p:sp>
+        <p:nvSpPr>
+          <p:cNvPr id="12" name="Text 9"/>
+          <p:cNvSpPr/>
+          <p:nvPr/>
+        </p:nvSpPr>
+        <p:spPr>
+          <a:xfrm>
+            <a:off x="722376" y="3005328"/>
+            <a:ext cx="10762488" cy="1213104"/>
+          </a:xfrm>
+          <a:prstGeom prst="rect">
+            <a:avLst/>
+          </a:prstGeom>
+          <a:noFill/>
+          <a:ln/>
+        </p:spPr>
+        <p:txBody>
+          <a:bodyPr wrap="square" lIns="0" tIns="0" rIns="0" bIns="0" rtlCol="0" anchor="ctr"/>
+          <a:lstStyle/>
+          <a:p>
+            <a:pPr indent="0" marL="0">
+              <a:buNone/>
+            </a:pPr>
+            <a:r>
+              <a:rPr lang="en-US" sz="1500" b="1" dirty="0">
                 <a:solidFill>
                   <a:srgbClr val="AC4D33"/>
                 </a:solidFill>
-                <a:latin typeface="Cambria"/>
-              </a:rPr>
-              <a:t>Kỹ năng và chiêu trò trên bàn đàm phán</a:t>
-            </a:r>
-          </a:p>
-        </p:txBody>
-      </p:sp>
-      <p:sp>
-        <p:nvSpPr>
-          <p:cNvPr id="7" name="TextBox 6"/>
-          <p:cNvSpPr txBox="1"/>
-          <p:nvPr/>
-        </p:nvSpPr>
-        <p:spPr>
-          <a:xfrm>
-            <a:off x="1280160" y="4224528"/>
-            <a:ext cx="9418320" cy="640080"/>
-          </a:xfrm>
-          <a:prstGeom prst="rect">
-            <a:avLst/>
-          </a:prstGeom>
-          <a:noFill/>
-        </p:spPr>
-        <p:txBody>
-          <a:bodyPr wrap="square">
-            <a:spAutoFit/>
-          </a:bodyPr>
-          <a:lstStyle/>
-          <a:p>
-            <a:r>
-              <a:rPr sz="1450" i="1">
-                <a:solidFill>
-                  <a:srgbClr val="8A7A76"/>
-                </a:solidFill>
-                <a:latin typeface="Calibri"/>
-              </a:rPr>
-              <a:t>Những gì cần rèn, và những gì cần nhận diện để không bị dẫn dắt.</a:t>
-            </a:r>
-          </a:p>
-        </p:txBody>
-      </p:sp>
-      <p:sp>
-        <p:nvSpPr>
-          <p:cNvPr id="8" name="TextBox 7"/>
-          <p:cNvSpPr txBox="1"/>
-          <p:nvPr/>
-        </p:nvSpPr>
-        <p:spPr>
-          <a:xfrm>
-            <a:off x="502920" y="6419088"/>
-            <a:ext cx="7772400" cy="292608"/>
-          </a:xfrm>
-          <a:prstGeom prst="rect">
-            <a:avLst/>
-          </a:prstGeom>
-          <a:noFill/>
-        </p:spPr>
-        <p:txBody>
-          <a:bodyPr wrap="none">
-            <a:spAutoFit/>
-          </a:bodyPr>
-          <a:lstStyle/>
-          <a:p>
-            <a:r>
-              <a:rPr sz="900">
-                <a:solidFill>
-                  <a:srgbClr val="8A7A76"/>
-                </a:solidFill>
-                <a:latin typeface="Calibri"/>
-              </a:rPr>
-              <a:t>Je m'appelle Huong  •  GV. Đỗ Thùy Hương  •  EC1103</a:t>
-            </a:r>
-          </a:p>
-        </p:txBody>
-      </p:sp>
-      <p:sp>
-        <p:nvSpPr>
-          <p:cNvPr id="9" name="TextBox 8"/>
-          <p:cNvSpPr txBox="1"/>
-          <p:nvPr/>
-        </p:nvSpPr>
-        <p:spPr>
-          <a:xfrm>
-            <a:off x="9326880" y="6419088"/>
-            <a:ext cx="1920240" cy="292608"/>
-          </a:xfrm>
-          <a:prstGeom prst="rect">
-            <a:avLst/>
-          </a:prstGeom>
-          <a:noFill/>
-        </p:spPr>
-        <p:txBody>
-          <a:bodyPr wrap="none">
-            <a:spAutoFit/>
-          </a:bodyPr>
-          <a:lstStyle/>
-          <a:p>
-            <a:pPr algn="r"/>
-            <a:r>
-              <a:rPr sz="900">
-                <a:solidFill>
-                  <a:srgbClr val="8A7A76"/>
-                </a:solidFill>
-                <a:latin typeface="Calibri"/>
-              </a:rPr>
-              <a:t>Chương 4</a:t>
-            </a:r>
+                <a:latin typeface="Calibri" pitchFamily="34" charset="0"/>
+                <a:ea typeface="Calibri" pitchFamily="34" charset="-122"/>
+                <a:cs typeface="Calibri" pitchFamily="34" charset="-120"/>
+              </a:rPr>
+              <a:t>Tài liệu tham khảo</a:t>
+            </a:r>
+            <a:endParaRPr lang="en-US" sz="1500" dirty="0"/>
+          </a:p>
+          <a:p>
+            <a:pPr indent="0" marL="0">
+              <a:buNone/>
+            </a:pPr>
+            <a:r>
+              <a:rPr lang="en-US" sz="1300" dirty="0">
+                <a:solidFill>
+                  <a:srgbClr val="3A2B28"/>
+                </a:solidFill>
+                <a:latin typeface="Calibri" pitchFamily="34" charset="0"/>
+                <a:ea typeface="Calibri" pitchFamily="34" charset="-122"/>
+                <a:cs typeface="Calibri" pitchFamily="34" charset="-120"/>
+              </a:rPr>
+              <a:t>Thái Trí Dũng (2012), Kỹ năng giao tiếp và thương lượng trong kinh doanh, NXB Lao động – Xã hội.  •  Nghị định 30/2020/NĐ-CP về công tác văn thư (dùng cho Chương 5 và phần thực hành).</a:t>
+            </a:r>
+            <a:endParaRPr lang="en-US" sz="1500" dirty="0"/>
+          </a:p>
+        </p:txBody>
+      </p:sp>
+      <p:sp>
+        <p:nvSpPr>
+          <p:cNvPr id="13" name="Shape 10"/>
+          <p:cNvSpPr/>
+          <p:nvPr/>
+        </p:nvSpPr>
+        <p:spPr>
+          <a:xfrm>
+            <a:off x="502920" y="4437888"/>
+            <a:ext cx="11201400" cy="1322832"/>
+          </a:xfrm>
+          <a:prstGeom prst="roundRect">
+            <a:avLst>
+              <a:gd name="adj" fmla="val 6221"/>
+            </a:avLst>
+          </a:prstGeom>
+          <a:solidFill>
+            <a:srgbClr val="FDF1EF"/>
+          </a:solidFill>
+          <a:ln w="15875">
+            <a:solidFill>
+              <a:srgbClr val="FBCEC9"/>
+            </a:solidFill>
+            <a:prstDash val="solid"/>
+          </a:ln>
+        </p:spPr>
+        <p:txBody>
+          <a:bodyPr/>
+          <a:p/>
+        </p:txBody>
+      </p:sp>
+      <p:sp>
+        <p:nvSpPr>
+          <p:cNvPr id="14" name="Text 11"/>
+          <p:cNvSpPr/>
+          <p:nvPr/>
+        </p:nvSpPr>
+        <p:spPr>
+          <a:xfrm>
+            <a:off x="722376" y="4492752"/>
+            <a:ext cx="10762488" cy="1213104"/>
+          </a:xfrm>
+          <a:prstGeom prst="rect">
+            <a:avLst/>
+          </a:prstGeom>
+          <a:noFill/>
+          <a:ln/>
+        </p:spPr>
+        <p:txBody>
+          <a:bodyPr wrap="square" lIns="0" tIns="0" rIns="0" bIns="0" rtlCol="0" anchor="ctr"/>
+          <a:lstStyle/>
+          <a:p>
+            <a:pPr indent="0" marL="0">
+              <a:buNone/>
+            </a:pPr>
+            <a:r>
+              <a:rPr lang="en-US" sz="1500" b="1" dirty="0">
+                <a:solidFill>
+                  <a:srgbClr val="AC4D33"/>
+                </a:solidFill>
+                <a:latin typeface="Calibri" pitchFamily="34" charset="0"/>
+                <a:ea typeface="Calibri" pitchFamily="34" charset="-122"/>
+                <a:cs typeface="Calibri" pitchFamily="34" charset="-120"/>
+              </a:rPr>
+              <a:t>Học liệu của giảng viên</a:t>
+            </a:r>
+            <a:endParaRPr lang="en-US" sz="1500" dirty="0"/>
+          </a:p>
+          <a:p>
+            <a:pPr indent="0" marL="0">
+              <a:buNone/>
+            </a:pPr>
+            <a:r>
+              <a:rPr lang="en-US" sz="1300" dirty="0">
+                <a:solidFill>
+                  <a:srgbClr val="3A2B28"/>
+                </a:solidFill>
+                <a:latin typeface="Calibri" pitchFamily="34" charset="0"/>
+                <a:ea typeface="Calibri" pitchFamily="34" charset="-122"/>
+                <a:cs typeface="Calibri" pitchFamily="34" charset="-120"/>
+              </a:rPr>
+              <a:t>Slide bài giảng, tình huống và bài tập do GV. Đỗ Thùy Hương biên soạn; cung cấp sau mỗi buổi học trên nhóm lớp.</a:t>
+            </a:r>
+            <a:endParaRPr lang="en-US" sz="1500" dirty="0"/>
           </a:p>
         </p:txBody>
       </p:sp>
@@ -9873,7 +10188,7 @@
       </p:grpSpPr>
       <p:pic>
         <p:nvPicPr>
-          <p:cNvPr id="2" name="Image 0" descr="assets/logo_tron.png">    </p:cNvPr>
+          <p:cNvPr id="2" name="Image 0" descr="/home/user/comdraft/assets/img/dau-huong.png">    </p:cNvPr>
           <p:cNvPicPr>
             <a:picLocks noChangeAspect="1"/>
           </p:cNvPicPr>
@@ -10471,6 +10786,327 @@
 </file>
 
 <file path=ppt/slides/slide4.xml><?xml version="1.0" encoding="utf-8"?>
+<p:sld xmlns:a="http://schemas.openxmlformats.org/drawingml/2006/main" xmlns:p="http://schemas.openxmlformats.org/presentationml/2006/main" xmlns:r="http://schemas.openxmlformats.org/officeDocument/2006/relationships">
+  <p:cSld>
+    <p:spTree>
+      <p:nvGrpSpPr>
+        <p:cNvPr id="1" name=""/>
+        <p:cNvGrpSpPr/>
+        <p:nvPr/>
+      </p:nvGrpSpPr>
+      <p:grpSpPr/>
+      <p:sp>
+        <p:nvSpPr>
+          <p:cNvPr id="2" name="Rectangle 1"/>
+          <p:cNvSpPr/>
+          <p:nvPr/>
+        </p:nvSpPr>
+        <p:spPr>
+          <a:xfrm>
+            <a:off x="0" y="0"/>
+            <a:ext cx="12191695" cy="6858000"/>
+          </a:xfrm>
+          <a:prstGeom prst="rect">
+            <a:avLst/>
+          </a:prstGeom>
+          <a:solidFill>
+            <a:srgbClr val="FDFBF8"/>
+          </a:solidFill>
+          <a:ln>
+            <a:noFill/>
+          </a:ln>
+          <a:effectLst/>
+        </p:spPr>
+        <p:style>
+          <a:lnRef idx="1">
+            <a:schemeClr val="accent1"/>
+          </a:lnRef>
+          <a:fillRef idx="3">
+            <a:schemeClr val="accent1"/>
+          </a:fillRef>
+          <a:effectRef idx="2">
+            <a:schemeClr val="accent1"/>
+          </a:effectRef>
+          <a:fontRef idx="minor">
+            <a:schemeClr val="lt1"/>
+          </a:fontRef>
+        </p:style>
+        <p:txBody>
+          <a:bodyPr rtlCol="0" anchor="ctr"/>
+          <a:lstStyle/>
+          <a:p>
+            <a:pPr algn="ctr"/>
+          </a:p>
+        </p:txBody>
+      </p:sp>
+      <p:sp>
+        <p:nvSpPr>
+          <p:cNvPr id="3" name="Rectangle 2"/>
+          <p:cNvSpPr/>
+          <p:nvPr/>
+        </p:nvSpPr>
+        <p:spPr>
+          <a:xfrm>
+            <a:off x="0" y="2103120"/>
+            <a:ext cx="12191695" cy="2743200"/>
+          </a:xfrm>
+          <a:prstGeom prst="rect">
+            <a:avLst/>
+          </a:prstGeom>
+          <a:solidFill>
+            <a:srgbClr val="FDF1EF"/>
+          </a:solidFill>
+          <a:ln>
+            <a:noFill/>
+          </a:ln>
+          <a:effectLst/>
+        </p:spPr>
+        <p:style>
+          <a:lnRef idx="1">
+            <a:schemeClr val="accent1"/>
+          </a:lnRef>
+          <a:fillRef idx="3">
+            <a:schemeClr val="accent1"/>
+          </a:fillRef>
+          <a:effectRef idx="2">
+            <a:schemeClr val="accent1"/>
+          </a:effectRef>
+          <a:fontRef idx="minor">
+            <a:schemeClr val="lt1"/>
+          </a:fontRef>
+        </p:style>
+        <p:txBody>
+          <a:bodyPr rtlCol="0" anchor="ctr"/>
+          <a:lstStyle/>
+          <a:p>
+            <a:pPr algn="ctr"/>
+          </a:p>
+        </p:txBody>
+      </p:sp>
+      <p:sp>
+        <p:nvSpPr>
+          <p:cNvPr id="4" name="Rectangle 3"/>
+          <p:cNvSpPr/>
+          <p:nvPr/>
+        </p:nvSpPr>
+        <p:spPr>
+          <a:xfrm>
+            <a:off x="0" y="0"/>
+            <a:ext cx="274320" cy="6858000"/>
+          </a:xfrm>
+          <a:prstGeom prst="rect">
+            <a:avLst/>
+          </a:prstGeom>
+          <a:solidFill>
+            <a:srgbClr val="DC756A"/>
+          </a:solidFill>
+          <a:ln>
+            <a:noFill/>
+          </a:ln>
+          <a:effectLst/>
+        </p:spPr>
+        <p:style>
+          <a:lnRef idx="1">
+            <a:schemeClr val="accent1"/>
+          </a:lnRef>
+          <a:fillRef idx="3">
+            <a:schemeClr val="accent1"/>
+          </a:fillRef>
+          <a:effectRef idx="2">
+            <a:schemeClr val="accent1"/>
+          </a:effectRef>
+          <a:fontRef idx="minor">
+            <a:schemeClr val="lt1"/>
+          </a:fontRef>
+        </p:style>
+        <p:txBody>
+          <a:bodyPr rtlCol="0" anchor="ctr"/>
+          <a:lstStyle/>
+          <a:p>
+            <a:pPr algn="ctr"/>
+          </a:p>
+        </p:txBody>
+      </p:sp>
+      <p:sp>
+        <p:nvSpPr>
+          <p:cNvPr id="5" name="TextBox 4"/>
+          <p:cNvSpPr txBox="1"/>
+          <p:nvPr/>
+        </p:nvSpPr>
+        <p:spPr>
+          <a:xfrm>
+            <a:off x="1280160" y="2377440"/>
+            <a:ext cx="9692640" cy="411480"/>
+          </a:xfrm>
+          <a:prstGeom prst="rect">
+            <a:avLst/>
+          </a:prstGeom>
+          <a:noFill/>
+        </p:spPr>
+        <p:txBody>
+          <a:bodyPr wrap="none">
+            <a:spAutoFit/>
+          </a:bodyPr>
+          <a:lstStyle/>
+          <a:p>
+            <a:r>
+              <a:rPr sz="1500" b="1">
+                <a:solidFill>
+                  <a:srgbClr val="DC756A"/>
+                </a:solidFill>
+                <a:latin typeface="Calibri"/>
+              </a:rPr>
+              <a:t>MỤC 4.1</a:t>
+            </a:r>
+          </a:p>
+        </p:txBody>
+      </p:sp>
+      <p:sp>
+        <p:nvSpPr>
+          <p:cNvPr id="6" name="TextBox 5"/>
+          <p:cNvSpPr txBox="1"/>
+          <p:nvPr/>
+        </p:nvSpPr>
+        <p:spPr>
+          <a:xfrm>
+            <a:off x="1280160" y="2788920"/>
+            <a:ext cx="9601200" cy="1371600"/>
+          </a:xfrm>
+          <a:prstGeom prst="rect">
+            <a:avLst/>
+          </a:prstGeom>
+          <a:noFill/>
+        </p:spPr>
+        <p:txBody>
+          <a:bodyPr wrap="square">
+            <a:spAutoFit/>
+          </a:bodyPr>
+          <a:lstStyle/>
+          <a:p>
+            <a:r>
+              <a:rPr sz="3800" b="1">
+                <a:solidFill>
+                  <a:srgbClr val="AC4D33"/>
+                </a:solidFill>
+                <a:latin typeface="Cambria"/>
+              </a:rPr>
+              <a:t>Khái niệm và các kiểu đàm phán</a:t>
+            </a:r>
+          </a:p>
+        </p:txBody>
+      </p:sp>
+      <p:sp>
+        <p:nvSpPr>
+          <p:cNvPr id="7" name="TextBox 6"/>
+          <p:cNvSpPr txBox="1"/>
+          <p:nvPr/>
+        </p:nvSpPr>
+        <p:spPr>
+          <a:xfrm>
+            <a:off x="1280160" y="4224528"/>
+            <a:ext cx="9418320" cy="640080"/>
+          </a:xfrm>
+          <a:prstGeom prst="rect">
+            <a:avLst/>
+          </a:prstGeom>
+          <a:noFill/>
+        </p:spPr>
+        <p:txBody>
+          <a:bodyPr wrap="square">
+            <a:spAutoFit/>
+          </a:bodyPr>
+          <a:lstStyle/>
+          <a:p>
+            <a:r>
+              <a:rPr sz="1450" i="1">
+                <a:solidFill>
+                  <a:srgbClr val="8A7A76"/>
+                </a:solidFill>
+                <a:latin typeface="Calibri"/>
+              </a:rPr>
+              <a:t>Hiểu bản chất kép của đàm phán: vừa hợp tác vừa cạnh tranh.</a:t>
+            </a:r>
+          </a:p>
+        </p:txBody>
+      </p:sp>
+      <p:sp>
+        <p:nvSpPr>
+          <p:cNvPr id="8" name="TextBox 7"/>
+          <p:cNvSpPr txBox="1"/>
+          <p:nvPr/>
+        </p:nvSpPr>
+        <p:spPr>
+          <a:xfrm>
+            <a:off x="502920" y="6419088"/>
+            <a:ext cx="7772400" cy="292608"/>
+          </a:xfrm>
+          <a:prstGeom prst="rect">
+            <a:avLst/>
+          </a:prstGeom>
+          <a:noFill/>
+        </p:spPr>
+        <p:txBody>
+          <a:bodyPr wrap="none">
+            <a:spAutoFit/>
+          </a:bodyPr>
+          <a:lstStyle/>
+          <a:p>
+            <a:r>
+              <a:rPr sz="900">
+                <a:solidFill>
+                  <a:srgbClr val="8A7A76"/>
+                </a:solidFill>
+                <a:latin typeface="Calibri"/>
+              </a:rPr>
+              <a:t>Je m'appelle Huong  •  GV. Đỗ Thùy Hương  •  EC1103</a:t>
+            </a:r>
+          </a:p>
+        </p:txBody>
+      </p:sp>
+      <p:sp>
+        <p:nvSpPr>
+          <p:cNvPr id="9" name="TextBox 8"/>
+          <p:cNvSpPr txBox="1"/>
+          <p:nvPr/>
+        </p:nvSpPr>
+        <p:spPr>
+          <a:xfrm>
+            <a:off x="9326880" y="6419088"/>
+            <a:ext cx="1920240" cy="292608"/>
+          </a:xfrm>
+          <a:prstGeom prst="rect">
+            <a:avLst/>
+          </a:prstGeom>
+          <a:noFill/>
+        </p:spPr>
+        <p:txBody>
+          <a:bodyPr wrap="none">
+            <a:spAutoFit/>
+          </a:bodyPr>
+          <a:lstStyle/>
+          <a:p>
+            <a:pPr algn="r"/>
+            <a:r>
+              <a:rPr sz="900">
+                <a:solidFill>
+                  <a:srgbClr val="8A7A76"/>
+                </a:solidFill>
+                <a:latin typeface="Calibri"/>
+              </a:rPr>
+              <a:t>Chương 4</a:t>
+            </a:r>
+          </a:p>
+        </p:txBody>
+      </p:sp>
+    </p:spTree>
+  </p:cSld>
+  <p:clrMapOvr>
+    <a:masterClrMapping/>
+  </p:clrMapOvr>
+</p:sld>
+</file>
+
+<file path=ppt/slides/slide5.xml><?xml version="1.0" encoding="utf-8"?>
 <p:sld xmlns:a="http://schemas.openxmlformats.org/drawingml/2006/main" xmlns:r="http://schemas.openxmlformats.org/officeDocument/2006/relationships" xmlns:p="http://schemas.openxmlformats.org/presentationml/2006/main">
   <p:cSld name="Slide 4">
     <p:bg>
@@ -10496,7 +11132,7 @@
       </p:grpSpPr>
       <p:pic>
         <p:nvPicPr>
-          <p:cNvPr id="2" name="Image 0" descr="assets/logo_tron.png">    </p:cNvPr>
+          <p:cNvPr id="2" name="Image 0" descr="/home/user/comdraft/assets/img/dau-huong.png">    </p:cNvPr>
           <p:cNvPicPr>
             <a:picLocks noChangeAspect="1"/>
           </p:cNvPicPr>
@@ -11006,7 +11642,7 @@
 </p:sld>
 </file>
 
-<file path=ppt/slides/slide5.xml><?xml version="1.0" encoding="utf-8"?>
+<file path=ppt/slides/slide6.xml><?xml version="1.0" encoding="utf-8"?>
 <p:sld xmlns:a="http://schemas.openxmlformats.org/drawingml/2006/main" xmlns:r="http://schemas.openxmlformats.org/officeDocument/2006/relationships" xmlns:p="http://schemas.openxmlformats.org/presentationml/2006/main">
   <p:cSld name="Slide 5">
     <p:bg>
@@ -11032,7 +11668,7 @@
       </p:grpSpPr>
       <p:pic>
         <p:nvPicPr>
-          <p:cNvPr id="2" name="Image 0" descr="assets/logo_tron.png">    </p:cNvPr>
+          <p:cNvPr id="2" name="Image 0" descr="/home/user/comdraft/assets/img/dau-huong.png">    </p:cNvPr>
           <p:cNvPicPr>
             <a:picLocks noChangeAspect="1"/>
           </p:cNvPicPr>
@@ -11861,7 +12497,7 @@
 </p:sld>
 </file>
 
-<file path=ppt/slides/slide6.xml><?xml version="1.0" encoding="utf-8"?>
+<file path=ppt/slides/slide7.xml><?xml version="1.0" encoding="utf-8"?>
 <p:sld xmlns:a="http://schemas.openxmlformats.org/drawingml/2006/main" xmlns:r="http://schemas.openxmlformats.org/officeDocument/2006/relationships" xmlns:p="http://schemas.openxmlformats.org/presentationml/2006/main">
   <p:cSld name="Slide 6">
     <p:bg>
@@ -11887,7 +12523,7 @@
       </p:grpSpPr>
       <p:pic>
         <p:nvPicPr>
-          <p:cNvPr id="2" name="Image 0" descr="assets/logo_tron.png">    </p:cNvPr>
+          <p:cNvPr id="2" name="Image 0" descr="/home/user/comdraft/assets/img/dau-huong.png">    </p:cNvPr>
           <p:cNvPicPr>
             <a:picLocks noChangeAspect="1"/>
           </p:cNvPicPr>
@@ -12128,351 +12764,62 @@
           </a:p>
         </p:txBody>
       </p:sp>
-      <p:sp>
-        <p:nvSpPr>
-          <p:cNvPr id="9" name="Shape 6"/>
-          <p:cNvSpPr/>
-          <p:nvPr/>
-        </p:nvSpPr>
-        <p:spPr>
-          <a:xfrm>
-            <a:off x="502920" y="1417320"/>
-            <a:ext cx="5509260" cy="2308860"/>
-          </a:xfrm>
-          <a:prstGeom prst="roundRect">
-            <a:avLst>
-              <a:gd name="adj" fmla="val 3564"/>
-            </a:avLst>
-          </a:prstGeom>
-          <a:solidFill>
-            <a:srgbClr val="FDF1EF"/>
-          </a:solidFill>
-          <a:ln w="15875">
-            <a:solidFill>
-              <a:srgbClr val="FBCEC9"/>
-            </a:solidFill>
-            <a:prstDash val="solid"/>
-          </a:ln>
-        </p:spPr>
-        <p:txBody>
-          <a:bodyPr/>
-          <a:p/>
-        </p:txBody>
-      </p:sp>
-      <p:sp>
-        <p:nvSpPr>
-          <p:cNvPr id="10" name="Text 7"/>
-          <p:cNvSpPr/>
-          <p:nvPr/>
-        </p:nvSpPr>
-        <p:spPr>
-          <a:xfrm>
-            <a:off x="722376" y="1490472"/>
-            <a:ext cx="5070348" cy="2162556"/>
-          </a:xfrm>
-          <a:prstGeom prst="rect">
-            <a:avLst/>
-          </a:prstGeom>
-          <a:noFill/>
-          <a:ln/>
-        </p:spPr>
-        <p:txBody>
-          <a:bodyPr wrap="square" lIns="0" tIns="0" rIns="0" bIns="0" rtlCol="0" anchor="ctr"/>
-          <a:lstStyle/>
-          <a:p>
-            <a:pPr indent="0" marL="0">
-              <a:buNone/>
-            </a:pPr>
-            <a:r>
-              <a:rPr lang="en-US" sz="1500" b="1" dirty="0">
-                <a:solidFill>
-                  <a:srgbClr val="AC4D33"/>
-                </a:solidFill>
-                <a:latin typeface="Calibri" pitchFamily="34" charset="0"/>
-                <a:ea typeface="Calibri" pitchFamily="34" charset="-122"/>
-                <a:cs typeface="Calibri" pitchFamily="34" charset="-120"/>
-              </a:rPr>
-              <a:t>Đàm phán kiểu mềm</a:t>
-            </a:r>
-            <a:endParaRPr lang="en-US" sz="1500" dirty="0"/>
-          </a:p>
-          <a:p>
-            <a:pPr indent="0" marL="0">
-              <a:buNone/>
-            </a:pPr>
-            <a:r>
-              <a:rPr lang="en-US" sz="1250" dirty="0">
-                <a:solidFill>
-                  <a:srgbClr val="3A2B28"/>
-                </a:solidFill>
-                <a:latin typeface="Calibri" pitchFamily="34" charset="0"/>
-                <a:ea typeface="Calibri" pitchFamily="34" charset="-122"/>
-                <a:cs typeface="Calibri" pitchFamily="34" charset="-120"/>
-              </a:rPr>
-              <a:t>Coi đối tác như bạn, dễ nhượng bộ để giữ quan hệ — nhanh đạt thỏa thuận nhưng dễ chịu thiệt khi gặp đối thủ cứng.</a:t>
-            </a:r>
-            <a:endParaRPr lang="en-US" sz="1500" dirty="0"/>
-          </a:p>
-        </p:txBody>
-      </p:sp>
-      <p:sp>
-        <p:nvSpPr>
-          <p:cNvPr id="11" name="Shape 8"/>
-          <p:cNvSpPr/>
-          <p:nvPr/>
-        </p:nvSpPr>
-        <p:spPr>
-          <a:xfrm>
-            <a:off x="6195060" y="1417320"/>
-            <a:ext cx="5509260" cy="2308860"/>
-          </a:xfrm>
-          <a:prstGeom prst="roundRect">
-            <a:avLst>
-              <a:gd name="adj" fmla="val 3564"/>
-            </a:avLst>
-          </a:prstGeom>
-          <a:solidFill>
-            <a:srgbClr val="FDF1EF"/>
-          </a:solidFill>
-          <a:ln w="15875">
-            <a:solidFill>
-              <a:srgbClr val="FBCEC9"/>
-            </a:solidFill>
-            <a:prstDash val="solid"/>
-          </a:ln>
-        </p:spPr>
-        <p:txBody>
-          <a:bodyPr/>
-          <a:p/>
-        </p:txBody>
-      </p:sp>
-      <p:sp>
-        <p:nvSpPr>
-          <p:cNvPr id="12" name="Text 9"/>
-          <p:cNvSpPr/>
-          <p:nvPr/>
-        </p:nvSpPr>
-        <p:spPr>
-          <a:xfrm>
-            <a:off x="6414516" y="1490472"/>
-            <a:ext cx="5070348" cy="2162556"/>
-          </a:xfrm>
-          <a:prstGeom prst="rect">
-            <a:avLst/>
-          </a:prstGeom>
-          <a:noFill/>
-          <a:ln/>
-        </p:spPr>
-        <p:txBody>
-          <a:bodyPr wrap="square" lIns="0" tIns="0" rIns="0" bIns="0" rtlCol="0" anchor="ctr"/>
-          <a:lstStyle/>
-          <a:p>
-            <a:pPr indent="0" marL="0">
-              <a:buNone/>
-            </a:pPr>
-            <a:r>
-              <a:rPr lang="en-US" sz="1500" b="1" dirty="0">
-                <a:solidFill>
-                  <a:srgbClr val="AC4D33"/>
-                </a:solidFill>
-                <a:latin typeface="Calibri" pitchFamily="34" charset="0"/>
-                <a:ea typeface="Calibri" pitchFamily="34" charset="-122"/>
-                <a:cs typeface="Calibri" pitchFamily="34" charset="-120"/>
-              </a:rPr>
-              <a:t>Đàm phán kiểu cứng</a:t>
-            </a:r>
-            <a:endParaRPr lang="en-US" sz="1500" dirty="0"/>
-          </a:p>
-          <a:p>
-            <a:pPr indent="0" marL="0">
-              <a:buNone/>
-            </a:pPr>
-            <a:r>
-              <a:rPr lang="en-US" sz="1250" dirty="0">
-                <a:solidFill>
-                  <a:srgbClr val="3A2B28"/>
-                </a:solidFill>
-                <a:latin typeface="Calibri" pitchFamily="34" charset="0"/>
-                <a:ea typeface="Calibri" pitchFamily="34" charset="-122"/>
-                <a:cs typeface="Calibri" pitchFamily="34" charset="-120"/>
-              </a:rPr>
-              <a:t>Coi đối tác như đối thủ, ép buộc, giữ lập trường đến cùng — có thể thắng một lần nhưng phá vỡ quan hệ, dễ bế tắc.</a:t>
-            </a:r>
-            <a:endParaRPr lang="en-US" sz="1500" dirty="0"/>
-          </a:p>
-        </p:txBody>
-      </p:sp>
-      <p:sp>
-        <p:nvSpPr>
-          <p:cNvPr id="13" name="Shape 10"/>
-          <p:cNvSpPr/>
-          <p:nvPr/>
-        </p:nvSpPr>
-        <p:spPr>
-          <a:xfrm>
-            <a:off x="502920" y="3909060"/>
-            <a:ext cx="5509260" cy="2308860"/>
-          </a:xfrm>
-          <a:prstGeom prst="roundRect">
-            <a:avLst>
-              <a:gd name="adj" fmla="val 3564"/>
-            </a:avLst>
-          </a:prstGeom>
-          <a:solidFill>
-            <a:srgbClr val="FDF1EF"/>
-          </a:solidFill>
-          <a:ln w="15875">
-            <a:solidFill>
-              <a:srgbClr val="FBCEC9"/>
-            </a:solidFill>
-            <a:prstDash val="solid"/>
-          </a:ln>
-        </p:spPr>
-        <p:txBody>
-          <a:bodyPr/>
-          <a:p/>
-        </p:txBody>
-      </p:sp>
-      <p:sp>
-        <p:nvSpPr>
-          <p:cNvPr id="14" name="Text 11"/>
-          <p:cNvSpPr/>
-          <p:nvPr/>
-        </p:nvSpPr>
-        <p:spPr>
-          <a:xfrm>
-            <a:off x="722376" y="3982212"/>
-            <a:ext cx="5070348" cy="2162556"/>
-          </a:xfrm>
-          <a:prstGeom prst="rect">
-            <a:avLst/>
-          </a:prstGeom>
-          <a:noFill/>
-          <a:ln/>
-        </p:spPr>
-        <p:txBody>
-          <a:bodyPr wrap="square" lIns="0" tIns="0" rIns="0" bIns="0" rtlCol="0" anchor="ctr"/>
-          <a:lstStyle/>
-          <a:p>
-            <a:pPr indent="0" marL="0">
-              <a:buNone/>
-            </a:pPr>
-            <a:r>
-              <a:rPr lang="en-US" sz="1500" b="1" dirty="0">
-                <a:solidFill>
-                  <a:srgbClr val="AC4D33"/>
-                </a:solidFill>
-                <a:latin typeface="Calibri" pitchFamily="34" charset="0"/>
-                <a:ea typeface="Calibri" pitchFamily="34" charset="-122"/>
-                <a:cs typeface="Calibri" pitchFamily="34" charset="-120"/>
-              </a:rPr>
-              <a:t>Đàm phán kiểu nguyên tắc (Harvard)</a:t>
-            </a:r>
-            <a:endParaRPr lang="en-US" sz="1500" dirty="0"/>
-          </a:p>
-          <a:p>
-            <a:pPr indent="0" marL="0">
-              <a:buNone/>
-            </a:pPr>
-            <a:r>
-              <a:rPr lang="en-US" sz="1250" dirty="0">
-                <a:solidFill>
-                  <a:srgbClr val="3A2B28"/>
-                </a:solidFill>
-                <a:latin typeface="Calibri" pitchFamily="34" charset="0"/>
-                <a:ea typeface="Calibri" pitchFamily="34" charset="-122"/>
-                <a:cs typeface="Calibri" pitchFamily="34" charset="-120"/>
-              </a:rPr>
-              <a:t>Tách con người khỏi vấn đề; tập trung vào lợi ích, không cố thủ lập trường; sáng tạo phương án cùng có lợi; dựa trên tiêu chí khách quan.</a:t>
-            </a:r>
-            <a:endParaRPr lang="en-US" sz="1500" dirty="0"/>
-          </a:p>
-        </p:txBody>
-      </p:sp>
-      <p:sp>
-        <p:nvSpPr>
-          <p:cNvPr id="15" name="Shape 12"/>
-          <p:cNvSpPr/>
-          <p:nvPr/>
-        </p:nvSpPr>
-        <p:spPr>
-          <a:xfrm>
-            <a:off x="6195060" y="3909060"/>
-            <a:ext cx="5509260" cy="2308860"/>
-          </a:xfrm>
-          <a:prstGeom prst="roundRect">
-            <a:avLst>
-              <a:gd name="adj" fmla="val 3564"/>
-            </a:avLst>
-          </a:prstGeom>
-          <a:solidFill>
-            <a:srgbClr val="FDF1EF"/>
-          </a:solidFill>
-          <a:ln w="15875">
-            <a:solidFill>
-              <a:srgbClr val="FBCEC9"/>
-            </a:solidFill>
-            <a:prstDash val="solid"/>
-          </a:ln>
-        </p:spPr>
-        <p:txBody>
-          <a:bodyPr/>
-          <a:p/>
-        </p:txBody>
-      </p:sp>
-      <p:sp>
-        <p:nvSpPr>
-          <p:cNvPr id="16" name="Text 13"/>
-          <p:cNvSpPr/>
-          <p:nvPr/>
-        </p:nvSpPr>
-        <p:spPr>
-          <a:xfrm>
-            <a:off x="6414516" y="3982212"/>
-            <a:ext cx="5070348" cy="2162556"/>
-          </a:xfrm>
-          <a:prstGeom prst="rect">
-            <a:avLst/>
-          </a:prstGeom>
-          <a:noFill/>
-          <a:ln/>
-        </p:spPr>
-        <p:txBody>
-          <a:bodyPr wrap="square" lIns="0" tIns="0" rIns="0" bIns="0" rtlCol="0" anchor="ctr"/>
-          <a:lstStyle/>
-          <a:p>
-            <a:pPr indent="0" marL="0">
-              <a:buNone/>
-            </a:pPr>
-            <a:r>
-              <a:rPr lang="en-US" sz="1500" b="1" dirty="0">
-                <a:solidFill>
-                  <a:srgbClr val="AC4D33"/>
-                </a:solidFill>
-                <a:latin typeface="Calibri" pitchFamily="34" charset="0"/>
-                <a:ea typeface="Calibri" pitchFamily="34" charset="-122"/>
-                <a:cs typeface="Calibri" pitchFamily="34" charset="-120"/>
-              </a:rPr>
-              <a:t>Phân bổ  ↔  Tích hợp</a:t>
-            </a:r>
-            <a:endParaRPr lang="en-US" sz="1500" dirty="0"/>
-          </a:p>
-          <a:p>
-            <a:pPr indent="0" marL="0">
-              <a:buNone/>
-            </a:pPr>
-            <a:r>
-              <a:rPr lang="en-US" sz="1250" dirty="0">
-                <a:solidFill>
-                  <a:srgbClr val="3A2B28"/>
-                </a:solidFill>
-                <a:latin typeface="Calibri" pitchFamily="34" charset="0"/>
-                <a:ea typeface="Calibri" pitchFamily="34" charset="-122"/>
-                <a:cs typeface="Calibri" pitchFamily="34" charset="-120"/>
-              </a:rPr>
-              <a:t>Phân bổ: chia chiếc bánh cố định (được – mất). Tích hợp: làm chiếc bánh lớn hơn bằng cách khai thác khác biệt về ưu tiên — hướng đến win-win.</a:t>
-            </a:r>
-            <a:endParaRPr lang="en-US" sz="1500" dirty="0"/>
+      <p:pic>
+        <p:nvPicPr>
+          <p:cNvPr id="9" name="Picture 8" descr="c4-ba-kieu-dam-phan-nt.png"/>
+          <p:cNvPicPr>
+            <a:picLocks noChangeAspect="1"/>
+          </p:cNvPicPr>
+          <p:nvPr/>
+        </p:nvPicPr>
+        <p:blipFill>
+          <a:blip r:embed="rId4"/>
+          <a:stretch>
+            <a:fillRect/>
+          </a:stretch>
+        </p:blipFill>
+        <p:spPr>
+          <a:xfrm>
+            <a:off x="847426" y="1789023"/>
+            <a:ext cx="10496843" cy="4093768"/>
+          </a:xfrm>
+          <a:prstGeom prst="rect">
+            <a:avLst/>
+          </a:prstGeom>
+        </p:spPr>
+      </p:pic>
+      <p:sp>
+        <p:nvSpPr>
+          <p:cNvPr id="10" name="TextBox 9"/>
+          <p:cNvSpPr txBox="1"/>
+          <p:nvPr/>
+        </p:nvSpPr>
+        <p:spPr>
+          <a:xfrm>
+            <a:off x="548640" y="5955944"/>
+            <a:ext cx="11109960" cy="310896"/>
+          </a:xfrm>
+          <a:prstGeom prst="rect">
+            <a:avLst/>
+          </a:prstGeom>
+          <a:noFill/>
+        </p:spPr>
+        <p:txBody>
+          <a:bodyPr wrap="square">
+            <a:spAutoFit/>
+          </a:bodyPr>
+          <a:lstStyle/>
+          <a:p>
+            <a:pPr algn="ctr"/>
+            <a:r>
+              <a:rPr sz="1150" i="1">
+                <a:solidFill>
+                  <a:srgbClr val="8A7A76"/>
+                </a:solidFill>
+                <a:latin typeface="Calibri"/>
+              </a:rPr>
+              <a:t>Ba kiểu chỉ khác nhau ở bốn điểm — bảng đối chiếu cho thấy cả bốn trong một cái nhìn.</a:t>
+            </a:r>
           </a:p>
         </p:txBody>
       </p:sp>
@@ -12484,7 +12831,328 @@
 </p:sld>
 </file>
 
-<file path=ppt/slides/slide7.xml><?xml version="1.0" encoding="utf-8"?>
+<file path=ppt/slides/slide8.xml><?xml version="1.0" encoding="utf-8"?>
+<p:sld xmlns:a="http://schemas.openxmlformats.org/drawingml/2006/main" xmlns:p="http://schemas.openxmlformats.org/presentationml/2006/main" xmlns:r="http://schemas.openxmlformats.org/officeDocument/2006/relationships">
+  <p:cSld>
+    <p:spTree>
+      <p:nvGrpSpPr>
+        <p:cNvPr id="1" name=""/>
+        <p:cNvGrpSpPr/>
+        <p:nvPr/>
+      </p:nvGrpSpPr>
+      <p:grpSpPr/>
+      <p:sp>
+        <p:nvSpPr>
+          <p:cNvPr id="2" name="Rectangle 1"/>
+          <p:cNvSpPr/>
+          <p:nvPr/>
+        </p:nvSpPr>
+        <p:spPr>
+          <a:xfrm>
+            <a:off x="0" y="0"/>
+            <a:ext cx="12191695" cy="6858000"/>
+          </a:xfrm>
+          <a:prstGeom prst="rect">
+            <a:avLst/>
+          </a:prstGeom>
+          <a:solidFill>
+            <a:srgbClr val="FDFBF8"/>
+          </a:solidFill>
+          <a:ln>
+            <a:noFill/>
+          </a:ln>
+          <a:effectLst/>
+        </p:spPr>
+        <p:style>
+          <a:lnRef idx="1">
+            <a:schemeClr val="accent1"/>
+          </a:lnRef>
+          <a:fillRef idx="3">
+            <a:schemeClr val="accent1"/>
+          </a:fillRef>
+          <a:effectRef idx="2">
+            <a:schemeClr val="accent1"/>
+          </a:effectRef>
+          <a:fontRef idx="minor">
+            <a:schemeClr val="lt1"/>
+          </a:fontRef>
+        </p:style>
+        <p:txBody>
+          <a:bodyPr rtlCol="0" anchor="ctr"/>
+          <a:lstStyle/>
+          <a:p>
+            <a:pPr algn="ctr"/>
+          </a:p>
+        </p:txBody>
+      </p:sp>
+      <p:sp>
+        <p:nvSpPr>
+          <p:cNvPr id="3" name="Rectangle 2"/>
+          <p:cNvSpPr/>
+          <p:nvPr/>
+        </p:nvSpPr>
+        <p:spPr>
+          <a:xfrm>
+            <a:off x="0" y="2103120"/>
+            <a:ext cx="12191695" cy="2743200"/>
+          </a:xfrm>
+          <a:prstGeom prst="rect">
+            <a:avLst/>
+          </a:prstGeom>
+          <a:solidFill>
+            <a:srgbClr val="FDF1EF"/>
+          </a:solidFill>
+          <a:ln>
+            <a:noFill/>
+          </a:ln>
+          <a:effectLst/>
+        </p:spPr>
+        <p:style>
+          <a:lnRef idx="1">
+            <a:schemeClr val="accent1"/>
+          </a:lnRef>
+          <a:fillRef idx="3">
+            <a:schemeClr val="accent1"/>
+          </a:fillRef>
+          <a:effectRef idx="2">
+            <a:schemeClr val="accent1"/>
+          </a:effectRef>
+          <a:fontRef idx="minor">
+            <a:schemeClr val="lt1"/>
+          </a:fontRef>
+        </p:style>
+        <p:txBody>
+          <a:bodyPr rtlCol="0" anchor="ctr"/>
+          <a:lstStyle/>
+          <a:p>
+            <a:pPr algn="ctr"/>
+          </a:p>
+        </p:txBody>
+      </p:sp>
+      <p:sp>
+        <p:nvSpPr>
+          <p:cNvPr id="4" name="Rectangle 3"/>
+          <p:cNvSpPr/>
+          <p:nvPr/>
+        </p:nvSpPr>
+        <p:spPr>
+          <a:xfrm>
+            <a:off x="0" y="0"/>
+            <a:ext cx="274320" cy="6858000"/>
+          </a:xfrm>
+          <a:prstGeom prst="rect">
+            <a:avLst/>
+          </a:prstGeom>
+          <a:solidFill>
+            <a:srgbClr val="DC756A"/>
+          </a:solidFill>
+          <a:ln>
+            <a:noFill/>
+          </a:ln>
+          <a:effectLst/>
+        </p:spPr>
+        <p:style>
+          <a:lnRef idx="1">
+            <a:schemeClr val="accent1"/>
+          </a:lnRef>
+          <a:fillRef idx="3">
+            <a:schemeClr val="accent1"/>
+          </a:fillRef>
+          <a:effectRef idx="2">
+            <a:schemeClr val="accent1"/>
+          </a:effectRef>
+          <a:fontRef idx="minor">
+            <a:schemeClr val="lt1"/>
+          </a:fontRef>
+        </p:style>
+        <p:txBody>
+          <a:bodyPr rtlCol="0" anchor="ctr"/>
+          <a:lstStyle/>
+          <a:p>
+            <a:pPr algn="ctr"/>
+          </a:p>
+        </p:txBody>
+      </p:sp>
+      <p:sp>
+        <p:nvSpPr>
+          <p:cNvPr id="5" name="TextBox 4"/>
+          <p:cNvSpPr txBox="1"/>
+          <p:nvPr/>
+        </p:nvSpPr>
+        <p:spPr>
+          <a:xfrm>
+            <a:off x="1280160" y="2377440"/>
+            <a:ext cx="9692640" cy="411480"/>
+          </a:xfrm>
+          <a:prstGeom prst="rect">
+            <a:avLst/>
+          </a:prstGeom>
+          <a:noFill/>
+        </p:spPr>
+        <p:txBody>
+          <a:bodyPr wrap="none">
+            <a:spAutoFit/>
+          </a:bodyPr>
+          <a:lstStyle/>
+          <a:p>
+            <a:r>
+              <a:rPr sz="1500" b="1">
+                <a:solidFill>
+                  <a:srgbClr val="DC756A"/>
+                </a:solidFill>
+                <a:latin typeface="Calibri"/>
+              </a:rPr>
+              <a:t>MỤC 4.2</a:t>
+            </a:r>
+          </a:p>
+        </p:txBody>
+      </p:sp>
+      <p:sp>
+        <p:nvSpPr>
+          <p:cNvPr id="6" name="TextBox 5"/>
+          <p:cNvSpPr txBox="1"/>
+          <p:nvPr/>
+        </p:nvSpPr>
+        <p:spPr>
+          <a:xfrm>
+            <a:off x="1280160" y="2788920"/>
+            <a:ext cx="9601200" cy="1371600"/>
+          </a:xfrm>
+          <a:prstGeom prst="rect">
+            <a:avLst/>
+          </a:prstGeom>
+          <a:noFill/>
+        </p:spPr>
+        <p:txBody>
+          <a:bodyPr wrap="square">
+            <a:spAutoFit/>
+          </a:bodyPr>
+          <a:lstStyle/>
+          <a:p>
+            <a:r>
+              <a:rPr sz="3800" b="1">
+                <a:solidFill>
+                  <a:srgbClr val="AC4D33"/>
+                </a:solidFill>
+                <a:latin typeface="Cambria"/>
+              </a:rPr>
+              <a:t>Tiến trình đàm phán năm giai đoạn</a:t>
+            </a:r>
+          </a:p>
+        </p:txBody>
+      </p:sp>
+      <p:sp>
+        <p:nvSpPr>
+          <p:cNvPr id="7" name="TextBox 6"/>
+          <p:cNvSpPr txBox="1"/>
+          <p:nvPr/>
+        </p:nvSpPr>
+        <p:spPr>
+          <a:xfrm>
+            <a:off x="1280160" y="4224528"/>
+            <a:ext cx="9418320" cy="640080"/>
+          </a:xfrm>
+          <a:prstGeom prst="rect">
+            <a:avLst/>
+          </a:prstGeom>
+          <a:noFill/>
+        </p:spPr>
+        <p:txBody>
+          <a:bodyPr wrap="square">
+            <a:spAutoFit/>
+          </a:bodyPr>
+          <a:lstStyle/>
+          <a:p>
+            <a:r>
+              <a:rPr sz="1450" i="1">
+                <a:solidFill>
+                  <a:srgbClr val="8A7A76"/>
+                </a:solidFill>
+                <a:latin typeface="Calibri"/>
+              </a:rPr>
+              <a:t>Bảy mươi phần trăm kết quả được quyết định trước khi hai bên ngồi vào bàn.</a:t>
+            </a:r>
+          </a:p>
+        </p:txBody>
+      </p:sp>
+      <p:sp>
+        <p:nvSpPr>
+          <p:cNvPr id="8" name="TextBox 7"/>
+          <p:cNvSpPr txBox="1"/>
+          <p:nvPr/>
+        </p:nvSpPr>
+        <p:spPr>
+          <a:xfrm>
+            <a:off x="502920" y="6419088"/>
+            <a:ext cx="7772400" cy="292608"/>
+          </a:xfrm>
+          <a:prstGeom prst="rect">
+            <a:avLst/>
+          </a:prstGeom>
+          <a:noFill/>
+        </p:spPr>
+        <p:txBody>
+          <a:bodyPr wrap="none">
+            <a:spAutoFit/>
+          </a:bodyPr>
+          <a:lstStyle/>
+          <a:p>
+            <a:r>
+              <a:rPr sz="900">
+                <a:solidFill>
+                  <a:srgbClr val="8A7A76"/>
+                </a:solidFill>
+                <a:latin typeface="Calibri"/>
+              </a:rPr>
+              <a:t>Je m'appelle Huong  •  GV. Đỗ Thùy Hương  •  EC1103</a:t>
+            </a:r>
+          </a:p>
+        </p:txBody>
+      </p:sp>
+      <p:sp>
+        <p:nvSpPr>
+          <p:cNvPr id="9" name="TextBox 8"/>
+          <p:cNvSpPr txBox="1"/>
+          <p:nvPr/>
+        </p:nvSpPr>
+        <p:spPr>
+          <a:xfrm>
+            <a:off x="9326880" y="6419088"/>
+            <a:ext cx="1920240" cy="292608"/>
+          </a:xfrm>
+          <a:prstGeom prst="rect">
+            <a:avLst/>
+          </a:prstGeom>
+          <a:noFill/>
+        </p:spPr>
+        <p:txBody>
+          <a:bodyPr wrap="none">
+            <a:spAutoFit/>
+          </a:bodyPr>
+          <a:lstStyle/>
+          <a:p>
+            <a:pPr algn="r"/>
+            <a:r>
+              <a:rPr sz="900">
+                <a:solidFill>
+                  <a:srgbClr val="8A7A76"/>
+                </a:solidFill>
+                <a:latin typeface="Calibri"/>
+              </a:rPr>
+              <a:t>Chương 4</a:t>
+            </a:r>
+          </a:p>
+        </p:txBody>
+      </p:sp>
+    </p:spTree>
+  </p:cSld>
+  <p:clrMapOvr>
+    <a:masterClrMapping/>
+  </p:clrMapOvr>
+</p:sld>
+</file>
+
+<file path=ppt/slides/slide9.xml><?xml version="1.0" encoding="utf-8"?>
 <p:sld xmlns:a="http://schemas.openxmlformats.org/drawingml/2006/main" xmlns:r="http://schemas.openxmlformats.org/officeDocument/2006/relationships" xmlns:p="http://schemas.openxmlformats.org/presentationml/2006/main">
   <p:cSld name="Slide 7">
     <p:bg>
@@ -12510,7 +13178,7 @@
       </p:grpSpPr>
       <p:pic>
         <p:nvPicPr>
-          <p:cNvPr id="2" name="Image 0" descr="assets/logo_tron.png">    </p:cNvPr>
+          <p:cNvPr id="2" name="Image 0" descr="/home/user/comdraft/assets/img/dau-huong.png">    </p:cNvPr>
           <p:cNvPicPr>
             <a:picLocks noChangeAspect="1"/>
           </p:cNvPicPr>
@@ -12767,7 +13435,7 @@
         </p:blipFill>
         <p:spPr>
           <a:xfrm>
-            <a:off x="472287" y="1481328"/>
+            <a:off x="472287" y="1781494"/>
             <a:ext cx="11247120" cy="4108826"/>
           </a:xfrm>
           <a:prstGeom prst="rect">
@@ -12775,963 +13443,6 @@
           </a:prstGeom>
         </p:spPr>
       </p:pic>
-    </p:spTree>
-  </p:cSld>
-  <p:clrMapOvr>
-    <a:masterClrMapping/>
-  </p:clrMapOvr>
-</p:sld>
-</file>
-
-<file path=ppt/slides/slide8.xml><?xml version="1.0" encoding="utf-8"?>
-<p:sld xmlns:a="http://schemas.openxmlformats.org/drawingml/2006/main" xmlns:r="http://schemas.openxmlformats.org/officeDocument/2006/relationships" xmlns:p="http://schemas.openxmlformats.org/presentationml/2006/main">
-  <p:cSld name="Slide 8">
-    <p:bg>
-      <p:bgPr>
-        <a:solidFill>
-          <a:srgbClr val="FDFBF8"/>
-        </a:solidFill>
-      </p:bgPr>
-    </p:bg>
-    <p:spTree>
-      <p:nvGrpSpPr>
-        <p:cNvPr id="1" name=""/>
-        <p:cNvGrpSpPr/>
-        <p:nvPr/>
-      </p:nvGrpSpPr>
-      <p:grpSpPr>
-        <a:xfrm>
-          <a:off x="0" y="0"/>
-          <a:ext cx="0" cy="0"/>
-          <a:chOff x="0" y="0"/>
-          <a:chExt cx="0" cy="0"/>
-        </a:xfrm>
-      </p:grpSpPr>
-      <p:pic>
-        <p:nvPicPr>
-          <p:cNvPr id="2" name="Image 0" descr="assets/logo_tron.png">    </p:cNvPr>
-          <p:cNvPicPr>
-            <a:picLocks noChangeAspect="1"/>
-          </p:cNvPicPr>
-          <p:nvPr/>
-        </p:nvPicPr>
-        <p:blipFill>
-          <a:blip r:embed="rId1"/>
-          <a:stretch>
-            <a:fillRect/>
-          </a:stretch>
-        </p:blipFill>
-        <p:spPr>
-          <a:xfrm>
-            <a:off x="411480" y="6327648"/>
-            <a:ext cx="384048" cy="384048"/>
-          </a:xfrm>
-          <a:prstGeom prst="rect">
-            <a:avLst/>
-          </a:prstGeom>
-        </p:spPr>
-      </p:pic>
-      <p:sp>
-        <p:nvSpPr>
-          <p:cNvPr id="3" name="Text 0"/>
-          <p:cNvSpPr/>
-          <p:nvPr/>
-        </p:nvSpPr>
-        <p:spPr>
-          <a:xfrm>
-            <a:off x="868680" y="6355080"/>
-            <a:ext cx="7498080" cy="310896"/>
-          </a:xfrm>
-          <a:prstGeom prst="rect">
-            <a:avLst/>
-          </a:prstGeom>
-          <a:noFill/>
-          <a:ln/>
-        </p:spPr>
-        <p:txBody>
-          <a:bodyPr wrap="square" lIns="0" tIns="0" rIns="0" bIns="0" rtlCol="0" anchor="ctr"/>
-          <a:lstStyle/>
-          <a:p>
-            <a:pPr indent="0" marL="0">
-              <a:buNone/>
-            </a:pPr>
-            <a:r>
-              <a:rPr lang="en-US" sz="900" dirty="0">
-                <a:solidFill>
-                  <a:srgbClr val="8A7A76"/>
-                </a:solidFill>
-                <a:latin typeface="Calibri" pitchFamily="34" charset="0"/>
-                <a:ea typeface="Calibri" pitchFamily="34" charset="-122"/>
-                <a:cs typeface="Calibri" pitchFamily="34" charset="-120"/>
-              </a:rPr>
-              <a:t>Je m'appelle Huong  •  GV. Đỗ Thùy Hương  •  EC1103</a:t>
-            </a:r>
-            <a:endParaRPr lang="en-US" sz="900" dirty="0"/>
-          </a:p>
-        </p:txBody>
-      </p:sp>
-      <p:sp>
-        <p:nvSpPr>
-          <p:cNvPr id="4" name="Text 1"/>
-          <p:cNvSpPr/>
-          <p:nvPr/>
-        </p:nvSpPr>
-        <p:spPr>
-          <a:xfrm>
-            <a:off x="8503920" y="6355080"/>
-            <a:ext cx="2743200" cy="310896"/>
-          </a:xfrm>
-          <a:prstGeom prst="rect">
-            <a:avLst/>
-          </a:prstGeom>
-          <a:noFill/>
-          <a:ln/>
-        </p:spPr>
-        <p:txBody>
-          <a:bodyPr wrap="square" lIns="0" tIns="0" rIns="0" bIns="0" rtlCol="0" anchor="ctr"/>
-          <a:lstStyle/>
-          <a:p>
-            <a:pPr algn="r" indent="0" marL="0">
-              <a:buNone/>
-            </a:pPr>
-            <a:r>
-              <a:rPr lang="en-US" sz="900" dirty="0">
-                <a:solidFill>
-                  <a:srgbClr val="8A7A76"/>
-                </a:solidFill>
-                <a:latin typeface="Calibri" pitchFamily="34" charset="0"/>
-                <a:ea typeface="Calibri" pitchFamily="34" charset="-122"/>
-                <a:cs typeface="Calibri" pitchFamily="34" charset="-120"/>
-              </a:rPr>
-              <a:t>Chương 4</a:t>
-            </a:r>
-            <a:endParaRPr lang="en-US" sz="900" dirty="0"/>
-          </a:p>
-        </p:txBody>
-      </p:sp>
-      <p:sp>
-        <p:nvSpPr>
-          <p:cNvPr id="5" name="Shape 2"/>
-          <p:cNvSpPr/>
-          <p:nvPr/>
-        </p:nvSpPr>
-        <p:spPr>
-          <a:xfrm>
-            <a:off x="11430000" y="6327648"/>
-            <a:ext cx="365760" cy="365760"/>
-          </a:xfrm>
-          <a:prstGeom prst="ellipse">
-            <a:avLst/>
-          </a:prstGeom>
-          <a:solidFill>
-            <a:srgbClr val="DC756A"/>
-          </a:solidFill>
-          <a:ln/>
-        </p:spPr>
-        <p:txBody>
-          <a:bodyPr/>
-          <a:p/>
-        </p:txBody>
-      </p:sp>
-      <p:sp>
-        <p:nvSpPr>
-          <p:cNvPr id="6" name="Text 3"/>
-          <p:cNvSpPr/>
-          <p:nvPr/>
-        </p:nvSpPr>
-        <p:spPr>
-          <a:xfrm>
-            <a:off x="11430000" y="6327648"/>
-            <a:ext cx="365760" cy="365760"/>
-          </a:xfrm>
-          <a:prstGeom prst="rect">
-            <a:avLst/>
-          </a:prstGeom>
-          <a:noFill/>
-          <a:ln/>
-        </p:spPr>
-        <p:txBody>
-          <a:bodyPr wrap="square" lIns="0" tIns="0" rIns="0" bIns="0" rtlCol="0" anchor="ctr"/>
-          <a:lstStyle/>
-          <a:p>
-            <a:pPr algn="ctr" indent="0" marL="0">
-              <a:buNone/>
-            </a:pPr>
-            <a:r>
-              <a:rPr lang="en-US" sz="1000" b="1" dirty="0">
-                <a:solidFill>
-                  <a:srgbClr val="FFFFFF"/>
-                </a:solidFill>
-                <a:latin typeface="Calibri" pitchFamily="34" charset="0"/>
-                <a:ea typeface="Calibri" pitchFamily="34" charset="-122"/>
-                <a:cs typeface="Calibri" pitchFamily="34" charset="-120"/>
-              </a:rPr>
-              <a:t>8</a:t>
-            </a:r>
-            <a:endParaRPr lang="en-US" sz="1000" dirty="0"/>
-          </a:p>
-        </p:txBody>
-      </p:sp>
-      <p:sp>
-        <p:nvSpPr>
-          <p:cNvPr id="7" name="Text 4"/>
-          <p:cNvSpPr/>
-          <p:nvPr/>
-        </p:nvSpPr>
-        <p:spPr>
-          <a:xfrm>
-            <a:off x="502920" y="310896"/>
-            <a:ext cx="11155680" cy="274320"/>
-          </a:xfrm>
-          <a:prstGeom prst="rect">
-            <a:avLst/>
-          </a:prstGeom>
-          <a:noFill/>
-          <a:ln/>
-        </p:spPr>
-        <p:txBody>
-          <a:bodyPr wrap="square" lIns="0" tIns="0" rIns="0" bIns="0" rtlCol="0" anchor="ctr"/>
-          <a:lstStyle/>
-          <a:p>
-            <a:pPr indent="0" marL="0">
-              <a:buNone/>
-            </a:pPr>
-            <a:r>
-              <a:rPr lang="en-US" sz="1100" b="1" spc="300" kern="0" dirty="0">
-                <a:solidFill>
-                  <a:srgbClr val="DC756A"/>
-                </a:solidFill>
-                <a:latin typeface="Calibri" pitchFamily="34" charset="0"/>
-                <a:ea typeface="Calibri" pitchFamily="34" charset="-122"/>
-                <a:cs typeface="Calibri" pitchFamily="34" charset="-120"/>
-              </a:rPr>
-              <a:t>4.2</a:t>
-            </a:r>
-            <a:endParaRPr lang="en-US" sz="1100" dirty="0"/>
-          </a:p>
-        </p:txBody>
-      </p:sp>
-      <p:sp>
-        <p:nvSpPr>
-          <p:cNvPr id="8" name="Text 5"/>
-          <p:cNvSpPr/>
-          <p:nvPr/>
-        </p:nvSpPr>
-        <p:spPr>
-          <a:xfrm>
-            <a:off x="502920" y="576072"/>
-            <a:ext cx="11155680" cy="713232"/>
-          </a:xfrm>
-          <a:prstGeom prst="rect">
-            <a:avLst/>
-          </a:prstGeom>
-          <a:noFill/>
-          <a:ln/>
-        </p:spPr>
-        <p:txBody>
-          <a:bodyPr wrap="square" lIns="0" tIns="0" rIns="0" bIns="0" rtlCol="0" anchor="ctr"/>
-          <a:lstStyle/>
-          <a:p>
-            <a:pPr indent="0" marL="0">
-              <a:buNone/>
-            </a:pPr>
-            <a:r>
-              <a:rPr lang="en-US" sz="2700" b="1" dirty="0">
-                <a:solidFill>
-                  <a:srgbClr val="AC4D33"/>
-                </a:solidFill>
-                <a:latin typeface="Cambria" pitchFamily="34" charset="0"/>
-                <a:ea typeface="Cambria" pitchFamily="34" charset="-122"/>
-                <a:cs typeface="Cambria" pitchFamily="34" charset="-120"/>
-              </a:rPr>
-              <a:t>Giai đoạn chuẩn bị — vũ khí quan trọng nhất</a:t>
-            </a:r>
-            <a:endParaRPr lang="en-US" sz="2700" dirty="0"/>
-          </a:p>
-        </p:txBody>
-      </p:sp>
-      <p:pic>
-        <p:nvPicPr>
-          <p:cNvPr id="9" name="Picture 8" descr="c4-batna-zopa-nt.png"/>
-          <p:cNvPicPr>
-            <a:picLocks noChangeAspect="1"/>
-          </p:cNvPicPr>
-          <p:nvPr/>
-        </p:nvPicPr>
-        <p:blipFill>
-          <a:blip r:embed="rId4"/>
-          <a:stretch>
-            <a:fillRect/>
-          </a:stretch>
-        </p:blipFill>
-        <p:spPr>
-          <a:xfrm>
-            <a:off x="875649" y="1481328"/>
-            <a:ext cx="10440397" cy="3786855"/>
-          </a:xfrm>
-          <a:prstGeom prst="rect">
-            <a:avLst/>
-          </a:prstGeom>
-        </p:spPr>
-      </p:pic>
-      <p:sp>
-        <p:nvSpPr>
-          <p:cNvPr id="10" name="TextBox 9"/>
-          <p:cNvSpPr txBox="1"/>
-          <p:nvPr/>
-        </p:nvSpPr>
-        <p:spPr>
-          <a:xfrm>
-            <a:off x="548640" y="5341335"/>
-            <a:ext cx="11109960" cy="310896"/>
-          </a:xfrm>
-          <a:prstGeom prst="rect">
-            <a:avLst/>
-          </a:prstGeom>
-          <a:noFill/>
-        </p:spPr>
-        <p:txBody>
-          <a:bodyPr wrap="square">
-            <a:spAutoFit/>
-          </a:bodyPr>
-          <a:lstStyle/>
-          <a:p>
-            <a:pPr algn="ctr"/>
-            <a:r>
-              <a:rPr sz="1150" i="1">
-                <a:solidFill>
-                  <a:srgbClr val="8A7A76"/>
-                </a:solidFill>
-                <a:latin typeface="Calibri"/>
-              </a:rPr>
-              <a:t>ZOPA hẹp hay rộng phụ thuộc vào giới hạn thật của hai bên — chuẩn bị kỹ để biết mình đang ở đâu trên trục này.</a:t>
-            </a:r>
-          </a:p>
-        </p:txBody>
-      </p:sp>
-    </p:spTree>
-  </p:cSld>
-  <p:clrMapOvr>
-    <a:masterClrMapping/>
-  </p:clrMapOvr>
-</p:sld>
-</file>
-
-<file path=ppt/slides/slide9.xml><?xml version="1.0" encoding="utf-8"?>
-<p:sld xmlns:a="http://schemas.openxmlformats.org/drawingml/2006/main" xmlns:r="http://schemas.openxmlformats.org/officeDocument/2006/relationships" xmlns:p="http://schemas.openxmlformats.org/presentationml/2006/main">
-  <p:cSld name="Slide 9">
-    <p:bg>
-      <p:bgPr>
-        <a:solidFill>
-          <a:srgbClr val="FDFBF8"/>
-        </a:solidFill>
-      </p:bgPr>
-    </p:bg>
-    <p:spTree>
-      <p:nvGrpSpPr>
-        <p:cNvPr id="1" name=""/>
-        <p:cNvGrpSpPr/>
-        <p:nvPr/>
-      </p:nvGrpSpPr>
-      <p:grpSpPr>
-        <a:xfrm>
-          <a:off x="0" y="0"/>
-          <a:ext cx="0" cy="0"/>
-          <a:chOff x="0" y="0"/>
-          <a:chExt cx="0" cy="0"/>
-        </a:xfrm>
-      </p:grpSpPr>
-      <p:pic>
-        <p:nvPicPr>
-          <p:cNvPr id="2" name="Image 0" descr="assets/logo_tron.png">    </p:cNvPr>
-          <p:cNvPicPr>
-            <a:picLocks noChangeAspect="1"/>
-          </p:cNvPicPr>
-          <p:nvPr/>
-        </p:nvPicPr>
-        <p:blipFill>
-          <a:blip r:embed="rId1"/>
-          <a:stretch>
-            <a:fillRect/>
-          </a:stretch>
-        </p:blipFill>
-        <p:spPr>
-          <a:xfrm>
-            <a:off x="411480" y="6327648"/>
-            <a:ext cx="384048" cy="384048"/>
-          </a:xfrm>
-          <a:prstGeom prst="rect">
-            <a:avLst/>
-          </a:prstGeom>
-        </p:spPr>
-      </p:pic>
-      <p:sp>
-        <p:nvSpPr>
-          <p:cNvPr id="3" name="Text 0"/>
-          <p:cNvSpPr/>
-          <p:nvPr/>
-        </p:nvSpPr>
-        <p:spPr>
-          <a:xfrm>
-            <a:off x="868680" y="6355080"/>
-            <a:ext cx="7498080" cy="310896"/>
-          </a:xfrm>
-          <a:prstGeom prst="rect">
-            <a:avLst/>
-          </a:prstGeom>
-          <a:noFill/>
-          <a:ln/>
-        </p:spPr>
-        <p:txBody>
-          <a:bodyPr wrap="square" lIns="0" tIns="0" rIns="0" bIns="0" rtlCol="0" anchor="ctr"/>
-          <a:lstStyle/>
-          <a:p>
-            <a:pPr indent="0" marL="0">
-              <a:buNone/>
-            </a:pPr>
-            <a:r>
-              <a:rPr lang="en-US" sz="900" dirty="0">
-                <a:solidFill>
-                  <a:srgbClr val="8A7A76"/>
-                </a:solidFill>
-                <a:latin typeface="Calibri" pitchFamily="34" charset="0"/>
-                <a:ea typeface="Calibri" pitchFamily="34" charset="-122"/>
-                <a:cs typeface="Calibri" pitchFamily="34" charset="-120"/>
-              </a:rPr>
-              <a:t>Je m'appelle Huong  •  GV. Đỗ Thùy Hương  •  EC1103</a:t>
-            </a:r>
-            <a:endParaRPr lang="en-US" sz="900" dirty="0"/>
-          </a:p>
-        </p:txBody>
-      </p:sp>
-      <p:sp>
-        <p:nvSpPr>
-          <p:cNvPr id="4" name="Text 1"/>
-          <p:cNvSpPr/>
-          <p:nvPr/>
-        </p:nvSpPr>
-        <p:spPr>
-          <a:xfrm>
-            <a:off x="8503920" y="6355080"/>
-            <a:ext cx="2743200" cy="310896"/>
-          </a:xfrm>
-          <a:prstGeom prst="rect">
-            <a:avLst/>
-          </a:prstGeom>
-          <a:noFill/>
-          <a:ln/>
-        </p:spPr>
-        <p:txBody>
-          <a:bodyPr wrap="square" lIns="0" tIns="0" rIns="0" bIns="0" rtlCol="0" anchor="ctr"/>
-          <a:lstStyle/>
-          <a:p>
-            <a:pPr algn="r" indent="0" marL="0">
-              <a:buNone/>
-            </a:pPr>
-            <a:r>
-              <a:rPr lang="en-US" sz="900" dirty="0">
-                <a:solidFill>
-                  <a:srgbClr val="8A7A76"/>
-                </a:solidFill>
-                <a:latin typeface="Calibri" pitchFamily="34" charset="0"/>
-                <a:ea typeface="Calibri" pitchFamily="34" charset="-122"/>
-                <a:cs typeface="Calibri" pitchFamily="34" charset="-120"/>
-              </a:rPr>
-              <a:t>Chương 4</a:t>
-            </a:r>
-            <a:endParaRPr lang="en-US" sz="900" dirty="0"/>
-          </a:p>
-        </p:txBody>
-      </p:sp>
-      <p:sp>
-        <p:nvSpPr>
-          <p:cNvPr id="5" name="Shape 2"/>
-          <p:cNvSpPr/>
-          <p:nvPr/>
-        </p:nvSpPr>
-        <p:spPr>
-          <a:xfrm>
-            <a:off x="11430000" y="6327648"/>
-            <a:ext cx="365760" cy="365760"/>
-          </a:xfrm>
-          <a:prstGeom prst="ellipse">
-            <a:avLst/>
-          </a:prstGeom>
-          <a:solidFill>
-            <a:srgbClr val="DC756A"/>
-          </a:solidFill>
-          <a:ln/>
-        </p:spPr>
-        <p:txBody>
-          <a:bodyPr/>
-          <a:p/>
-        </p:txBody>
-      </p:sp>
-      <p:sp>
-        <p:nvSpPr>
-          <p:cNvPr id="6" name="Text 3"/>
-          <p:cNvSpPr/>
-          <p:nvPr/>
-        </p:nvSpPr>
-        <p:spPr>
-          <a:xfrm>
-            <a:off x="11430000" y="6327648"/>
-            <a:ext cx="365760" cy="365760"/>
-          </a:xfrm>
-          <a:prstGeom prst="rect">
-            <a:avLst/>
-          </a:prstGeom>
-          <a:noFill/>
-          <a:ln/>
-        </p:spPr>
-        <p:txBody>
-          <a:bodyPr wrap="square" lIns="0" tIns="0" rIns="0" bIns="0" rtlCol="0" anchor="ctr"/>
-          <a:lstStyle/>
-          <a:p>
-            <a:pPr algn="ctr" indent="0" marL="0">
-              <a:buNone/>
-            </a:pPr>
-            <a:r>
-              <a:rPr lang="en-US" sz="1000" b="1" dirty="0">
-                <a:solidFill>
-                  <a:srgbClr val="FFFFFF"/>
-                </a:solidFill>
-                <a:latin typeface="Calibri" pitchFamily="34" charset="0"/>
-                <a:ea typeface="Calibri" pitchFamily="34" charset="-122"/>
-                <a:cs typeface="Calibri" pitchFamily="34" charset="-120"/>
-              </a:rPr>
-              <a:t>9</a:t>
-            </a:r>
-            <a:endParaRPr lang="en-US" sz="1000" dirty="0"/>
-          </a:p>
-        </p:txBody>
-      </p:sp>
-      <p:sp>
-        <p:nvSpPr>
-          <p:cNvPr id="7" name="Text 4"/>
-          <p:cNvSpPr/>
-          <p:nvPr/>
-        </p:nvSpPr>
-        <p:spPr>
-          <a:xfrm>
-            <a:off x="502920" y="310896"/>
-            <a:ext cx="11155680" cy="274320"/>
-          </a:xfrm>
-          <a:prstGeom prst="rect">
-            <a:avLst/>
-          </a:prstGeom>
-          <a:noFill/>
-          <a:ln/>
-        </p:spPr>
-        <p:txBody>
-          <a:bodyPr wrap="square" lIns="0" tIns="0" rIns="0" bIns="0" rtlCol="0" anchor="ctr"/>
-          <a:lstStyle/>
-          <a:p>
-            <a:pPr indent="0" marL="0">
-              <a:buNone/>
-            </a:pPr>
-            <a:r>
-              <a:rPr lang="en-US" sz="1100" b="1" spc="300" kern="0" dirty="0">
-                <a:solidFill>
-                  <a:srgbClr val="DC756A"/>
-                </a:solidFill>
-                <a:latin typeface="Calibri" pitchFamily="34" charset="0"/>
-                <a:ea typeface="Calibri" pitchFamily="34" charset="-122"/>
-                <a:cs typeface="Calibri" pitchFamily="34" charset="-120"/>
-              </a:rPr>
-              <a:t>4.2</a:t>
-            </a:r>
-            <a:endParaRPr lang="en-US" sz="1100" dirty="0"/>
-          </a:p>
-        </p:txBody>
-      </p:sp>
-      <p:sp>
-        <p:nvSpPr>
-          <p:cNvPr id="8" name="Text 5"/>
-          <p:cNvSpPr/>
-          <p:nvPr/>
-        </p:nvSpPr>
-        <p:spPr>
-          <a:xfrm>
-            <a:off x="502920" y="576072"/>
-            <a:ext cx="11155680" cy="713232"/>
-          </a:xfrm>
-          <a:prstGeom prst="rect">
-            <a:avLst/>
-          </a:prstGeom>
-          <a:noFill/>
-          <a:ln/>
-        </p:spPr>
-        <p:txBody>
-          <a:bodyPr wrap="square" lIns="0" tIns="0" rIns="0" bIns="0" rtlCol="0" anchor="ctr"/>
-          <a:lstStyle/>
-          <a:p>
-            <a:pPr indent="0" marL="0">
-              <a:buNone/>
-            </a:pPr>
-            <a:r>
-              <a:rPr lang="en-US" sz="2700" b="1" dirty="0">
-                <a:solidFill>
-                  <a:srgbClr val="AC4D33"/>
-                </a:solidFill>
-                <a:latin typeface="Cambria" pitchFamily="34" charset="0"/>
-                <a:ea typeface="Cambria" pitchFamily="34" charset="-122"/>
-                <a:cs typeface="Cambria" pitchFamily="34" charset="-120"/>
-              </a:rPr>
-              <a:t>Mở đầu và thương lượng</a:t>
-            </a:r>
-            <a:endParaRPr lang="en-US" sz="2700" dirty="0"/>
-          </a:p>
-        </p:txBody>
-      </p:sp>
-      <p:sp>
-        <p:nvSpPr>
-          <p:cNvPr id="9" name="Shape 6"/>
-          <p:cNvSpPr/>
-          <p:nvPr/>
-        </p:nvSpPr>
-        <p:spPr>
-          <a:xfrm>
-            <a:off x="502920" y="1417320"/>
-            <a:ext cx="11201400" cy="1076706"/>
-          </a:xfrm>
-          <a:prstGeom prst="roundRect">
-            <a:avLst>
-              <a:gd name="adj" fmla="val 7643"/>
-            </a:avLst>
-          </a:prstGeom>
-          <a:solidFill>
-            <a:srgbClr val="FDF1EF"/>
-          </a:solidFill>
-          <a:ln w="15875">
-            <a:solidFill>
-              <a:srgbClr val="FBCEC9"/>
-            </a:solidFill>
-            <a:prstDash val="solid"/>
-          </a:ln>
-        </p:spPr>
-        <p:txBody>
-          <a:bodyPr/>
-          <a:p/>
-        </p:txBody>
-      </p:sp>
-      <p:sp>
-        <p:nvSpPr>
-          <p:cNvPr id="10" name="Text 7"/>
-          <p:cNvSpPr/>
-          <p:nvPr/>
-        </p:nvSpPr>
-        <p:spPr>
-          <a:xfrm>
-            <a:off x="722376" y="1472184"/>
-            <a:ext cx="10762488" cy="966978"/>
-          </a:xfrm>
-          <a:prstGeom prst="rect">
-            <a:avLst/>
-          </a:prstGeom>
-          <a:noFill/>
-          <a:ln/>
-        </p:spPr>
-        <p:txBody>
-          <a:bodyPr wrap="square" lIns="0" tIns="0" rIns="0" bIns="0" rtlCol="0" anchor="ctr"/>
-          <a:lstStyle/>
-          <a:p>
-            <a:pPr indent="0" marL="0">
-              <a:buNone/>
-            </a:pPr>
-            <a:r>
-              <a:rPr lang="en-US" sz="1500" b="1" dirty="0">
-                <a:solidFill>
-                  <a:srgbClr val="AC4D33"/>
-                </a:solidFill>
-                <a:latin typeface="Calibri" pitchFamily="34" charset="0"/>
-                <a:ea typeface="Calibri" pitchFamily="34" charset="-122"/>
-                <a:cs typeface="Calibri" pitchFamily="34" charset="-120"/>
-              </a:rPr>
-              <a:t>Tạo không khí và thăm dò</a:t>
-            </a:r>
-            <a:endParaRPr lang="en-US" sz="1500" dirty="0"/>
-          </a:p>
-          <a:p>
-            <a:pPr indent="0" marL="0">
-              <a:buNone/>
-            </a:pPr>
-            <a:r>
-              <a:rPr lang="en-US" sz="1250" dirty="0">
-                <a:solidFill>
-                  <a:srgbClr val="3A2B28"/>
-                </a:solidFill>
-                <a:latin typeface="Calibri" pitchFamily="34" charset="0"/>
-                <a:ea typeface="Calibri" pitchFamily="34" charset="-122"/>
-                <a:cs typeface="Calibri" pitchFamily="34" charset="-120"/>
-              </a:rPr>
-              <a:t>Vài phút xã giao đúng mực; quan sát thái độ; đặt câu hỏi mở để đối phương bộc lộ nhu cầu và giới hạn trước khi mình ra giá.</a:t>
-            </a:r>
-            <a:endParaRPr lang="en-US" sz="1500" dirty="0"/>
-          </a:p>
-        </p:txBody>
-      </p:sp>
-      <p:sp>
-        <p:nvSpPr>
-          <p:cNvPr id="11" name="Shape 8"/>
-          <p:cNvSpPr/>
-          <p:nvPr/>
-        </p:nvSpPr>
-        <p:spPr>
-          <a:xfrm>
-            <a:off x="502920" y="2658618"/>
-            <a:ext cx="11201400" cy="1076706"/>
-          </a:xfrm>
-          <a:prstGeom prst="roundRect">
-            <a:avLst>
-              <a:gd name="adj" fmla="val 7643"/>
-            </a:avLst>
-          </a:prstGeom>
-          <a:solidFill>
-            <a:srgbClr val="FDF1EF"/>
-          </a:solidFill>
-          <a:ln w="15875">
-            <a:solidFill>
-              <a:srgbClr val="FBCEC9"/>
-            </a:solidFill>
-            <a:prstDash val="solid"/>
-          </a:ln>
-        </p:spPr>
-        <p:txBody>
-          <a:bodyPr/>
-          <a:p/>
-        </p:txBody>
-      </p:sp>
-      <p:sp>
-        <p:nvSpPr>
-          <p:cNvPr id="12" name="Text 9"/>
-          <p:cNvSpPr/>
-          <p:nvPr/>
-        </p:nvSpPr>
-        <p:spPr>
-          <a:xfrm>
-            <a:off x="722376" y="2713482"/>
-            <a:ext cx="10762488" cy="966978"/>
-          </a:xfrm>
-          <a:prstGeom prst="rect">
-            <a:avLst/>
-          </a:prstGeom>
-          <a:noFill/>
-          <a:ln/>
-        </p:spPr>
-        <p:txBody>
-          <a:bodyPr wrap="square" lIns="0" tIns="0" rIns="0" bIns="0" rtlCol="0" anchor="ctr"/>
-          <a:lstStyle/>
-          <a:p>
-            <a:pPr indent="0" marL="0">
-              <a:buNone/>
-            </a:pPr>
-            <a:r>
-              <a:rPr lang="en-US" sz="1500" b="1" dirty="0">
-                <a:solidFill>
-                  <a:srgbClr val="AC4D33"/>
-                </a:solidFill>
-                <a:latin typeface="Calibri" pitchFamily="34" charset="0"/>
-                <a:ea typeface="Calibri" pitchFamily="34" charset="-122"/>
-                <a:cs typeface="Calibri" pitchFamily="34" charset="-120"/>
-              </a:rPr>
-              <a:t>Đưa đề nghị và mặc cả</a:t>
-            </a:r>
-            <a:endParaRPr lang="en-US" sz="1500" dirty="0"/>
-          </a:p>
-          <a:p>
-            <a:pPr indent="0" marL="0">
-              <a:buNone/>
-            </a:pPr>
-            <a:r>
-              <a:rPr lang="en-US" sz="1250" dirty="0">
-                <a:solidFill>
-                  <a:srgbClr val="3A2B28"/>
-                </a:solidFill>
-                <a:latin typeface="Calibri" pitchFamily="34" charset="0"/>
-                <a:ea typeface="Calibri" pitchFamily="34" charset="-122"/>
-                <a:cs typeface="Calibri" pitchFamily="34" charset="-120"/>
-              </a:rPr>
-              <a:t>Đề nghị đầu tiên có căn cứ (neo tâm lý); phản hồi đề nghị của đối phương bằng câu hỏi “dựa trên cơ sở nào?” thay vì đồng ý hay bác bỏ ngay.</a:t>
-            </a:r>
-            <a:endParaRPr lang="en-US" sz="1500" dirty="0"/>
-          </a:p>
-        </p:txBody>
-      </p:sp>
-      <p:sp>
-        <p:nvSpPr>
-          <p:cNvPr id="13" name="Shape 10"/>
-          <p:cNvSpPr/>
-          <p:nvPr/>
-        </p:nvSpPr>
-        <p:spPr>
-          <a:xfrm>
-            <a:off x="502920" y="3899916"/>
-            <a:ext cx="11201400" cy="1076706"/>
-          </a:xfrm>
-          <a:prstGeom prst="roundRect">
-            <a:avLst>
-              <a:gd name="adj" fmla="val 7643"/>
-            </a:avLst>
-          </a:prstGeom>
-          <a:solidFill>
-            <a:srgbClr val="FDF1EF"/>
-          </a:solidFill>
-          <a:ln w="15875">
-            <a:solidFill>
-              <a:srgbClr val="FBCEC9"/>
-            </a:solidFill>
-            <a:prstDash val="solid"/>
-          </a:ln>
-        </p:spPr>
-        <p:txBody>
-          <a:bodyPr/>
-          <a:p/>
-        </p:txBody>
-      </p:sp>
-      <p:sp>
-        <p:nvSpPr>
-          <p:cNvPr id="14" name="Text 11"/>
-          <p:cNvSpPr/>
-          <p:nvPr/>
-        </p:nvSpPr>
-        <p:spPr>
-          <a:xfrm>
-            <a:off x="722376" y="3954780"/>
-            <a:ext cx="10762488" cy="966978"/>
-          </a:xfrm>
-          <a:prstGeom prst="rect">
-            <a:avLst/>
-          </a:prstGeom>
-          <a:noFill/>
-          <a:ln/>
-        </p:spPr>
-        <p:txBody>
-          <a:bodyPr wrap="square" lIns="0" tIns="0" rIns="0" bIns="0" rtlCol="0" anchor="ctr"/>
-          <a:lstStyle/>
-          <a:p>
-            <a:pPr indent="0" marL="0">
-              <a:buNone/>
-            </a:pPr>
-            <a:r>
-              <a:rPr lang="en-US" sz="1500" b="1" dirty="0">
-                <a:solidFill>
-                  <a:srgbClr val="AC4D33"/>
-                </a:solidFill>
-                <a:latin typeface="Calibri" pitchFamily="34" charset="0"/>
-                <a:ea typeface="Calibri" pitchFamily="34" charset="-122"/>
-                <a:cs typeface="Calibri" pitchFamily="34" charset="-120"/>
-              </a:rPr>
-              <a:t>Nhượng bộ có điều kiện</a:t>
-            </a:r>
-            <a:endParaRPr lang="en-US" sz="1500" dirty="0"/>
-          </a:p>
-          <a:p>
-            <a:pPr indent="0" marL="0">
-              <a:buNone/>
-            </a:pPr>
-            <a:r>
-              <a:rPr lang="en-US" sz="1250" dirty="0">
-                <a:solidFill>
-                  <a:srgbClr val="3A2B28"/>
-                </a:solidFill>
-                <a:latin typeface="Calibri" pitchFamily="34" charset="0"/>
-                <a:ea typeface="Calibri" pitchFamily="34" charset="-122"/>
-                <a:cs typeface="Calibri" pitchFamily="34" charset="-120"/>
-              </a:rPr>
-              <a:t>Không cho không bao giờ: “Nếu anh tăng số lượng lên 500, chúng tôi sẽ giảm 3%.” Nhượng bộ nhỏ dần để phát tín hiệu chạm giới hạn.</a:t>
-            </a:r>
-            <a:endParaRPr lang="en-US" sz="1500" dirty="0"/>
-          </a:p>
-        </p:txBody>
-      </p:sp>
-      <p:sp>
-        <p:nvSpPr>
-          <p:cNvPr id="15" name="Shape 12"/>
-          <p:cNvSpPr/>
-          <p:nvPr/>
-        </p:nvSpPr>
-        <p:spPr>
-          <a:xfrm>
-            <a:off x="502920" y="5141214"/>
-            <a:ext cx="11201400" cy="1076706"/>
-          </a:xfrm>
-          <a:prstGeom prst="roundRect">
-            <a:avLst>
-              <a:gd name="adj" fmla="val 7643"/>
-            </a:avLst>
-          </a:prstGeom>
-          <a:solidFill>
-            <a:srgbClr val="FDF1EF"/>
-          </a:solidFill>
-          <a:ln w="15875">
-            <a:solidFill>
-              <a:srgbClr val="FBCEC9"/>
-            </a:solidFill>
-            <a:prstDash val="solid"/>
-          </a:ln>
-        </p:spPr>
-        <p:txBody>
-          <a:bodyPr/>
-          <a:p/>
-        </p:txBody>
-      </p:sp>
-      <p:sp>
-        <p:nvSpPr>
-          <p:cNvPr id="16" name="Text 13"/>
-          <p:cNvSpPr/>
-          <p:nvPr/>
-        </p:nvSpPr>
-        <p:spPr>
-          <a:xfrm>
-            <a:off x="722376" y="5196078"/>
-            <a:ext cx="10762488" cy="966978"/>
-          </a:xfrm>
-          <a:prstGeom prst="rect">
-            <a:avLst/>
-          </a:prstGeom>
-          <a:noFill/>
-          <a:ln/>
-        </p:spPr>
-        <p:txBody>
-          <a:bodyPr wrap="square" lIns="0" tIns="0" rIns="0" bIns="0" rtlCol="0" anchor="ctr"/>
-          <a:lstStyle/>
-          <a:p>
-            <a:pPr indent="0" marL="0">
-              <a:buNone/>
-            </a:pPr>
-            <a:r>
-              <a:rPr lang="en-US" sz="1500" b="1" dirty="0">
-                <a:solidFill>
-                  <a:srgbClr val="AC4D33"/>
-                </a:solidFill>
-                <a:latin typeface="Calibri" pitchFamily="34" charset="0"/>
-                <a:ea typeface="Calibri" pitchFamily="34" charset="-122"/>
-                <a:cs typeface="Calibri" pitchFamily="34" charset="-120"/>
-              </a:rPr>
-              <a:t>Xử lý bế tắc</a:t>
-            </a:r>
-            <a:endParaRPr lang="en-US" sz="1500" dirty="0"/>
-          </a:p>
-          <a:p>
-            <a:pPr indent="0" marL="0">
-              <a:buNone/>
-            </a:pPr>
-            <a:r>
-              <a:rPr lang="en-US" sz="1250" dirty="0">
-                <a:solidFill>
-                  <a:srgbClr val="3A2B28"/>
-                </a:solidFill>
-                <a:latin typeface="Calibri" pitchFamily="34" charset="0"/>
-                <a:ea typeface="Calibri" pitchFamily="34" charset="-122"/>
-                <a:cs typeface="Calibri" pitchFamily="34" charset="-120"/>
-              </a:rPr>
-              <a:t>Tạm nghỉ; đổi người – đổi vấn đề – đổi cách tiếp cận; quay về lợi ích gốc; đưa tiêu chí khách quan (giá thị trường, quy định) làm trọng tài.</a:t>
-            </a:r>
-            <a:endParaRPr lang="en-US" sz="1500" dirty="0"/>
-          </a:p>
-        </p:txBody>
-      </p:sp>
     </p:spTree>
   </p:cSld>
   <p:clrMapOvr>
@@ -13783,14 +13494,108 @@
     </a:clrScheme>
     <a:fontScheme name="Office">
       <a:majorFont>
-        <a:latin typeface="Cambria" panose="020F0302020204030204"/>
-        <a:ea typeface="Cambria"/>
-        <a:cs typeface="Cambria"/>
+        <a:latin typeface="Calibri Light" panose="020F0302020204030204"/>
+        <a:ea typeface=""/>
+        <a:cs typeface=""/>
+        <a:font script="Jpan" typeface="游ゴシック Light"/>
+        <a:font script="Hang" typeface="맑은 고딕"/>
+        <a:font script="Hans" typeface="等线 Light"/>
+        <a:font script="Hant" typeface="新細明體"/>
+        <a:font script="Arab" typeface="Times New Roman"/>
+        <a:font script="Hebr" typeface="Times New Roman"/>
+        <a:font script="Thai" typeface="Angsana New"/>
+        <a:font script="Ethi" typeface="Nyala"/>
+        <a:font script="Beng" typeface="Vrinda"/>
+        <a:font script="Gujr" typeface="Shruti"/>
+        <a:font script="Khmr" typeface="MoolBoran"/>
+        <a:font script="Knda" typeface="Tunga"/>
+        <a:font script="Guru" typeface="Raavi"/>
+        <a:font script="Cans" typeface="Euphemia"/>
+        <a:font script="Cher" typeface="Plantagenet Cherokee"/>
+        <a:font script="Yiii" typeface="Microsoft Yi Baiti"/>
+        <a:font script="Tibt" typeface="Microsoft Himalaya"/>
+        <a:font script="Thaa" typeface="MV Boli"/>
+        <a:font script="Deva" typeface="Mangal"/>
+        <a:font script="Telu" typeface="Gautami"/>
+        <a:font script="Taml" typeface="Latha"/>
+        <a:font script="Syrc" typeface="Estrangelo Edessa"/>
+        <a:font script="Orya" typeface="Kalinga"/>
+        <a:font script="Mlym" typeface="Kartika"/>
+        <a:font script="Laoo" typeface="DokChampa"/>
+        <a:font script="Sinh" typeface="Iskoola Pota"/>
+        <a:font script="Mong" typeface="Mongolian Baiti"/>
+        <a:font script="Viet" typeface="Times New Roman"/>
+        <a:font script="Uigh" typeface="Microsoft Uighur"/>
+        <a:font script="Geor" typeface="Sylfaen"/>
+        <a:font script="Armn" typeface="Arial"/>
+        <a:font script="Bugi" typeface="Leelawadee UI"/>
+        <a:font script="Bopo" typeface="Microsoft JhengHei"/>
+        <a:font script="Java" typeface="Javanese Text"/>
+        <a:font script="Lisu" typeface="Segoe UI"/>
+        <a:font script="Mymr" typeface="Myanmar Text"/>
+        <a:font script="Nkoo" typeface="Ebrima"/>
+        <a:font script="Olck" typeface="Nirmala UI"/>
+        <a:font script="Osma" typeface="Ebrima"/>
+        <a:font script="Phag" typeface="Phagspa"/>
+        <a:font script="Syrn" typeface="Estrangelo Edessa"/>
+        <a:font script="Syrj" typeface="Estrangelo Edessa"/>
+        <a:font script="Syre" typeface="Estrangelo Edessa"/>
+        <a:font script="Sora" typeface="Nirmala UI"/>
+        <a:font script="Tale" typeface="Microsoft Tai Le"/>
+        <a:font script="Talu" typeface="Microsoft New Tai Lue"/>
+        <a:font script="Tfng" typeface="Ebrima"/>
       </a:majorFont>
       <a:minorFont>
         <a:latin typeface="Calibri" panose="020F0502020204030204"/>
-        <a:ea typeface="Calibri"/>
-        <a:cs typeface="Calibri"/>
+        <a:ea typeface=""/>
+        <a:cs typeface=""/>
+        <a:font script="Jpan" typeface="游ゴシック"/>
+        <a:font script="Hang" typeface="맑은 고딕"/>
+        <a:font script="Hans" typeface="等线"/>
+        <a:font script="Hant" typeface="新細明體"/>
+        <a:font script="Arab" typeface="Arial"/>
+        <a:font script="Hebr" typeface="Arial"/>
+        <a:font script="Thai" typeface="Cordia New"/>
+        <a:font script="Ethi" typeface="Nyala"/>
+        <a:font script="Beng" typeface="Vrinda"/>
+        <a:font script="Gujr" typeface="Shruti"/>
+        <a:font script="Khmr" typeface="DaunPenh"/>
+        <a:font script="Knda" typeface="Tunga"/>
+        <a:font script="Guru" typeface="Raavi"/>
+        <a:font script="Cans" typeface="Euphemia"/>
+        <a:font script="Cher" typeface="Plantagenet Cherokee"/>
+        <a:font script="Yiii" typeface="Microsoft Yi Baiti"/>
+        <a:font script="Tibt" typeface="Microsoft Himalaya"/>
+        <a:font script="Thaa" typeface="MV Boli"/>
+        <a:font script="Deva" typeface="Mangal"/>
+        <a:font script="Telu" typeface="Gautami"/>
+        <a:font script="Taml" typeface="Latha"/>
+        <a:font script="Syrc" typeface="Estrangelo Edessa"/>
+        <a:font script="Orya" typeface="Kalinga"/>
+        <a:font script="Mlym" typeface="Kartika"/>
+        <a:font script="Laoo" typeface="DokChampa"/>
+        <a:font script="Sinh" typeface="Iskoola Pota"/>
+        <a:font script="Mong" typeface="Mongolian Baiti"/>
+        <a:font script="Viet" typeface="Arial"/>
+        <a:font script="Uigh" typeface="Microsoft Uighur"/>
+        <a:font script="Geor" typeface="Sylfaen"/>
+        <a:font script="Armn" typeface="Arial"/>
+        <a:font script="Bugi" typeface="Leelawadee UI"/>
+        <a:font script="Bopo" typeface="Microsoft JhengHei"/>
+        <a:font script="Java" typeface="Javanese Text"/>
+        <a:font script="Lisu" typeface="Segoe UI"/>
+        <a:font script="Mymr" typeface="Myanmar Text"/>
+        <a:font script="Nkoo" typeface="Ebrima"/>
+        <a:font script="Olck" typeface="Nirmala UI"/>
+        <a:font script="Osma" typeface="Ebrima"/>
+        <a:font script="Phag" typeface="Phagspa"/>
+        <a:font script="Syrn" typeface="Estrangelo Edessa"/>
+        <a:font script="Syrj" typeface="Estrangelo Edessa"/>
+        <a:font script="Syre" typeface="Estrangelo Edessa"/>
+        <a:font script="Sora" typeface="Nirmala UI"/>
+        <a:font script="Tale" typeface="Microsoft Tai Le"/>
+        <a:font script="Talu" typeface="Microsoft New Tai Lue"/>
+        <a:font script="Tfng" typeface="Ebrima"/>
       </a:minorFont>
     </a:fontScheme>
     <a:fmtScheme name="Office">

--- a/slides/04-dam-phan.pptx
+++ b/slides/04-dam-phan.pptx
@@ -631,6 +631,27 @@
               <a:t>• Câu chốt: "Đàm phán xong mà không có giấy tờ thì coi như chưa xong."''</a:t>
             </a:r>
           </a:p>
+          <a:p/>
+          <a:p>
+            <a:r>
+              <a:t>NÓI ĐỦ Ý (phần đã rút khỏi slide)</a:t>
+            </a:r>
+          </a:p>
+          <a:p>
+            <a:r>
+              <a:t>• Tín hiệu sẵn sàng chốt: đối phương hỏi chi tiết triển khai, điều khoản thanh toán, thời gian giao hàng.</a:t>
+            </a:r>
+          </a:p>
+          <a:p>
+            <a:r>
+              <a:t>• Văn bản hóa ngay: biên bản ghi nhớ, rồi hợp đồng đủ điều khoản cơ bản — kỹ thuật soạn thảo học ở Chương 5.</a:t>
+            </a:r>
+          </a:p>
+          <a:p>
+            <a:r>
+              <a:t>• Sau đàm phán: thực hiện đúng cam kết chính là vốn cho lần đàm phán sau.</a:t>
+            </a:r>
+          </a:p>
         </p:txBody>
       </p:sp>
       <p:sp>
@@ -737,6 +758,32 @@
               <a:t>• Êkíp: phân vai trưởng đoàn – chuyên môn – ghi chép; TUYỆT ĐỐI không mâu thuẫn nội bộ trước mặt đối tác.</a:t>
             </a:r>
           </a:p>
+          <a:p/>
+          <a:p>
+            <a:r>
+              <a:t>NÓI ĐỦ Ý (phần đã rút khỏi slide)</a:t>
+            </a:r>
+          </a:p>
+          <a:p>
+            <a:r>
+              <a:t>• Im lặng đúng lúc: nhiều nhượng bộ xuất hiện chỉ vì đối phương không chịu được khoảng lặng.</a:t>
+            </a:r>
+          </a:p>
+          <a:p>
+            <a:r>
+              <a:t>• Thuyết phục bằng số liệu, tiền lệ, quy định khách quan — không tranh cãi cảm tính.</a:t>
+            </a:r>
+          </a:p>
+          <a:p>
+            <a:r>
+              <a:t>• Tách con người khỏi vấn đề; giữ bình tĩnh trước khiêu khích.</a:t>
+            </a:r>
+          </a:p>
+          <a:p>
+            <a:r>
+              <a:t>• Êkíp: phân vai trưởng đoàn – chuyên môn – ghi chép; thống nhất tín hiệu nội bộ trước.</a:t>
+            </a:r>
+          </a:p>
         </p:txBody>
       </p:sp>
       <p:sp>
@@ -843,6 +890,37 @@
               <a:t>• Hỏi lớp: ai từng bị "chốt gấp trong hôm nay" khi mua hàng online?</a:t>
             </a:r>
           </a:p>
+          <a:p/>
+          <a:p>
+            <a:r>
+              <a:t>NÓI ĐỦ Ý (phần đã rút khỏi slide)</a:t>
+            </a:r>
+          </a:p>
+          <a:p>
+            <a:r>
+              <a:t>• Neo giá sốc: bám vào tiêu chí khách quan, đừng vội điều chỉnh mục tiêu của mình.</a:t>
+            </a:r>
+          </a:p>
+          <a:p>
+            <a:r>
+              <a:t>• Người tốt – kẻ xấu: nhận diện rồi chỉ đàm phán trên nội dung.</a:t>
+            </a:r>
+          </a:p>
+          <a:p>
+            <a:r>
+              <a:t>• Thời hạn chót giả: kiểm chứng thực hư; có BATNA thì sẵn sàng rời bàn.</a:t>
+            </a:r>
+          </a:p>
+          <a:p>
+            <a:r>
+              <a:t>• Cắt lát salami: gói toàn bộ điều khoản lại — “điểm này mở thì cả gói mở”.</a:t>
+            </a:r>
+          </a:p>
+          <a:p>
+            <a:r>
+              <a:t>• Đòi hỏi phút chót: bình tĩnh định giá yêu cầu đó và đòi đối ứng tương xứng.</a:t>
+            </a:r>
+          </a:p>
         </p:txBody>
       </p:sp>
       <p:sp>
@@ -1805,6 +1883,27 @@
               <a:t>• Ví dụ: người đang cần bán gấp luôn ở thế yếu — vì sao? (sức mạnh thời gian).</a:t>
             </a:r>
           </a:p>
+          <a:p/>
+          <a:p>
+            <a:r>
+              <a:t>NÓI ĐỦ Ý (phần đã rút khỏi slide)</a:t>
+            </a:r>
+          </a:p>
+          <a:p>
+            <a:r>
+              <a:t>• Định nghĩa đủ: đàm phán là quá trình các bên vừa có lợi ích chung, vừa có lợi ích xung đột, cùng trao đổi và thuyết phục để đi đến một thỏa thuận mà các bên chấp nhận được.</a:t>
+            </a:r>
+          </a:p>
+          <a:p>
+            <a:r>
+              <a:t>• Bản chất kép: quên vế hợp tác thì mất đối tác, quên vế cạnh tranh thì chịu thiệt.</a:t>
+            </a:r>
+          </a:p>
+          <a:p>
+            <a:r>
+              <a:t>• Ba nguồn sức mạnh: THÔNG TIN — ai hiểu đối phương hơn; THỜI GIAN — ai ít bị ép tiến độ hơn; THẾ LỰC — ai có nhiều lựa chọn thay thế hơn.</a:t>
+            </a:r>
+          </a:p>
         </p:txBody>
       </p:sp>
       <p:sp>
@@ -1901,6 +2000,27 @@
               <a:t>• Nhấn đặc điểm THỎA THUẬN PHẢI ĐƯỢC VĂN BẢN HÓA — nối thẳng sang Chương 5.</a:t>
             </a:r>
           </a:p>
+          <a:p/>
+          <a:p>
+            <a:r>
+              <a:t>NÓI ĐỦ Ý (phần đã rút khỏi slide)</a:t>
+            </a:r>
+          </a:p>
+          <a:p>
+            <a:r>
+              <a:t>• Nhà đàm phán giỏi biết rõ giới hạn của MÌNH và ước lượng được giới hạn của ĐỐI PHƯƠNG.</a:t>
+            </a:r>
+          </a:p>
+          <a:p>
+            <a:r>
+              <a:t>• Phong cách đàm phán Á – Âu khác nhau; thương vụ một lần khác hẳn quan hệ hợp tác lâu dài.</a:t>
+            </a:r>
+          </a:p>
+          <a:p>
+            <a:r>
+              <a:t>• Kết quả chỉ an toàn khi thành hợp đồng đúng thể thức — cầu nối sang Chương 5.</a:t>
+            </a:r>
+          </a:p>
         </p:txBody>
       </p:sp>
       <p:sp>
@@ -2211,6 +2331,32 @@
               <a:t>• Câu hỏi cho lớp: "Nếu không có ZOPA thì làm gì?" — đáp: mở rộng chiếc bánh (đổi số lượng, tiến độ, dịch vụ kèm), đừng ép giá.</a:t>
             </a:r>
           </a:p>
+          <a:p/>
+          <a:p>
+            <a:r>
+              <a:t>NÓI ĐỦ Ý (phần đã rút khỏi slide)</a:t>
+            </a:r>
+          </a:p>
+          <a:p>
+            <a:r>
+              <a:t>• Ba mức mục tiêu: lý tưởng (mong muốn nhất) – kỳ vọng (hợp lý) – tối thiểu (ranh giới rút lui).</a:t>
+            </a:r>
+          </a:p>
+          <a:p>
+            <a:r>
+              <a:t>• BATNA = Best Alternative To a Negotiated Agreement. BATNA càng mạnh thế càng vững — và ĐỪNG ĐỂ LỘ khi BATNA yếu.</a:t>
+            </a:r>
+          </a:p>
+          <a:p>
+            <a:r>
+              <a:t>• ZOPA: ước lượng để biết đề nghị nào khả thi, đề nghị nào làm vỡ bàn đàm phán.</a:t>
+            </a:r>
+          </a:p>
+          <a:p>
+            <a:r>
+              <a:t>• Hiểu đối tác: nhu cầu thật đằng sau yêu cầu; ai là người có thẩm quyền quyết định.</a:t>
+            </a:r>
+          </a:p>
         </p:txBody>
       </p:sp>
       <p:sp>
@@ -2320,6 +2466,32 @@
           <a:p>
             <a:r>
               <a:t>• Bế tắc: tạm nghỉ – đổi người/vấn đề/cách tiếp cận – quay về lợi ích gốc – đưa tiêu chí khách quan.</a:t>
+            </a:r>
+          </a:p>
+          <a:p/>
+          <a:p>
+            <a:r>
+              <a:t>NÓI ĐỦ Ý (phần đã rút khỏi slide)</a:t>
+            </a:r>
+          </a:p>
+          <a:p>
+            <a:r>
+              <a:t>• Vài phút xã giao đúng mực, vừa tạo không khí vừa quan sát thái độ.</a:t>
+            </a:r>
+          </a:p>
+          <a:p>
+            <a:r>
+              <a:t>• Đề nghị đầu tiên là cái neo tâm lý — nên phải có căn cứ.</a:t>
+            </a:r>
+          </a:p>
+          <a:p>
+            <a:r>
+              <a:t>• Nhượng bộ có điều kiện, ví dụ: “Nếu anh tăng số lượng lên 500, chúng tôi sẽ giảm 3%.” Nhượng bộ nhỏ dần để phát tín hiệu đã chạm giới hạn.</a:t>
+            </a:r>
+          </a:p>
+          <a:p>
+            <a:r>
+              <a:t>• Bế tắc: tạm nghỉ; đổi người, đổi vấn đề, đổi cách tiếp cận; quay về lợi ích gốc.</a:t>
             </a:r>
           </a:p>
         </p:txBody>
@@ -4243,7 +4415,7 @@
                 <a:ea typeface="Calibri" pitchFamily="34" charset="-122"/>
                 <a:cs typeface="Calibri" pitchFamily="34" charset="-120"/>
               </a:rPr>
-              <a:t>Vài phút xã giao đúng mực; quan sát thái độ; đặt câu hỏi mở để đối phương bộc lộ nhu cầu và giới hạn trước khi mình ra giá.</a:t>
+              <a:t>Hỏi mở để họ bộc lộ nhu cầu trước khi mình ra giá</a:t>
             </a:r>
             <a:endParaRPr lang="en-US" sz="1500" dirty="0"/>
           </a:p>
@@ -4330,7 +4502,7 @@
                 <a:ea typeface="Calibri" pitchFamily="34" charset="-122"/>
                 <a:cs typeface="Calibri" pitchFamily="34" charset="-120"/>
               </a:rPr>
-              <a:t>Đề nghị đầu tiên có căn cứ (neo tâm lý); phản hồi đề nghị của đối phương bằng câu hỏi “dựa trên cơ sở nào?” thay vì đồng ý hay bác bỏ ngay.</a:t>
+              <a:t>Đề nghị đầu phải có căn cứ; hỏi lại “dựa trên cơ sở nào?”</a:t>
             </a:r>
             <a:endParaRPr lang="en-US" sz="1500" dirty="0"/>
           </a:p>
@@ -4417,7 +4589,7 @@
                 <a:ea typeface="Calibri" pitchFamily="34" charset="-122"/>
                 <a:cs typeface="Calibri" pitchFamily="34" charset="-120"/>
               </a:rPr>
-              <a:t>Không cho không bao giờ: “Nếu anh tăng số lượng lên 500, chúng tôi sẽ giảm 3%.” Nhượng bộ nhỏ dần để phát tín hiệu chạm giới hạn.</a:t>
+              <a:t>Không cho không bao giờ; nhượng bộ nhỏ dần</a:t>
             </a:r>
             <a:endParaRPr lang="en-US" sz="1500" dirty="0"/>
           </a:p>
@@ -4504,7 +4676,7 @@
                 <a:ea typeface="Calibri" pitchFamily="34" charset="-122"/>
                 <a:cs typeface="Calibri" pitchFamily="34" charset="-120"/>
               </a:rPr>
-              <a:t>Tạm nghỉ; đổi người – đổi vấn đề – đổi cách tiếp cận; quay về lợi ích gốc; đưa tiêu chí khách quan (giá thị trường, quy định) làm trọng tài.</a:t>
+              <a:t>Tạm nghỉ • đổi người, đổi vấn đề • lấy tiêu chí khách quan làm trọng tài</a:t>
             </a:r>
             <a:endParaRPr lang="en-US" sz="1500" dirty="0"/>
           </a:p>
@@ -4866,7 +5038,7 @@
                 <a:ea typeface="Calibri" pitchFamily="34" charset="-122"/>
                 <a:cs typeface="Calibri" pitchFamily="34" charset="-120"/>
               </a:rPr>
-              <a:t>Đối phương hỏi chi tiết triển khai, điều khoản thanh toán, thời gian giao hàng — tín hiệu sẵn sàng; tóm tắt thỏa thuận và đề nghị xác nhận.</a:t>
+              <a:t>Họ hỏi chi tiết triển khai, thanh toán, giao hàng — đó là tín hiệu</a:t>
             </a:r>
             <a:endParaRPr lang="en-US" sz="1500" dirty="0"/>
           </a:p>
@@ -4953,7 +5125,7 @@
                 <a:ea typeface="Calibri" pitchFamily="34" charset="-122"/>
                 <a:cs typeface="Calibri" pitchFamily="34" charset="-120"/>
               </a:rPr>
-              <a:t>Thỏa thuận miệng chưa phải kết thúc: lập biên bản ghi nhớ, soạn hợp đồng đủ điều khoản cơ bản — kỹ thuật soạn thảo học ở Chương 5 và phần thực hành.</a:t>
+              <a:t>Thỏa thuận miệng chưa phải kết thúc — phải thành văn bản</a:t>
             </a:r>
             <a:endParaRPr lang="en-US" sz="1500" dirty="0"/>
           </a:p>
@@ -5040,7 +5212,7 @@
                 <a:ea typeface="Calibri" pitchFamily="34" charset="-122"/>
                 <a:cs typeface="Calibri" pitchFamily="34" charset="-120"/>
               </a:rPr>
-              <a:t>Thực hiện đúng cam kết — uy tín cho lần đàm phán sau; giữ liên lạc với đối tác; họp nhóm rút kinh nghiệm: điều gì hiệu quả, điều gì cần làm khác.</a:t>
+              <a:t>Làm đúng cam kết • giữ liên lạc • họp rút kinh nghiệm</a:t>
             </a:r>
             <a:endParaRPr lang="en-US" sz="1500" dirty="0"/>
           </a:p>
@@ -5723,7 +5895,7 @@
                 <a:ea typeface="Calibri" pitchFamily="34" charset="-122"/>
                 <a:cs typeface="Calibri" pitchFamily="34" charset="-120"/>
               </a:rPr>
-              <a:t>Nghe nhiều hơn nói; hỏi mở để tìm lợi ích thật; im lặng đúng lúc — nhiều nhượng bộ xuất hiện chỉ vì đối phương không chịu được khoảng lặng.</a:t>
+              <a:t>Nghe nhiều hơn nói; im lặng đúng lúc cũng là một nước đi</a:t>
             </a:r>
             <a:endParaRPr lang="en-US" sz="1500" dirty="0"/>
           </a:p>
@@ -5810,7 +5982,7 @@
                 <a:ea typeface="Calibri" pitchFamily="34" charset="-122"/>
                 <a:cs typeface="Calibri" pitchFamily="34" charset="-120"/>
               </a:rPr>
-              <a:t>Nói bằng ngôn ngữ lợi ích của đối phương; kèm số liệu, tiền lệ, quy định khách quan thay vì tranh cãi cảm tính.</a:t>
+              <a:t>Nói bằng ngôn ngữ lợi ích của họ, kèm số liệu và tiền lệ</a:t>
             </a:r>
             <a:endParaRPr lang="en-US" sz="1500" dirty="0"/>
           </a:p>
@@ -5897,7 +6069,7 @@
                 <a:ea typeface="Calibri" pitchFamily="34" charset="-122"/>
                 <a:cs typeface="Calibri" pitchFamily="34" charset="-120"/>
               </a:rPr>
-              <a:t>Giữ bình tĩnh trước khiêu khích; tách con người khỏi vấn đề; tức giận là nhượng quyền kiểm soát cho đối phương.</a:t>
+              <a:t>Tức giận là nhượng quyền kiểm soát cho đối phương</a:t>
             </a:r>
             <a:endParaRPr lang="en-US" sz="1500" dirty="0"/>
           </a:p>
@@ -5984,7 +6156,7 @@
                 <a:ea typeface="Calibri" pitchFamily="34" charset="-122"/>
                 <a:cs typeface="Calibri" pitchFamily="34" charset="-120"/>
               </a:rPr>
-              <a:t>Phân vai trưởng đoàn – chuyên môn – ghi chép; thống nhất tín hiệu nội bộ; không bao giờ mâu thuẫn nội bộ trước mặt đối tác.</a:t>
+              <a:t>Phân vai rõ; không bao giờ mâu thuẫn nội bộ trước mặt đối tác</a:t>
             </a:r>
             <a:endParaRPr lang="en-US" sz="1500" dirty="0"/>
           </a:p>
@@ -6375,7 +6547,7 @@
                 <a:ea typeface="Calibri" pitchFamily="34" charset="-122"/>
                 <a:cs typeface="Calibri" pitchFamily="34" charset="-120"/>
               </a:rPr>
-              <a:t>mở màn bằng đề nghị cao/thấp bất thường để kéo kỳ vọng của ta — ứng phó: bám vào tiêu chí khách quan, đừng vội điều chỉnh mục tiêu.</a:t>
+              <a:t>đề nghị bất thường để kéo kỳ vọng → bám tiêu chí khách quan</a:t>
             </a:r>
             <a:endParaRPr lang="en-US" sz="1400" dirty="0"/>
           </a:p>
@@ -6491,7 +6663,7 @@
                 <a:ea typeface="Calibri" pitchFamily="34" charset="-122"/>
                 <a:cs typeface="Calibri" pitchFamily="34" charset="-120"/>
               </a:rPr>
-              <a:t>một người gay gắt, một người “dễ thương” ra tay cứu vãn — nhận diện và chỉ đàm phán trên nội dung.</a:t>
+              <a:t>một người gay gắt, một người dễ thương → chỉ bàn nội dung</a:t>
             </a:r>
             <a:endParaRPr lang="en-US" sz="1400" dirty="0"/>
           </a:p>
@@ -6607,7 +6779,7 @@
                 <a:ea typeface="Calibri" pitchFamily="34" charset="-122"/>
                 <a:cs typeface="Calibri" pitchFamily="34" charset="-120"/>
               </a:rPr>
-              <a:t>“chỉ còn hôm nay” để ép quyết định vội — kiểm chứng thực hư, sẵn sàng rời bàn nếu có BATNA.</a:t>
+              <a:t>“chỉ còn hôm nay” → kiểm chứng, sẵn sàng rời bàn</a:t>
             </a:r>
             <a:endParaRPr lang="en-US" sz="1400" dirty="0"/>
           </a:p>
@@ -6723,7 +6895,7 @@
                 <a:ea typeface="Calibri" pitchFamily="34" charset="-122"/>
                 <a:cs typeface="Calibri" pitchFamily="34" charset="-120"/>
               </a:rPr>
-              <a:t>đòi thêm từng chút nhỏ sau khi đã thỏa thuận — gói toàn bộ điều khoản lại: “điểm này mở thì cả gói mở”.</a:t>
+              <a:t>đòi thêm từng chút → gói cả điều khoản lại</a:t>
             </a:r>
             <a:endParaRPr lang="en-US" sz="1400" dirty="0"/>
           </a:p>
@@ -6839,7 +7011,7 @@
                 <a:ea typeface="Calibri" pitchFamily="34" charset="-122"/>
                 <a:cs typeface="Calibri" pitchFamily="34" charset="-120"/>
               </a:rPr>
-              <a:t>thêm yêu cầu ngay trước khi ký — bình tĩnh định giá yêu cầu đó và đòi đối ứng tương xứng.</a:t>
+              <a:t>thêm yêu cầu trước khi ký → đòi đối ứng tương xứng</a:t>
             </a:r>
             <a:endParaRPr lang="en-US" sz="1400" dirty="0"/>
           </a:p>
@@ -11454,7 +11626,7 @@
                 <a:ea typeface="Calibri" pitchFamily="34" charset="-122"/>
                 <a:cs typeface="Calibri" pitchFamily="34" charset="-120"/>
               </a:rPr>
-              <a:t>Đàm phán là quá trình các bên vừa có lợi ích chung, vừa có lợi ích xung đột, cùng trao đổi – thuyết phục để đi đến một thỏa thuận mà các bên chấp nhận được.</a:t>
+              <a:t>Các bên vừa có lợi ích chung vừa xung đột, cùng đi đến thỏa thuận</a:t>
             </a:r>
             <a:endParaRPr lang="en-US" sz="1500" dirty="0"/>
           </a:p>
@@ -11541,7 +11713,7 @@
                 <a:ea typeface="Calibri" pitchFamily="34" charset="-122"/>
                 <a:cs typeface="Calibri" pitchFamily="34" charset="-120"/>
               </a:rPr>
-              <a:t>Hợp tác để “chiếc bánh” tồn tại và lớn lên; cạnh tranh khi phân chia chiếc bánh — quên vế nào cũng thất bại.</a:t>
+              <a:t>Hợp tác để chiếc bánh lớn lên • cạnh tranh khi chia bánh</a:t>
             </a:r>
             <a:endParaRPr lang="en-US" sz="1500" dirty="0"/>
           </a:p>
@@ -11628,7 +11800,7 @@
                 <a:ea typeface="Calibri" pitchFamily="34" charset="-122"/>
                 <a:cs typeface="Calibri" pitchFamily="34" charset="-120"/>
               </a:rPr>
-              <a:t>Thông tin (ai hiểu đối phương hơn) • Thời gian (ai ít bị ép tiến độ hơn) • Thế lực (ai có nhiều lựa chọn thay thế hơn).</a:t>
+              <a:t>Thông tin • Thời gian • Thế lực</a:t>
             </a:r>
             <a:endParaRPr lang="en-US" sz="1500" dirty="0"/>
           </a:p>
@@ -12019,7 +12191,7 @@
                 <a:ea typeface="Calibri" pitchFamily="34" charset="-122"/>
                 <a:cs typeface="Calibri" pitchFamily="34" charset="-120"/>
               </a:rPr>
-              <a:t>mọi điều khoản cuối cùng đều quy về giá trị, chi phí, rủi ro của mỗi bên.</a:t>
+              <a:t>mọi điều khoản đều quy về giá trị, chi phí, rủi ro</a:t>
             </a:r>
             <a:endParaRPr lang="en-US" sz="1400" dirty="0"/>
           </a:p>
@@ -12135,7 +12307,7 @@
                 <a:ea typeface="Calibri" pitchFamily="34" charset="-122"/>
                 <a:cs typeface="Calibri" pitchFamily="34" charset="-120"/>
               </a:rPr>
-              <a:t>cần nhau để có thỏa thuận, nhưng mỗi bên luôn có phương án riêng của mình.</a:t>
+              <a:t>cần nhau, nhưng bên nào cũng có phương án riêng</a:t>
             </a:r>
             <a:endParaRPr lang="en-US" sz="1400" dirty="0"/>
           </a:p>
@@ -12251,7 +12423,7 @@
                 <a:ea typeface="Calibri" pitchFamily="34" charset="-122"/>
                 <a:cs typeface="Calibri" pitchFamily="34" charset="-120"/>
               </a:rPr>
-              <a:t>kết quả đàm phán chỉ an toàn khi thành hợp đồng đúng thể thức — cầu nối sang Chương 5.</a:t>
+              <a:t>chỉ an toàn khi thành hợp đồng đúng thể thức</a:t>
             </a:r>
             <a:endParaRPr lang="en-US" sz="1400" dirty="0"/>
           </a:p>
@@ -12367,7 +12539,7 @@
                 <a:ea typeface="Calibri" pitchFamily="34" charset="-122"/>
                 <a:cs typeface="Calibri" pitchFamily="34" charset="-120"/>
               </a:rPr>
-              <a:t>thời gian, thẩm quyền, ngân sách; nhà đàm phán giỏi biết rõ giới hạn của mình và ước lượng giới hạn đối phương.</a:t>
+              <a:t>thời gian, thẩm quyền, ngân sách — của cả hai bên</a:t>
             </a:r>
             <a:endParaRPr lang="en-US" sz="1400" dirty="0"/>
           </a:p>
@@ -12483,7 +12655,7 @@
                 <a:ea typeface="Calibri" pitchFamily="34" charset="-122"/>
                 <a:cs typeface="Calibri" pitchFamily="34" charset="-120"/>
               </a:rPr>
-              <a:t>phong cách đàm phán Á – Âu khác nhau; thương vụ một lần khác quan hệ hợp tác lâu dài.</a:t>
+              <a:t>thương vụ một lần khác hẳn quan hệ lâu dài</a:t>
             </a:r>
             <a:endParaRPr lang="en-US" sz="1400" dirty="0"/>
           </a:p>

--- a/slides/04-dam-phan.pptx
+++ b/slides/04-dam-phan.pptx
@@ -520,10 +520,18 @@
           <a:lstStyle/>
           <a:p>
             <a:r>
-              <a:rPr lang="en-US" dirty="0"/>
-              <a:t/>
-            </a:r>
-            <a:endParaRPr lang="en-US" dirty="0"/>
+              <a:t>MỞ ĐẦU (2 phút)</a:t>
+            </a:r>
+          </a:p>
+          <a:p>
+            <a:r>
+              <a:t>• Câu dẫn mạnh: "Trong kinh doanh, bạn không nhận được cái bạn xứng đáng — bạn nhận được cái bạn ĐÀM PHÁN ĐƯỢC."</a:t>
+            </a:r>
+          </a:p>
+          <a:p>
+            <a:r>
+              <a:t>• Hỏi lớp: "Ai từng mặc cả khi mua hàng? Đó đã là đàm phán rồi."''</a:t>
+            </a:r>
           </a:p>
         </p:txBody>
       </p:sp>
@@ -1538,22 +1546,7 @@
           <a:lstStyle/>
           <a:p>
             <a:r>
-              <a:t>TIẾN TRÌNH 5 GIAI ĐOẠN (2 phút)</a:t>
-            </a:r>
-          </a:p>
-          <a:p>
-            <a:r>
-              <a:t>• Đi lướt 5 giai đoạn, dừng lại ở giai đoạn 1.</a:t>
-            </a:r>
-          </a:p>
-          <a:p>
-            <a:r>
-              <a:t>• Nói con số: CHUẨN BỊ QUYẾT ĐỊNH 70% KẾT QUẢ.</a:t>
-            </a:r>
-          </a:p>
-          <a:p>
-            <a:r>
-              <a:t>• Câu chốt: "Không chuẩn bị chính là chuẩn bị để nhượng bộ."''</a:t>
+              <a:t>CHUYỂN MỤC (30 giây) — nhấn con số 70% ngay tại slide này.</a:t>
             </a:r>
           </a:p>
         </p:txBody>
@@ -2215,10 +2208,23 @@
           <a:lstStyle/>
           <a:p>
             <a:r>
-              <a:rPr lang="en-US" dirty="0"/>
-              <a:t/>
-            </a:r>
-            <a:endParaRPr lang="en-US" dirty="0"/>
+              <a:t>TIẾN TRÌNH 5 GIAI ĐOẠN (2 phút)</a:t>
+            </a:r>
+          </a:p>
+          <a:p>
+            <a:r>
+              <a:t>• Đi lướt 5 giai đoạn, dừng lại ở giai đoạn 1.</a:t>
+            </a:r>
+          </a:p>
+          <a:p>
+            <a:r>
+              <a:t>• Nói con số: CHUẨN BỊ QUYẾT ĐỊNH 70% KẾT QUẢ.</a:t>
+            </a:r>
+          </a:p>
+          <a:p>
+            <a:r>
+              <a:t>• Câu chốt: "Không chuẩn bị chính là chuẩn bị để nhượng bộ."''</a:t>
+            </a:r>
           </a:p>
         </p:txBody>
       </p:sp>
